--- a/docs/webinar-resources/Module2-BMC-American-System-Hamiltonian-OKRs.pptx
+++ b/docs/webinar-resources/Module2-BMC-American-System-Hamiltonian-OKRs.pptx
@@ -1833,13 +1833,6 @@
 <file path=ppt/slides/slide1.xml><?xml version="1.0" encoding="utf-8"?>
 <p:sld xmlns:a="http://schemas.openxmlformats.org/drawingml/2006/main" xmlns:r="http://schemas.openxmlformats.org/officeDocument/2006/relationships" xmlns:p="http://schemas.openxmlformats.org/presentationml/2006/main">
   <p:cSld name="Slide 1">
-    <p:bg>
-      <p:bgPr>
-        <a:solidFill>
-          <a:srgbClr val="111111"/>
-        </a:solidFill>
-      </p:bgPr>
-    </p:bg>
     <p:spTree>
       <p:nvGrpSpPr>
         <p:cNvPr id="1" name=""/>
@@ -1856,13 +1849,38 @@
       </p:grpSpPr>
       <p:sp>
         <p:nvSpPr>
-          <p:cNvPr id="2" name="Text 0"/>
-          <p:cNvSpPr/>
-          <p:nvPr/>
-        </p:nvSpPr>
-        <p:spPr>
-          <a:xfrm>
-            <a:off x="548640" y="1188720"/>
+          <p:cNvPr id="2" name="Shape 0"/>
+          <p:cNvSpPr/>
+          <p:nvPr/>
+        </p:nvSpPr>
+        <p:spPr>
+          <a:xfrm>
+            <a:off x="0" y="0"/>
+            <a:ext cx="9144000" cy="5143500"/>
+          </a:xfrm>
+          <a:prstGeom prst="rect">
+            <a:avLst/>
+          </a:prstGeom>
+          <a:solidFill>
+            <a:srgbClr val="111111"/>
+          </a:solidFill>
+          <a:ln w="12700">
+            <a:solidFill>
+              <a:srgbClr val="111111"/>
+            </a:solidFill>
+            <a:prstDash val="solid"/>
+          </a:ln>
+        </p:spPr>
+      </p:sp>
+      <p:sp>
+        <p:nvSpPr>
+          <p:cNvPr id="3" name="Text 1"/>
+          <p:cNvSpPr/>
+          <p:nvPr/>
+        </p:nvSpPr>
+        <p:spPr>
+          <a:xfrm>
+            <a:off x="548640" y="1143000"/>
             <a:ext cx="8046720" cy="320040"/>
           </a:xfrm>
           <a:prstGeom prst="rect">
@@ -1879,9 +1897,9 @@
               <a:buNone/>
             </a:pPr>
             <a:r>
-              <a:rPr lang="en-US" sz="1400" spc="300" kern="0" dirty="0">
-                <a:solidFill>
-                  <a:srgbClr val="AAAAAA"/>
+              <a:rPr lang="en-US" sz="1400" b="1" spc="200" kern="0" dirty="0">
+                <a:solidFill>
+                  <a:srgbClr val="C9A227"/>
                 </a:solidFill>
                 <a:latin typeface="Arial" pitchFamily="34" charset="0"/>
                 <a:ea typeface="Arial" pitchFamily="34" charset="-122"/>
@@ -1895,32 +1913,32 @@
       </p:sp>
       <p:sp>
         <p:nvSpPr>
-          <p:cNvPr id="3" name="Text 1"/>
-          <p:cNvSpPr/>
-          <p:nvPr/>
-        </p:nvSpPr>
-        <p:spPr>
-          <a:xfrm>
-            <a:off x="548640" y="1645920"/>
-            <a:ext cx="8046720" cy="1280160"/>
-          </a:xfrm>
-          <a:prstGeom prst="rect">
-            <a:avLst/>
-          </a:prstGeom>
-          <a:noFill/>
-          <a:ln/>
-        </p:spPr>
-        <p:txBody>
-          <a:bodyPr wrap="square" lIns="0" tIns="0" rIns="0" bIns="0" rtlCol="0" anchor="ctr"/>
-          <a:lstStyle/>
-          <a:p>
-            <a:pPr indent="0" marL="0">
-              <a:buNone/>
-            </a:pPr>
-            <a:r>
-              <a:rPr lang="en-US" sz="3200" b="1" dirty="0">
-                <a:solidFill>
-                  <a:srgbClr val="F5F5F5"/>
+          <p:cNvPr id="4" name="Text 2"/>
+          <p:cNvSpPr/>
+          <p:nvPr/>
+        </p:nvSpPr>
+        <p:spPr>
+          <a:xfrm>
+            <a:off x="548640" y="1600200"/>
+            <a:ext cx="8046720" cy="1097280"/>
+          </a:xfrm>
+          <a:prstGeom prst="rect">
+            <a:avLst/>
+          </a:prstGeom>
+          <a:noFill/>
+          <a:ln/>
+        </p:spPr>
+        <p:txBody>
+          <a:bodyPr wrap="square" lIns="0" tIns="0" rIns="0" bIns="0" rtlCol="0" anchor="ctr"/>
+          <a:lstStyle/>
+          <a:p>
+            <a:pPr indent="0" marL="0">
+              <a:buNone/>
+            </a:pPr>
+            <a:r>
+              <a:rPr lang="en-US" sz="2600" b="1" dirty="0">
+                <a:solidFill>
+                  <a:srgbClr val="FFFFFF"/>
                 </a:solidFill>
                 <a:latin typeface="Arial" pitchFamily="34" charset="0"/>
                 <a:ea typeface="Arial" pitchFamily="34" charset="-122"/>
@@ -1928,16 +1946,16 @@
               </a:rPr>
               <a:t>Updating Your OKRs</a:t>
             </a:r>
-            <a:endParaRPr lang="en-US" sz="3200" dirty="0"/>
-          </a:p>
-          <a:p>
-            <a:pPr indent="0" marL="0">
-              <a:buNone/>
-            </a:pPr>
-            <a:r>
-              <a:rPr lang="en-US" sz="3200" b="1" dirty="0">
-                <a:solidFill>
-                  <a:srgbClr val="F5F5F5"/>
+            <a:endParaRPr lang="en-US" sz="2600" dirty="0"/>
+          </a:p>
+          <a:p>
+            <a:pPr indent="0" marL="0">
+              <a:buNone/>
+            </a:pPr>
+            <a:r>
+              <a:rPr lang="en-US" sz="2600" b="1" dirty="0">
+                <a:solidFill>
+                  <a:srgbClr val="FFFFFF"/>
                 </a:solidFill>
                 <a:latin typeface="Arial" pitchFamily="34" charset="0"/>
                 <a:ea typeface="Arial" pitchFamily="34" charset="-122"/>
@@ -1945,38 +1963,63 @@
               </a:rPr>
               <a:t>for the Hamiltonian System</a:t>
             </a:r>
-            <a:endParaRPr lang="en-US" sz="3200" dirty="0"/>
-          </a:p>
-        </p:txBody>
-      </p:sp>
-      <p:sp>
-        <p:nvSpPr>
-          <p:cNvPr id="4" name="Text 2"/>
-          <p:cNvSpPr/>
-          <p:nvPr/>
-        </p:nvSpPr>
-        <p:spPr>
-          <a:xfrm>
-            <a:off x="548640" y="3108960"/>
-            <a:ext cx="8046720" cy="365760"/>
-          </a:xfrm>
-          <a:prstGeom prst="rect">
-            <a:avLst/>
-          </a:prstGeom>
-          <a:noFill/>
-          <a:ln/>
-        </p:spPr>
-        <p:txBody>
-          <a:bodyPr wrap="square" lIns="0" tIns="0" rIns="0" bIns="0" rtlCol="0" anchor="ctr"/>
-          <a:lstStyle/>
-          <a:p>
-            <a:pPr indent="0" marL="0">
-              <a:buNone/>
-            </a:pPr>
-            <a:r>
-              <a:rPr lang="en-US" sz="1800" dirty="0">
-                <a:solidFill>
-                  <a:srgbClr val="CCCCCC"/>
+            <a:endParaRPr lang="en-US" sz="2600" dirty="0"/>
+          </a:p>
+        </p:txBody>
+      </p:sp>
+      <p:sp>
+        <p:nvSpPr>
+          <p:cNvPr id="5" name="Shape 3"/>
+          <p:cNvSpPr/>
+          <p:nvPr/>
+        </p:nvSpPr>
+        <p:spPr>
+          <a:xfrm>
+            <a:off x="548640" y="2834640"/>
+            <a:ext cx="1645920" cy="54864"/>
+          </a:xfrm>
+          <a:prstGeom prst="rect">
+            <a:avLst/>
+          </a:prstGeom>
+          <a:solidFill>
+            <a:srgbClr val="C9A227"/>
+          </a:solidFill>
+          <a:ln w="12700">
+            <a:solidFill>
+              <a:srgbClr val="C9A227"/>
+            </a:solidFill>
+            <a:prstDash val="solid"/>
+          </a:ln>
+        </p:spPr>
+      </p:sp>
+      <p:sp>
+        <p:nvSpPr>
+          <p:cNvPr id="6" name="Text 4"/>
+          <p:cNvSpPr/>
+          <p:nvPr/>
+        </p:nvSpPr>
+        <p:spPr>
+          <a:xfrm>
+            <a:off x="548640" y="3063240"/>
+            <a:ext cx="8046720" cy="320040"/>
+          </a:xfrm>
+          <a:prstGeom prst="rect">
+            <a:avLst/>
+          </a:prstGeom>
+          <a:noFill/>
+          <a:ln/>
+        </p:spPr>
+        <p:txBody>
+          <a:bodyPr wrap="square" lIns="0" tIns="0" rIns="0" bIns="0" rtlCol="0" anchor="ctr"/>
+          <a:lstStyle/>
+          <a:p>
+            <a:pPr indent="0" marL="0">
+              <a:buNone/>
+            </a:pPr>
+            <a:r>
+              <a:rPr lang="en-US" sz="1500" dirty="0">
+                <a:solidFill>
+                  <a:srgbClr val="C8C8C8"/>
                 </a:solidFill>
                 <a:latin typeface="Arial" pitchFamily="34" charset="0"/>
                 <a:ea typeface="Arial" pitchFamily="34" charset="-122"/>
@@ -1984,19 +2027,19 @@
               </a:rPr>
               <a:t>Aligning Priorities with Sovereign American Capability</a:t>
             </a:r>
-            <a:endParaRPr lang="en-US" sz="1800" dirty="0"/>
-          </a:p>
-        </p:txBody>
-      </p:sp>
-      <p:sp>
-        <p:nvSpPr>
-          <p:cNvPr id="5" name="Text 3"/>
-          <p:cNvSpPr/>
-          <p:nvPr/>
-        </p:nvSpPr>
-        <p:spPr>
-          <a:xfrm>
-            <a:off x="548640" y="4114800"/>
+            <a:endParaRPr lang="en-US" sz="1500" dirty="0"/>
+          </a:p>
+        </p:txBody>
+      </p:sp>
+      <p:sp>
+        <p:nvSpPr>
+          <p:cNvPr id="7" name="Text 5"/>
+          <p:cNvSpPr/>
+          <p:nvPr/>
+        </p:nvSpPr>
+        <p:spPr>
+          <a:xfrm>
+            <a:off x="548640" y="4160520"/>
             <a:ext cx="8046720" cy="274320"/>
           </a:xfrm>
           <a:prstGeom prst="rect">
@@ -2013,9 +2056,9 @@
               <a:buNone/>
             </a:pPr>
             <a:r>
-              <a:rPr lang="en-US" sz="1400" dirty="0">
-                <a:solidFill>
-                  <a:srgbClr val="999999"/>
+              <a:rPr lang="en-US" sz="1300" dirty="0">
+                <a:solidFill>
+                  <a:srgbClr val="A0A0A0"/>
                 </a:solidFill>
                 <a:latin typeface="Arial" pitchFamily="34" charset="0"/>
                 <a:ea typeface="Arial" pitchFamily="34" charset="-122"/>
@@ -2023,7 +2066,7 @@
               </a:rPr>
               <a:t>Joshua Konkle  ·  Chief of Staff Strategist</a:t>
             </a:r>
-            <a:endParaRPr lang="en-US" sz="1400" dirty="0"/>
+            <a:endParaRPr lang="en-US" sz="1300" dirty="0"/>
           </a:p>
         </p:txBody>
       </p:sp>
@@ -2038,13 +2081,6 @@
 <file path=ppt/slides/slide10.xml><?xml version="1.0" encoding="utf-8"?>
 <p:sld xmlns:a="http://schemas.openxmlformats.org/drawingml/2006/main" xmlns:r="http://schemas.openxmlformats.org/officeDocument/2006/relationships" xmlns:p="http://schemas.openxmlformats.org/presentationml/2006/main">
   <p:cSld name="Slide 10">
-    <p:bg>
-      <p:bgPr>
-        <a:solidFill>
-          <a:srgbClr val="FFFFFF"/>
-        </a:solidFill>
-      </p:bgPr>
-    </p:bg>
     <p:spTree>
       <p:nvGrpSpPr>
         <p:cNvPr id="1" name=""/>
@@ -2061,32 +2097,57 @@
       </p:grpSpPr>
       <p:sp>
         <p:nvSpPr>
-          <p:cNvPr id="2" name="Text 0"/>
+          <p:cNvPr id="2" name="Shape 0"/>
+          <p:cNvSpPr/>
+          <p:nvPr/>
+        </p:nvSpPr>
+        <p:spPr>
+          <a:xfrm>
+            <a:off x="0" y="0"/>
+            <a:ext cx="9144000" cy="5143500"/>
+          </a:xfrm>
+          <a:prstGeom prst="rect">
+            <a:avLst/>
+          </a:prstGeom>
+          <a:solidFill>
+            <a:srgbClr val="FFFFFF"/>
+          </a:solidFill>
+          <a:ln w="12700">
+            <a:solidFill>
+              <a:srgbClr val="FFFFFF"/>
+            </a:solidFill>
+            <a:prstDash val="solid"/>
+          </a:ln>
+        </p:spPr>
+      </p:sp>
+      <p:sp>
+        <p:nvSpPr>
+          <p:cNvPr id="3" name="Text 1"/>
           <p:cNvSpPr/>
           <p:nvPr/>
         </p:nvSpPr>
         <p:spPr>
           <a:xfrm>
             <a:off x="457200" y="320040"/>
-            <a:ext cx="8229600" cy="457200"/>
-          </a:xfrm>
-          <a:prstGeom prst="rect">
-            <a:avLst/>
-          </a:prstGeom>
-          <a:noFill/>
-          <a:ln/>
-        </p:spPr>
-        <p:txBody>
-          <a:bodyPr wrap="square" lIns="0" tIns="0" rIns="0" bIns="0" rtlCol="0" anchor="ctr"/>
-          <a:lstStyle/>
-          <a:p>
-            <a:pPr indent="0" marL="0">
-              <a:buNone/>
-            </a:pPr>
-            <a:r>
-              <a:rPr lang="en-US" sz="2800" b="1" dirty="0">
-                <a:solidFill>
-                  <a:srgbClr val="1A1A1A"/>
+            <a:ext cx="8229600" cy="365760"/>
+          </a:xfrm>
+          <a:prstGeom prst="rect">
+            <a:avLst/>
+          </a:prstGeom>
+          <a:noFill/>
+          <a:ln/>
+        </p:spPr>
+        <p:txBody>
+          <a:bodyPr wrap="square" lIns="0" tIns="0" rIns="0" bIns="0" rtlCol="0" anchor="ctr"/>
+          <a:lstStyle/>
+          <a:p>
+            <a:pPr indent="0" marL="0">
+              <a:buNone/>
+            </a:pPr>
+            <a:r>
+              <a:rPr lang="en-US" sz="2400" b="1" dirty="0">
+                <a:solidFill>
+                  <a:srgbClr val="1B2A4A"/>
                 </a:solidFill>
                 <a:latin typeface="Arial" pitchFamily="34" charset="0"/>
                 <a:ea typeface="Arial" pitchFamily="34" charset="-122"/>
@@ -2094,79 +2155,103 @@
               </a:rPr>
               <a:t>Exercise</a:t>
             </a:r>
-            <a:endParaRPr lang="en-US" sz="2800" dirty="0"/>
-          </a:p>
-        </p:txBody>
-      </p:sp>
-      <p:sp>
-        <p:nvSpPr>
-          <p:cNvPr id="3" name="Shape 1"/>
-          <p:cNvSpPr/>
-          <p:nvPr/>
-        </p:nvSpPr>
-        <p:spPr>
-          <a:xfrm>
-            <a:off x="457200" y="1097280"/>
-            <a:ext cx="8229600" cy="3017520"/>
-          </a:xfrm>
-          <a:prstGeom prst="rect">
-            <a:avLst/>
+            <a:endParaRPr lang="en-US" sz="2400" dirty="0"/>
+          </a:p>
+        </p:txBody>
+      </p:sp>
+      <p:sp>
+        <p:nvSpPr>
+          <p:cNvPr id="4" name="Text 2"/>
+          <p:cNvSpPr/>
+          <p:nvPr/>
+        </p:nvSpPr>
+        <p:spPr>
+          <a:xfrm>
+            <a:off x="457200" y="1005840"/>
+            <a:ext cx="8229600" cy="1280160"/>
+          </a:xfrm>
+          <a:prstGeom prst="rect">
+            <a:avLst/>
+          </a:prstGeom>
+          <a:noFill/>
+          <a:ln/>
+        </p:spPr>
+        <p:txBody>
+          <a:bodyPr wrap="square" lIns="0" tIns="0" rIns="0" bIns="0" rtlCol="0" anchor="ctr"/>
+          <a:lstStyle/>
+          <a:p>
+            <a:pPr indent="0" marL="0">
+              <a:buNone/>
+            </a:pPr>
+            <a:r>
+              <a:rPr lang="en-US" sz="1600" dirty="0">
+                <a:solidFill>
+                  <a:srgbClr val="2A2A2A"/>
+                </a:solidFill>
+                <a:latin typeface="Arial" pitchFamily="34" charset="0"/>
+                <a:ea typeface="Arial" pitchFamily="34" charset="-122"/>
+                <a:cs typeface="Arial" pitchFamily="34" charset="-120"/>
+              </a:rPr>
+              <a:t>Take one current company or departmental OKR.</a:t>
+            </a:r>
+            <a:endParaRPr lang="en-US" sz="1600" dirty="0"/>
+          </a:p>
+          <a:p>
+            <a:pPr indent="0" marL="0">
+              <a:buNone/>
+            </a:pPr>
+            <a:r>
+              <a:rPr lang="en-US" sz="1600" dirty="0">
+                <a:solidFill>
+                  <a:srgbClr val="2A2A2A"/>
+                </a:solidFill>
+                <a:latin typeface="Arial" pitchFamily="34" charset="0"/>
+                <a:ea typeface="Arial" pitchFamily="34" charset="-122"/>
+                <a:cs typeface="Arial" pitchFamily="34" charset="-120"/>
+              </a:rPr>
+              <a:t>Re-write the Objective and its Key Results so the system now drives productive sovereignty rather than labor arbitrage or short-term financial metrics.</a:t>
+            </a:r>
+            <a:endParaRPr lang="en-US" sz="1600" dirty="0"/>
+          </a:p>
+        </p:txBody>
+      </p:sp>
+      <p:sp>
+        <p:nvSpPr>
+          <p:cNvPr id="5" name="Shape 3"/>
+          <p:cNvSpPr/>
+          <p:nvPr/>
+        </p:nvSpPr>
+        <p:spPr>
+          <a:xfrm>
+            <a:off x="457200" y="2560320"/>
+            <a:ext cx="8229600" cy="1463040"/>
+          </a:xfrm>
+          <a:prstGeom prst="roundRect">
+            <a:avLst>
+              <a:gd name="adj" fmla="val 5000"/>
+            </a:avLst>
           </a:prstGeom>
           <a:solidFill>
-            <a:srgbClr val="F7F7F7"/>
+            <a:srgbClr val="1B2A4A"/>
           </a:solidFill>
-          <a:ln/>
-        </p:spPr>
-      </p:sp>
-      <p:sp>
-        <p:nvSpPr>
-          <p:cNvPr id="4" name="Text 2"/>
-          <p:cNvSpPr/>
-          <p:nvPr/>
-        </p:nvSpPr>
-        <p:spPr>
-          <a:xfrm>
-            <a:off x="731520" y="1371600"/>
-            <a:ext cx="7680960" cy="457200"/>
-          </a:xfrm>
-          <a:prstGeom prst="rect">
-            <a:avLst/>
-          </a:prstGeom>
-          <a:noFill/>
-          <a:ln/>
-        </p:spPr>
-        <p:txBody>
-          <a:bodyPr wrap="square" lIns="0" tIns="0" rIns="0" bIns="0" rtlCol="0" anchor="ctr"/>
-          <a:lstStyle/>
-          <a:p>
-            <a:pPr indent="0" marL="0">
-              <a:buNone/>
-            </a:pPr>
-            <a:r>
-              <a:rPr lang="en-US" sz="1800" b="1" dirty="0">
-                <a:solidFill>
-                  <a:srgbClr val="1A1A1A"/>
-                </a:solidFill>
-                <a:latin typeface="Arial" pitchFamily="34" charset="0"/>
-                <a:ea typeface="Arial" pitchFamily="34" charset="-122"/>
-                <a:cs typeface="Arial" pitchFamily="34" charset="-120"/>
-              </a:rPr>
-              <a:t>Take one current company or departmental OKR.</a:t>
-            </a:r>
-            <a:endParaRPr lang="en-US" sz="1800" dirty="0"/>
-          </a:p>
-        </p:txBody>
-      </p:sp>
-      <p:sp>
-        <p:nvSpPr>
-          <p:cNvPr id="5" name="Text 3"/>
-          <p:cNvSpPr/>
-          <p:nvPr/>
-        </p:nvSpPr>
-        <p:spPr>
-          <a:xfrm>
-            <a:off x="731520" y="2011680"/>
-            <a:ext cx="7680960" cy="822960"/>
+          <a:ln w="12700">
+            <a:solidFill>
+              <a:srgbClr val="1B2A4A"/>
+            </a:solidFill>
+            <a:prstDash val="solid"/>
+          </a:ln>
+        </p:spPr>
+      </p:sp>
+      <p:sp>
+        <p:nvSpPr>
+          <p:cNvPr id="6" name="Text 4"/>
+          <p:cNvSpPr/>
+          <p:nvPr/>
+        </p:nvSpPr>
+        <p:spPr>
+          <a:xfrm>
+            <a:off x="731520" y="2880360"/>
+            <a:ext cx="7680960" cy="914400"/>
           </a:xfrm>
           <a:prstGeom prst="rect">
             <a:avLst/>
@@ -2184,13 +2269,13 @@
             <a:r>
               <a:rPr lang="en-US" sz="1600" dirty="0">
                 <a:solidFill>
-                  <a:srgbClr val="1A1A1A"/>
-                </a:solidFill>
-                <a:latin typeface="Arial" pitchFamily="34" charset="0"/>
-                <a:ea typeface="Arial" pitchFamily="34" charset="-122"/>
-                <a:cs typeface="Arial" pitchFamily="34" charset="-120"/>
-              </a:rPr>
-              <a:t>Re-write the Objective and its Key Results so the system now drives productive sovereignty rather than labor arbitrage or short-term financial metrics.</a:t>
+                  <a:srgbClr val="FFFFFF"/>
+                </a:solidFill>
+                <a:latin typeface="Arial" pitchFamily="34" charset="0"/>
+                <a:ea typeface="Arial" pitchFamily="34" charset="-122"/>
+                <a:cs typeface="Arial" pitchFamily="34" charset="-120"/>
+              </a:rPr>
+              <a:t>Ask: Does this OKR strengthen domestic capability and high-skill American roles, or does it simply optimize for cheaper or more flexible labor?</a:t>
             </a:r>
             <a:endParaRPr lang="en-US" sz="1600" dirty="0"/>
           </a:p>
@@ -2198,45 +2283,6 @@
       </p:sp>
       <p:sp>
         <p:nvSpPr>
-          <p:cNvPr id="6" name="Text 4"/>
-          <p:cNvSpPr/>
-          <p:nvPr/>
-        </p:nvSpPr>
-        <p:spPr>
-          <a:xfrm>
-            <a:off x="731520" y="3017520"/>
-            <a:ext cx="7680960" cy="731520"/>
-          </a:xfrm>
-          <a:prstGeom prst="rect">
-            <a:avLst/>
-          </a:prstGeom>
-          <a:noFill/>
-          <a:ln/>
-        </p:spPr>
-        <p:txBody>
-          <a:bodyPr wrap="square" lIns="0" tIns="0" rIns="0" bIns="0" rtlCol="0" anchor="ctr"/>
-          <a:lstStyle/>
-          <a:p>
-            <a:pPr indent="0" marL="0">
-              <a:buNone/>
-            </a:pPr>
-            <a:r>
-              <a:rPr lang="en-US" sz="1500" dirty="0">
-                <a:solidFill>
-                  <a:srgbClr val="555555"/>
-                </a:solidFill>
-                <a:latin typeface="Arial" pitchFamily="34" charset="0"/>
-                <a:ea typeface="Arial" pitchFamily="34" charset="-122"/>
-                <a:cs typeface="Arial" pitchFamily="34" charset="-120"/>
-              </a:rPr>
-              <a:t>Ask: Does this OKR strengthen domestic capability and high-skill American roles, or does it simply optimize for cheaper or more flexible labor?</a:t>
-            </a:r>
-            <a:endParaRPr lang="en-US" sz="1500" dirty="0"/>
-          </a:p>
-        </p:txBody>
-      </p:sp>
-      <p:sp>
-        <p:nvSpPr>
           <p:cNvPr id="7" name="Text 5"/>
           <p:cNvSpPr/>
           <p:nvPr/>
@@ -2244,25 +2290,25 @@
         <p:spPr>
           <a:xfrm>
             <a:off x="457200" y="4800600"/>
-            <a:ext cx="5943600" cy="228600"/>
-          </a:xfrm>
-          <a:prstGeom prst="rect">
-            <a:avLst/>
-          </a:prstGeom>
-          <a:noFill/>
-          <a:ln/>
-        </p:spPr>
-        <p:txBody>
-          <a:bodyPr wrap="square" lIns="0" tIns="0" rIns="0" bIns="0" rtlCol="0" anchor="ctr"/>
-          <a:lstStyle/>
-          <a:p>
-            <a:pPr indent="0" marL="0">
-              <a:buNone/>
-            </a:pPr>
-            <a:r>
-              <a:rPr lang="en-US" sz="1000" dirty="0">
-                <a:solidFill>
-                  <a:srgbClr val="555555"/>
+            <a:ext cx="5943600" cy="256032"/>
+          </a:xfrm>
+          <a:prstGeom prst="rect">
+            <a:avLst/>
+          </a:prstGeom>
+          <a:noFill/>
+          <a:ln/>
+        </p:spPr>
+        <p:txBody>
+          <a:bodyPr wrap="square" lIns="0" tIns="0" rIns="0" bIns="0" rtlCol="0" anchor="ctr"/>
+          <a:lstStyle/>
+          <a:p>
+            <a:pPr indent="0" marL="0">
+              <a:buNone/>
+            </a:pPr>
+            <a:r>
+              <a:rPr lang="en-US" sz="1100" dirty="0">
+                <a:solidFill>
+                  <a:srgbClr val="6A6A6A"/>
                 </a:solidFill>
                 <a:latin typeface="Arial" pitchFamily="34" charset="0"/>
                 <a:ea typeface="Arial" pitchFamily="34" charset="-122"/>
@@ -2270,7 +2316,7 @@
               </a:rPr>
               <a:t>Joshua Konkle  |  Chief of Staff Strategist</a:t>
             </a:r>
-            <a:endParaRPr lang="en-US" sz="1000" dirty="0"/>
+            <a:endParaRPr lang="en-US" sz="1100" dirty="0"/>
           </a:p>
         </p:txBody>
       </p:sp>
@@ -2282,8 +2328,8 @@
         </p:nvSpPr>
         <p:spPr>
           <a:xfrm>
-            <a:off x="7772400" y="4800600"/>
-            <a:ext cx="914400" cy="228600"/>
+            <a:off x="7498080" y="4800600"/>
+            <a:ext cx="1188720" cy="256032"/>
           </a:xfrm>
           <a:prstGeom prst="rect">
             <a:avLst/>
@@ -2299,9 +2345,9 @@
               <a:buNone/>
             </a:pPr>
             <a:r>
-              <a:rPr lang="en-US" sz="1000" dirty="0">
-                <a:solidFill>
-                  <a:srgbClr val="555555"/>
+              <a:rPr lang="en-US" sz="1100" dirty="0">
+                <a:solidFill>
+                  <a:srgbClr val="6A6A6A"/>
                 </a:solidFill>
                 <a:latin typeface="Arial" pitchFamily="34" charset="0"/>
                 <a:ea typeface="Arial" pitchFamily="34" charset="-122"/>
@@ -2309,7 +2355,7 @@
               </a:rPr>
               <a:t>10 / 12</a:t>
             </a:r>
-            <a:endParaRPr lang="en-US" sz="1000" dirty="0"/>
+            <a:endParaRPr lang="en-US" sz="1100" dirty="0"/>
           </a:p>
         </p:txBody>
       </p:sp>
@@ -2324,13 +2370,6 @@
 <file path=ppt/slides/slide11.xml><?xml version="1.0" encoding="utf-8"?>
 <p:sld xmlns:a="http://schemas.openxmlformats.org/drawingml/2006/main" xmlns:r="http://schemas.openxmlformats.org/officeDocument/2006/relationships" xmlns:p="http://schemas.openxmlformats.org/presentationml/2006/main">
   <p:cSld name="Slide 11">
-    <p:bg>
-      <p:bgPr>
-        <a:solidFill>
-          <a:srgbClr val="FFFFFF"/>
-        </a:solidFill>
-      </p:bgPr>
-    </p:bg>
     <p:spTree>
       <p:nvGrpSpPr>
         <p:cNvPr id="1" name=""/>
@@ -2347,32 +2386,57 @@
       </p:grpSpPr>
       <p:sp>
         <p:nvSpPr>
-          <p:cNvPr id="2" name="Text 0"/>
-          <p:cNvSpPr/>
-          <p:nvPr/>
-        </p:nvSpPr>
-        <p:spPr>
-          <a:xfrm>
-            <a:off x="457200" y="320040"/>
-            <a:ext cx="8229600" cy="457200"/>
-          </a:xfrm>
-          <a:prstGeom prst="rect">
-            <a:avLst/>
-          </a:prstGeom>
-          <a:noFill/>
-          <a:ln/>
-        </p:spPr>
-        <p:txBody>
-          <a:bodyPr wrap="square" lIns="0" tIns="0" rIns="0" bIns="0" rtlCol="0" anchor="ctr"/>
-          <a:lstStyle/>
-          <a:p>
-            <a:pPr indent="0" marL="0">
-              <a:buNone/>
-            </a:pPr>
-            <a:r>
-              <a:rPr lang="en-US" sz="2600" b="1" dirty="0">
-                <a:solidFill>
-                  <a:srgbClr val="1A1A1A"/>
+          <p:cNvPr id="2" name="Shape 0"/>
+          <p:cNvSpPr/>
+          <p:nvPr/>
+        </p:nvSpPr>
+        <p:spPr>
+          <a:xfrm>
+            <a:off x="0" y="0"/>
+            <a:ext cx="9144000" cy="5143500"/>
+          </a:xfrm>
+          <a:prstGeom prst="rect">
+            <a:avLst/>
+          </a:prstGeom>
+          <a:solidFill>
+            <a:srgbClr val="FFFFFF"/>
+          </a:solidFill>
+          <a:ln w="12700">
+            <a:solidFill>
+              <a:srgbClr val="FFFFFF"/>
+            </a:solidFill>
+            <a:prstDash val="solid"/>
+          </a:ln>
+        </p:spPr>
+      </p:sp>
+      <p:sp>
+        <p:nvSpPr>
+          <p:cNvPr id="3" name="Text 1"/>
+          <p:cNvSpPr/>
+          <p:nvPr/>
+        </p:nvSpPr>
+        <p:spPr>
+          <a:xfrm>
+            <a:off x="457200" y="256032"/>
+            <a:ext cx="8229600" cy="365760"/>
+          </a:xfrm>
+          <a:prstGeom prst="rect">
+            <a:avLst/>
+          </a:prstGeom>
+          <a:noFill/>
+          <a:ln/>
+        </p:spPr>
+        <p:txBody>
+          <a:bodyPr wrap="square" lIns="0" tIns="0" rIns="0" bIns="0" rtlCol="0" anchor="ctr"/>
+          <a:lstStyle/>
+          <a:p>
+            <a:pPr indent="0" marL="0">
+              <a:buNone/>
+            </a:pPr>
+            <a:r>
+              <a:rPr lang="en-US" sz="2400" b="1" dirty="0">
+                <a:solidFill>
+                  <a:srgbClr val="1B2A4A"/>
                 </a:solidFill>
                 <a:latin typeface="Arial" pitchFamily="34" charset="0"/>
                 <a:ea typeface="Arial" pitchFamily="34" charset="-122"/>
@@ -2380,58 +2444,65 @@
               </a:rPr>
               <a:t>Three Highest-Leverage Moves</a:t>
             </a:r>
-            <a:endParaRPr lang="en-US" sz="2600" dirty="0"/>
-          </a:p>
-        </p:txBody>
-      </p:sp>
-      <p:sp>
-        <p:nvSpPr>
-          <p:cNvPr id="3" name="Shape 1"/>
-          <p:cNvSpPr/>
-          <p:nvPr/>
-        </p:nvSpPr>
-        <p:spPr>
-          <a:xfrm>
-            <a:off x="457200" y="1051560"/>
-            <a:ext cx="640080" cy="640080"/>
-          </a:xfrm>
-          <a:prstGeom prst="ellipse">
-            <a:avLst/>
+            <a:endParaRPr lang="en-US" sz="2400" dirty="0"/>
+          </a:p>
+        </p:txBody>
+      </p:sp>
+      <p:sp>
+        <p:nvSpPr>
+          <p:cNvPr id="4" name="Shape 2"/>
+          <p:cNvSpPr/>
+          <p:nvPr/>
+        </p:nvSpPr>
+        <p:spPr>
+          <a:xfrm>
+            <a:off x="457200" y="868680"/>
+            <a:ext cx="8229600" cy="960120"/>
+          </a:xfrm>
+          <a:prstGeom prst="roundRect">
+            <a:avLst>
+              <a:gd name="adj" fmla="val 7619"/>
+            </a:avLst>
           </a:prstGeom>
           <a:solidFill>
-            <a:srgbClr val="1A1A1A"/>
+            <a:srgbClr val="1B2A4A"/>
           </a:solidFill>
-          <a:ln/>
-        </p:spPr>
-      </p:sp>
-      <p:sp>
-        <p:nvSpPr>
-          <p:cNvPr id="4" name="Text 2"/>
-          <p:cNvSpPr/>
-          <p:nvPr/>
-        </p:nvSpPr>
-        <p:spPr>
-          <a:xfrm>
-            <a:off x="457200" y="1051560"/>
-            <a:ext cx="640080" cy="640080"/>
-          </a:xfrm>
-          <a:prstGeom prst="rect">
-            <a:avLst/>
-          </a:prstGeom>
-          <a:noFill/>
-          <a:ln/>
-        </p:spPr>
-        <p:txBody>
-          <a:bodyPr wrap="square" lIns="0" tIns="0" rIns="0" bIns="0" rtlCol="0" anchor="ctr"/>
-          <a:lstStyle/>
-          <a:p>
-            <a:pPr algn="ctr" indent="0" marL="0">
+          <a:ln w="12700">
+            <a:solidFill>
+              <a:srgbClr val="1B2A4A"/>
+            </a:solidFill>
+            <a:prstDash val="solid"/>
+          </a:ln>
+        </p:spPr>
+      </p:sp>
+      <p:sp>
+        <p:nvSpPr>
+          <p:cNvPr id="5" name="Text 3"/>
+          <p:cNvSpPr/>
+          <p:nvPr/>
+        </p:nvSpPr>
+        <p:spPr>
+          <a:xfrm>
+            <a:off x="640080" y="1124712"/>
+            <a:ext cx="457200" cy="411480"/>
+          </a:xfrm>
+          <a:prstGeom prst="rect">
+            <a:avLst/>
+          </a:prstGeom>
+          <a:noFill/>
+          <a:ln/>
+        </p:spPr>
+        <p:txBody>
+          <a:bodyPr wrap="square" lIns="0" tIns="0" rIns="0" bIns="0" rtlCol="0" anchor="ctr"/>
+          <a:lstStyle/>
+          <a:p>
+            <a:pPr indent="0" marL="0">
               <a:buNone/>
             </a:pPr>
             <a:r>
               <a:rPr lang="en-US" sz="2200" b="1" dirty="0">
                 <a:solidFill>
-                  <a:srgbClr val="F5F5F5"/>
+                  <a:srgbClr val="C9A227"/>
                 </a:solidFill>
                 <a:latin typeface="Arial" pitchFamily="34" charset="0"/>
                 <a:ea typeface="Arial" pitchFamily="34" charset="-122"/>
@@ -2445,32 +2516,32 @@
       </p:sp>
       <p:sp>
         <p:nvSpPr>
-          <p:cNvPr id="5" name="Text 3"/>
-          <p:cNvSpPr/>
-          <p:nvPr/>
-        </p:nvSpPr>
-        <p:spPr>
-          <a:xfrm>
-            <a:off x="1371600" y="1051560"/>
-            <a:ext cx="7132320" cy="822960"/>
-          </a:xfrm>
-          <a:prstGeom prst="rect">
-            <a:avLst/>
-          </a:prstGeom>
-          <a:noFill/>
-          <a:ln/>
-        </p:spPr>
-        <p:txBody>
-          <a:bodyPr wrap="square" lIns="0" tIns="0" rIns="0" bIns="0" rtlCol="0" anchor="ctr"/>
-          <a:lstStyle/>
-          <a:p>
-            <a:pPr indent="0" marL="0">
-              <a:buNone/>
-            </a:pPr>
-            <a:r>
-              <a:rPr lang="en-US" sz="1500" dirty="0">
-                <a:solidFill>
-                  <a:srgbClr val="1A1A1A"/>
+          <p:cNvPr id="6" name="Text 4"/>
+          <p:cNvSpPr/>
+          <p:nvPr/>
+        </p:nvSpPr>
+        <p:spPr>
+          <a:xfrm>
+            <a:off x="1280160" y="1051560"/>
+            <a:ext cx="7132320" cy="640080"/>
+          </a:xfrm>
+          <a:prstGeom prst="rect">
+            <a:avLst/>
+          </a:prstGeom>
+          <a:noFill/>
+          <a:ln/>
+        </p:spPr>
+        <p:txBody>
+          <a:bodyPr wrap="square" lIns="0" tIns="0" rIns="0" bIns="0" rtlCol="0" anchor="ctr"/>
+          <a:lstStyle/>
+          <a:p>
+            <a:pPr indent="0" marL="0">
+              <a:buNone/>
+            </a:pPr>
+            <a:r>
+              <a:rPr lang="en-US" sz="1400" dirty="0">
+                <a:solidFill>
+                  <a:srgbClr val="FFFFFF"/>
                 </a:solidFill>
                 <a:latin typeface="Arial" pitchFamily="34" charset="0"/>
                 <a:ea typeface="Arial" pitchFamily="34" charset="-122"/>
@@ -2478,58 +2549,65 @@
               </a:rPr>
               <a:t>Audit your current top-level OKRs and identify which ones still optimize for labor arbitrage or pure cost extraction.</a:t>
             </a:r>
-            <a:endParaRPr lang="en-US" sz="1500" dirty="0"/>
-          </a:p>
-        </p:txBody>
-      </p:sp>
-      <p:sp>
-        <p:nvSpPr>
-          <p:cNvPr id="6" name="Shape 4"/>
-          <p:cNvSpPr/>
-          <p:nvPr/>
-        </p:nvSpPr>
-        <p:spPr>
-          <a:xfrm>
-            <a:off x="457200" y="2103120"/>
-            <a:ext cx="640080" cy="640080"/>
-          </a:xfrm>
-          <a:prstGeom prst="ellipse">
-            <a:avLst/>
+            <a:endParaRPr lang="en-US" sz="1400" dirty="0"/>
+          </a:p>
+        </p:txBody>
+      </p:sp>
+      <p:sp>
+        <p:nvSpPr>
+          <p:cNvPr id="7" name="Shape 5"/>
+          <p:cNvSpPr/>
+          <p:nvPr/>
+        </p:nvSpPr>
+        <p:spPr>
+          <a:xfrm>
+            <a:off x="457200" y="1965960"/>
+            <a:ext cx="8229600" cy="960120"/>
+          </a:xfrm>
+          <a:prstGeom prst="roundRect">
+            <a:avLst>
+              <a:gd name="adj" fmla="val 7619"/>
+            </a:avLst>
           </a:prstGeom>
           <a:solidFill>
-            <a:srgbClr val="1A1A1A"/>
+            <a:srgbClr val="1B2A4A"/>
           </a:solidFill>
-          <a:ln/>
-        </p:spPr>
-      </p:sp>
-      <p:sp>
-        <p:nvSpPr>
-          <p:cNvPr id="7" name="Text 5"/>
-          <p:cNvSpPr/>
-          <p:nvPr/>
-        </p:nvSpPr>
-        <p:spPr>
-          <a:xfrm>
-            <a:off x="457200" y="2103120"/>
-            <a:ext cx="640080" cy="640080"/>
-          </a:xfrm>
-          <a:prstGeom prst="rect">
-            <a:avLst/>
-          </a:prstGeom>
-          <a:noFill/>
-          <a:ln/>
-        </p:spPr>
-        <p:txBody>
-          <a:bodyPr wrap="square" lIns="0" tIns="0" rIns="0" bIns="0" rtlCol="0" anchor="ctr"/>
-          <a:lstStyle/>
-          <a:p>
-            <a:pPr algn="ctr" indent="0" marL="0">
+          <a:ln w="12700">
+            <a:solidFill>
+              <a:srgbClr val="1B2A4A"/>
+            </a:solidFill>
+            <a:prstDash val="solid"/>
+          </a:ln>
+        </p:spPr>
+      </p:sp>
+      <p:sp>
+        <p:nvSpPr>
+          <p:cNvPr id="8" name="Text 6"/>
+          <p:cNvSpPr/>
+          <p:nvPr/>
+        </p:nvSpPr>
+        <p:spPr>
+          <a:xfrm>
+            <a:off x="640080" y="2221992"/>
+            <a:ext cx="457200" cy="411480"/>
+          </a:xfrm>
+          <a:prstGeom prst="rect">
+            <a:avLst/>
+          </a:prstGeom>
+          <a:noFill/>
+          <a:ln/>
+        </p:spPr>
+        <p:txBody>
+          <a:bodyPr wrap="square" lIns="0" tIns="0" rIns="0" bIns="0" rtlCol="0" anchor="ctr"/>
+          <a:lstStyle/>
+          <a:p>
+            <a:pPr indent="0" marL="0">
               <a:buNone/>
             </a:pPr>
             <a:r>
               <a:rPr lang="en-US" sz="2200" b="1" dirty="0">
                 <a:solidFill>
-                  <a:srgbClr val="F5F5F5"/>
+                  <a:srgbClr val="C9A227"/>
                 </a:solidFill>
                 <a:latin typeface="Arial" pitchFamily="34" charset="0"/>
                 <a:ea typeface="Arial" pitchFamily="34" charset="-122"/>
@@ -2543,32 +2621,32 @@
       </p:sp>
       <p:sp>
         <p:nvSpPr>
-          <p:cNvPr id="8" name="Text 6"/>
-          <p:cNvSpPr/>
-          <p:nvPr/>
-        </p:nvSpPr>
-        <p:spPr>
-          <a:xfrm>
-            <a:off x="1371600" y="2103120"/>
-            <a:ext cx="7132320" cy="822960"/>
-          </a:xfrm>
-          <a:prstGeom prst="rect">
-            <a:avLst/>
-          </a:prstGeom>
-          <a:noFill/>
-          <a:ln/>
-        </p:spPr>
-        <p:txBody>
-          <a:bodyPr wrap="square" lIns="0" tIns="0" rIns="0" bIns="0" rtlCol="0" anchor="ctr"/>
-          <a:lstStyle/>
-          <a:p>
-            <a:pPr indent="0" marL="0">
-              <a:buNone/>
-            </a:pPr>
-            <a:r>
-              <a:rPr lang="en-US" sz="1500" dirty="0">
-                <a:solidFill>
-                  <a:srgbClr val="1A1A1A"/>
+          <p:cNvPr id="9" name="Text 7"/>
+          <p:cNvSpPr/>
+          <p:nvPr/>
+        </p:nvSpPr>
+        <p:spPr>
+          <a:xfrm>
+            <a:off x="1280160" y="2148840"/>
+            <a:ext cx="7132320" cy="640080"/>
+          </a:xfrm>
+          <a:prstGeom prst="rect">
+            <a:avLst/>
+          </a:prstGeom>
+          <a:noFill/>
+          <a:ln/>
+        </p:spPr>
+        <p:txBody>
+          <a:bodyPr wrap="square" lIns="0" tIns="0" rIns="0" bIns="0" rtlCol="0" anchor="ctr"/>
+          <a:lstStyle/>
+          <a:p>
+            <a:pPr indent="0" marL="0">
+              <a:buNone/>
+            </a:pPr>
+            <a:r>
+              <a:rPr lang="en-US" sz="1400" dirty="0">
+                <a:solidFill>
+                  <a:srgbClr val="FFFFFF"/>
                 </a:solidFill>
                 <a:latin typeface="Arial" pitchFamily="34" charset="0"/>
                 <a:ea typeface="Arial" pitchFamily="34" charset="-122"/>
@@ -2576,58 +2654,65 @@
               </a:rPr>
               <a:t>Re-write at least one major OKR so the system explicitly rewards domestic capability, American workforce development, and innovation-driven productivity.</a:t>
             </a:r>
-            <a:endParaRPr lang="en-US" sz="1500" dirty="0"/>
-          </a:p>
-        </p:txBody>
-      </p:sp>
-      <p:sp>
-        <p:nvSpPr>
-          <p:cNvPr id="9" name="Shape 7"/>
-          <p:cNvSpPr/>
-          <p:nvPr/>
-        </p:nvSpPr>
-        <p:spPr>
-          <a:xfrm>
-            <a:off x="457200" y="3154680"/>
-            <a:ext cx="640080" cy="640080"/>
-          </a:xfrm>
-          <a:prstGeom prst="ellipse">
-            <a:avLst/>
+            <a:endParaRPr lang="en-US" sz="1400" dirty="0"/>
+          </a:p>
+        </p:txBody>
+      </p:sp>
+      <p:sp>
+        <p:nvSpPr>
+          <p:cNvPr id="10" name="Shape 8"/>
+          <p:cNvSpPr/>
+          <p:nvPr/>
+        </p:nvSpPr>
+        <p:spPr>
+          <a:xfrm>
+            <a:off x="457200" y="3063240"/>
+            <a:ext cx="8229600" cy="960120"/>
+          </a:xfrm>
+          <a:prstGeom prst="roundRect">
+            <a:avLst>
+              <a:gd name="adj" fmla="val 7619"/>
+            </a:avLst>
           </a:prstGeom>
           <a:solidFill>
-            <a:srgbClr val="1A1A1A"/>
+            <a:srgbClr val="1B2A4A"/>
           </a:solidFill>
-          <a:ln/>
-        </p:spPr>
-      </p:sp>
-      <p:sp>
-        <p:nvSpPr>
-          <p:cNvPr id="10" name="Text 8"/>
-          <p:cNvSpPr/>
-          <p:nvPr/>
-        </p:nvSpPr>
-        <p:spPr>
-          <a:xfrm>
-            <a:off x="457200" y="3154680"/>
-            <a:ext cx="640080" cy="640080"/>
-          </a:xfrm>
-          <a:prstGeom prst="rect">
-            <a:avLst/>
-          </a:prstGeom>
-          <a:noFill/>
-          <a:ln/>
-        </p:spPr>
-        <p:txBody>
-          <a:bodyPr wrap="square" lIns="0" tIns="0" rIns="0" bIns="0" rtlCol="0" anchor="ctr"/>
-          <a:lstStyle/>
-          <a:p>
-            <a:pPr algn="ctr" indent="0" marL="0">
+          <a:ln w="12700">
+            <a:solidFill>
+              <a:srgbClr val="1B2A4A"/>
+            </a:solidFill>
+            <a:prstDash val="solid"/>
+          </a:ln>
+        </p:spPr>
+      </p:sp>
+      <p:sp>
+        <p:nvSpPr>
+          <p:cNvPr id="11" name="Text 9"/>
+          <p:cNvSpPr/>
+          <p:nvPr/>
+        </p:nvSpPr>
+        <p:spPr>
+          <a:xfrm>
+            <a:off x="640080" y="3319272"/>
+            <a:ext cx="457200" cy="411480"/>
+          </a:xfrm>
+          <a:prstGeom prst="rect">
+            <a:avLst/>
+          </a:prstGeom>
+          <a:noFill/>
+          <a:ln/>
+        </p:spPr>
+        <p:txBody>
+          <a:bodyPr wrap="square" lIns="0" tIns="0" rIns="0" bIns="0" rtlCol="0" anchor="ctr"/>
+          <a:lstStyle/>
+          <a:p>
+            <a:pPr indent="0" marL="0">
               <a:buNone/>
             </a:pPr>
             <a:r>
               <a:rPr lang="en-US" sz="2200" b="1" dirty="0">
                 <a:solidFill>
-                  <a:srgbClr val="F5F5F5"/>
+                  <a:srgbClr val="C9A227"/>
                 </a:solidFill>
                 <a:latin typeface="Arial" pitchFamily="34" charset="0"/>
                 <a:ea typeface="Arial" pitchFamily="34" charset="-122"/>
@@ -2641,32 +2726,32 @@
       </p:sp>
       <p:sp>
         <p:nvSpPr>
-          <p:cNvPr id="11" name="Text 9"/>
-          <p:cNvSpPr/>
-          <p:nvPr/>
-        </p:nvSpPr>
-        <p:spPr>
-          <a:xfrm>
-            <a:off x="1371600" y="3154680"/>
-            <a:ext cx="7132320" cy="822960"/>
-          </a:xfrm>
-          <a:prstGeom prst="rect">
-            <a:avLst/>
-          </a:prstGeom>
-          <a:noFill/>
-          <a:ln/>
-        </p:spPr>
-        <p:txBody>
-          <a:bodyPr wrap="square" lIns="0" tIns="0" rIns="0" bIns="0" rtlCol="0" anchor="ctr"/>
-          <a:lstStyle/>
-          <a:p>
-            <a:pPr indent="0" marL="0">
-              <a:buNone/>
-            </a:pPr>
-            <a:r>
-              <a:rPr lang="en-US" sz="1500" dirty="0">
-                <a:solidFill>
-                  <a:srgbClr val="1A1A1A"/>
+          <p:cNvPr id="12" name="Text 10"/>
+          <p:cNvSpPr/>
+          <p:nvPr/>
+        </p:nvSpPr>
+        <p:spPr>
+          <a:xfrm>
+            <a:off x="1280160" y="3246120"/>
+            <a:ext cx="7132320" cy="640080"/>
+          </a:xfrm>
+          <a:prstGeom prst="rect">
+            <a:avLst/>
+          </a:prstGeom>
+          <a:noFill/>
+          <a:ln/>
+        </p:spPr>
+        <p:txBody>
+          <a:bodyPr wrap="square" lIns="0" tIns="0" rIns="0" bIns="0" rtlCol="0" anchor="ctr"/>
+          <a:lstStyle/>
+          <a:p>
+            <a:pPr indent="0" marL="0">
+              <a:buNone/>
+            </a:pPr>
+            <a:r>
+              <a:rPr lang="en-US" sz="1400" dirty="0">
+                <a:solidFill>
+                  <a:srgbClr val="FFFFFF"/>
                 </a:solidFill>
                 <a:latin typeface="Arial" pitchFamily="34" charset="0"/>
                 <a:ea typeface="Arial" pitchFamily="34" charset="-122"/>
@@ -2674,38 +2759,38 @@
               </a:rPr>
               <a:t>Align the redesigned OKRs with the Business Model Canvas updates covered in Module 1.</a:t>
             </a:r>
-            <a:endParaRPr lang="en-US" sz="1500" dirty="0"/>
-          </a:p>
-        </p:txBody>
-      </p:sp>
-      <p:sp>
-        <p:nvSpPr>
-          <p:cNvPr id="12" name="Text 10"/>
+            <a:endParaRPr lang="en-US" sz="1400" dirty="0"/>
+          </a:p>
+        </p:txBody>
+      </p:sp>
+      <p:sp>
+        <p:nvSpPr>
+          <p:cNvPr id="13" name="Text 11"/>
           <p:cNvSpPr/>
           <p:nvPr/>
         </p:nvSpPr>
         <p:spPr>
           <a:xfrm>
             <a:off x="457200" y="4800600"/>
-            <a:ext cx="5943600" cy="228600"/>
-          </a:xfrm>
-          <a:prstGeom prst="rect">
-            <a:avLst/>
-          </a:prstGeom>
-          <a:noFill/>
-          <a:ln/>
-        </p:spPr>
-        <p:txBody>
-          <a:bodyPr wrap="square" lIns="0" tIns="0" rIns="0" bIns="0" rtlCol="0" anchor="ctr"/>
-          <a:lstStyle/>
-          <a:p>
-            <a:pPr indent="0" marL="0">
-              <a:buNone/>
-            </a:pPr>
-            <a:r>
-              <a:rPr lang="en-US" sz="1000" dirty="0">
-                <a:solidFill>
-                  <a:srgbClr val="555555"/>
+            <a:ext cx="5943600" cy="256032"/>
+          </a:xfrm>
+          <a:prstGeom prst="rect">
+            <a:avLst/>
+          </a:prstGeom>
+          <a:noFill/>
+          <a:ln/>
+        </p:spPr>
+        <p:txBody>
+          <a:bodyPr wrap="square" lIns="0" tIns="0" rIns="0" bIns="0" rtlCol="0" anchor="ctr"/>
+          <a:lstStyle/>
+          <a:p>
+            <a:pPr indent="0" marL="0">
+              <a:buNone/>
+            </a:pPr>
+            <a:r>
+              <a:rPr lang="en-US" sz="1100" dirty="0">
+                <a:solidFill>
+                  <a:srgbClr val="6A6A6A"/>
                 </a:solidFill>
                 <a:latin typeface="Arial" pitchFamily="34" charset="0"/>
                 <a:ea typeface="Arial" pitchFamily="34" charset="-122"/>
@@ -2713,20 +2798,20 @@
               </a:rPr>
               <a:t>Joshua Konkle  |  Chief of Staff Strategist</a:t>
             </a:r>
-            <a:endParaRPr lang="en-US" sz="1000" dirty="0"/>
-          </a:p>
-        </p:txBody>
-      </p:sp>
-      <p:sp>
-        <p:nvSpPr>
-          <p:cNvPr id="13" name="Text 11"/>
-          <p:cNvSpPr/>
-          <p:nvPr/>
-        </p:nvSpPr>
-        <p:spPr>
-          <a:xfrm>
-            <a:off x="7772400" y="4800600"/>
-            <a:ext cx="914400" cy="228600"/>
+            <a:endParaRPr lang="en-US" sz="1100" dirty="0"/>
+          </a:p>
+        </p:txBody>
+      </p:sp>
+      <p:sp>
+        <p:nvSpPr>
+          <p:cNvPr id="14" name="Text 12"/>
+          <p:cNvSpPr/>
+          <p:nvPr/>
+        </p:nvSpPr>
+        <p:spPr>
+          <a:xfrm>
+            <a:off x="7498080" y="4800600"/>
+            <a:ext cx="1188720" cy="256032"/>
           </a:xfrm>
           <a:prstGeom prst="rect">
             <a:avLst/>
@@ -2742,9 +2827,9 @@
               <a:buNone/>
             </a:pPr>
             <a:r>
-              <a:rPr lang="en-US" sz="1000" dirty="0">
-                <a:solidFill>
-                  <a:srgbClr val="555555"/>
+              <a:rPr lang="en-US" sz="1100" dirty="0">
+                <a:solidFill>
+                  <a:srgbClr val="6A6A6A"/>
                 </a:solidFill>
                 <a:latin typeface="Arial" pitchFamily="34" charset="0"/>
                 <a:ea typeface="Arial" pitchFamily="34" charset="-122"/>
@@ -2752,7 +2837,7 @@
               </a:rPr>
               <a:t>11 / 12</a:t>
             </a:r>
-            <a:endParaRPr lang="en-US" sz="1000" dirty="0"/>
+            <a:endParaRPr lang="en-US" sz="1100" dirty="0"/>
           </a:p>
         </p:txBody>
       </p:sp>
@@ -2767,13 +2852,6 @@
 <file path=ppt/slides/slide12.xml><?xml version="1.0" encoding="utf-8"?>
 <p:sld xmlns:a="http://schemas.openxmlformats.org/drawingml/2006/main" xmlns:r="http://schemas.openxmlformats.org/officeDocument/2006/relationships" xmlns:p="http://schemas.openxmlformats.org/presentationml/2006/main">
   <p:cSld name="Slide 12">
-    <p:bg>
-      <p:bgPr>
-        <a:solidFill>
-          <a:srgbClr val="111111"/>
-        </a:solidFill>
-      </p:bgPr>
-    </p:bg>
     <p:spTree>
       <p:nvGrpSpPr>
         <p:cNvPr id="1" name=""/>
@@ -2790,13 +2868,38 @@
       </p:grpSpPr>
       <p:sp>
         <p:nvSpPr>
-          <p:cNvPr id="2" name="Text 0"/>
-          <p:cNvSpPr/>
-          <p:nvPr/>
-        </p:nvSpPr>
-        <p:spPr>
-          <a:xfrm>
-            <a:off x="548640" y="731520"/>
+          <p:cNvPr id="2" name="Shape 0"/>
+          <p:cNvSpPr/>
+          <p:nvPr/>
+        </p:nvSpPr>
+        <p:spPr>
+          <a:xfrm>
+            <a:off x="0" y="0"/>
+            <a:ext cx="9144000" cy="5143500"/>
+          </a:xfrm>
+          <a:prstGeom prst="rect">
+            <a:avLst/>
+          </a:prstGeom>
+          <a:solidFill>
+            <a:srgbClr val="111111"/>
+          </a:solidFill>
+          <a:ln w="12700">
+            <a:solidFill>
+              <a:srgbClr val="111111"/>
+            </a:solidFill>
+            <a:prstDash val="solid"/>
+          </a:ln>
+        </p:spPr>
+      </p:sp>
+      <p:sp>
+        <p:nvSpPr>
+          <p:cNvPr id="3" name="Text 1"/>
+          <p:cNvSpPr/>
+          <p:nvPr/>
+        </p:nvSpPr>
+        <p:spPr>
+          <a:xfrm>
+            <a:off x="548640" y="822960"/>
             <a:ext cx="8046720" cy="365760"/>
           </a:xfrm>
           <a:prstGeom prst="rect">
@@ -2813,15 +2916,174 @@
               <a:buNone/>
             </a:pPr>
             <a:r>
-              <a:rPr lang="en-US" sz="1600" dirty="0">
-                <a:solidFill>
-                  <a:srgbClr val="AAAAAA"/>
-                </a:solidFill>
-                <a:latin typeface="Arial" pitchFamily="34" charset="0"/>
-                <a:ea typeface="Arial" pitchFamily="34" charset="-122"/>
-                <a:cs typeface="Arial" pitchFamily="34" charset="-120"/>
-              </a:rPr>
-              <a:t>The Series Arc</a:t>
+              <a:rPr lang="en-US" sz="2400" b="1" dirty="0">
+                <a:solidFill>
+                  <a:srgbClr val="FFFFFF"/>
+                </a:solidFill>
+                <a:latin typeface="Arial" pitchFamily="34" charset="0"/>
+                <a:ea typeface="Arial" pitchFamily="34" charset="-122"/>
+                <a:cs typeface="Arial" pitchFamily="34" charset="-120"/>
+              </a:rPr>
+              <a:t>Next Steps</a:t>
+            </a:r>
+            <a:endParaRPr lang="en-US" sz="2400" dirty="0"/>
+          </a:p>
+        </p:txBody>
+      </p:sp>
+      <p:sp>
+        <p:nvSpPr>
+          <p:cNvPr id="4" name="Shape 2"/>
+          <p:cNvSpPr/>
+          <p:nvPr/>
+        </p:nvSpPr>
+        <p:spPr>
+          <a:xfrm>
+            <a:off x="548640" y="1280160"/>
+            <a:ext cx="1371600" cy="54864"/>
+          </a:xfrm>
+          <a:prstGeom prst="rect">
+            <a:avLst/>
+          </a:prstGeom>
+          <a:solidFill>
+            <a:srgbClr val="C9A227"/>
+          </a:solidFill>
+          <a:ln w="12700">
+            <a:solidFill>
+              <a:srgbClr val="C9A227"/>
+            </a:solidFill>
+            <a:prstDash val="solid"/>
+          </a:ln>
+        </p:spPr>
+      </p:sp>
+      <p:sp>
+        <p:nvSpPr>
+          <p:cNvPr id="5" name="Text 3"/>
+          <p:cNvSpPr/>
+          <p:nvPr/>
+        </p:nvSpPr>
+        <p:spPr>
+          <a:xfrm>
+            <a:off x="548640" y="1508760"/>
+            <a:ext cx="8046720" cy="320040"/>
+          </a:xfrm>
+          <a:prstGeom prst="rect">
+            <a:avLst/>
+          </a:prstGeom>
+          <a:noFill/>
+          <a:ln/>
+        </p:spPr>
+        <p:txBody>
+          <a:bodyPr wrap="square" lIns="0" tIns="0" rIns="0" bIns="0" rtlCol="0" anchor="ctr"/>
+          <a:lstStyle/>
+          <a:p>
+            <a:pPr indent="0" marL="0">
+              <a:buNone/>
+            </a:pPr>
+            <a:r>
+              <a:rPr lang="en-US" sz="1300" dirty="0">
+                <a:solidFill>
+                  <a:srgbClr val="C9A227"/>
+                </a:solidFill>
+                <a:latin typeface="Arial" pitchFamily="34" charset="0"/>
+                <a:ea typeface="Arial" pitchFamily="34" charset="-122"/>
+                <a:cs typeface="Arial" pitchFamily="34" charset="-120"/>
+              </a:rPr>
+              <a:t>Canvas  →  OKRs  →  Operating Model  →  Value Streams  →  Workforce Strategy</a:t>
+            </a:r>
+            <a:endParaRPr lang="en-US" sz="1300" dirty="0"/>
+          </a:p>
+        </p:txBody>
+      </p:sp>
+      <p:sp>
+        <p:nvSpPr>
+          <p:cNvPr id="6" name="Text 4"/>
+          <p:cNvSpPr/>
+          <p:nvPr/>
+        </p:nvSpPr>
+        <p:spPr>
+          <a:xfrm>
+            <a:off x="548640" y="2011680"/>
+            <a:ext cx="8046720" cy="822960"/>
+          </a:xfrm>
+          <a:prstGeom prst="rect">
+            <a:avLst/>
+          </a:prstGeom>
+          <a:noFill/>
+          <a:ln/>
+        </p:spPr>
+        <p:txBody>
+          <a:bodyPr wrap="square" lIns="0" tIns="0" rIns="0" bIns="0" rtlCol="0" anchor="ctr"/>
+          <a:lstStyle/>
+          <a:p>
+            <a:pPr indent="0" marL="0">
+              <a:buNone/>
+            </a:pPr>
+            <a:r>
+              <a:rPr lang="en-US" sz="1500" dirty="0">
+                <a:solidFill>
+                  <a:srgbClr val="C8C8C8"/>
+                </a:solidFill>
+                <a:latin typeface="Arial" pitchFamily="34" charset="0"/>
+                <a:ea typeface="Arial" pitchFamily="34" charset="-122"/>
+                <a:cs typeface="Arial" pitchFamily="34" charset="-120"/>
+              </a:rPr>
+              <a:t>If you would like support turning these ideas into a concrete 90-day plan</a:t>
+            </a:r>
+            <a:endParaRPr lang="en-US" sz="1500" dirty="0"/>
+          </a:p>
+          <a:p>
+            <a:pPr indent="0" marL="0">
+              <a:buNone/>
+            </a:pPr>
+            <a:r>
+              <a:rPr lang="en-US" sz="1500" dirty="0">
+                <a:solidFill>
+                  <a:srgbClr val="C8C8C8"/>
+                </a:solidFill>
+                <a:latin typeface="Arial" pitchFamily="34" charset="0"/>
+                <a:ea typeface="Arial" pitchFamily="34" charset="-122"/>
+                <a:cs typeface="Arial" pitchFamily="34" charset="-120"/>
+              </a:rPr>
+              <a:t>or ongoing Chief of Staff-style implementation help, reach out directly.</a:t>
+            </a:r>
+            <a:endParaRPr lang="en-US" sz="1500" dirty="0"/>
+          </a:p>
+        </p:txBody>
+      </p:sp>
+      <p:sp>
+        <p:nvSpPr>
+          <p:cNvPr id="7" name="Text 5"/>
+          <p:cNvSpPr/>
+          <p:nvPr/>
+        </p:nvSpPr>
+        <p:spPr>
+          <a:xfrm>
+            <a:off x="548640" y="3108960"/>
+            <a:ext cx="8046720" cy="320040"/>
+          </a:xfrm>
+          <a:prstGeom prst="rect">
+            <a:avLst/>
+          </a:prstGeom>
+          <a:noFill/>
+          <a:ln/>
+        </p:spPr>
+        <p:txBody>
+          <a:bodyPr wrap="square" lIns="0" tIns="0" rIns="0" bIns="0" rtlCol="0" anchor="ctr"/>
+          <a:lstStyle/>
+          <a:p>
+            <a:pPr indent="0" marL="0">
+              <a:buNone/>
+            </a:pPr>
+            <a:r>
+              <a:rPr lang="en-US" sz="1600" b="1" dirty="0">
+                <a:solidFill>
+                  <a:srgbClr val="FFFFFF"/>
+                </a:solidFill>
+                <a:latin typeface="Arial" pitchFamily="34" charset="0"/>
+                <a:ea typeface="Arial" pitchFamily="34" charset="-122"/>
+                <a:cs typeface="Arial" pitchFamily="34" charset="-120"/>
+              </a:rPr>
+              <a:t>Joshua Konkle</a:t>
             </a:r>
             <a:endParaRPr lang="en-US" sz="1600" dirty="0"/>
           </a:p>
@@ -2829,183 +3091,32 @@
       </p:sp>
       <p:sp>
         <p:nvSpPr>
-          <p:cNvPr id="3" name="Text 1"/>
-          <p:cNvSpPr/>
-          <p:nvPr/>
-        </p:nvSpPr>
-        <p:spPr>
-          <a:xfrm>
-            <a:off x="548640" y="1188720"/>
-            <a:ext cx="8046720" cy="457200"/>
-          </a:xfrm>
-          <a:prstGeom prst="rect">
-            <a:avLst/>
-          </a:prstGeom>
-          <a:noFill/>
-          <a:ln/>
-        </p:spPr>
-        <p:txBody>
-          <a:bodyPr wrap="square" lIns="0" tIns="0" rIns="0" bIns="0" rtlCol="0" anchor="ctr"/>
-          <a:lstStyle/>
-          <a:p>
-            <a:pPr indent="0" marL="0">
-              <a:buNone/>
-            </a:pPr>
-            <a:r>
-              <a:rPr lang="en-US" sz="1600" b="1" dirty="0">
-                <a:solidFill>
-                  <a:srgbClr val="F5F5F5"/>
-                </a:solidFill>
-                <a:latin typeface="Arial" pitchFamily="34" charset="0"/>
-                <a:ea typeface="Arial" pitchFamily="34" charset="-122"/>
-                <a:cs typeface="Arial" pitchFamily="34" charset="-120"/>
-              </a:rPr>
-              <a:t>Canvas  →  OKRs  →  Operating Model  →  Value Streams  →  Workforce Strategy</a:t>
-            </a:r>
-            <a:endParaRPr lang="en-US" sz="1600" dirty="0"/>
-          </a:p>
-        </p:txBody>
-      </p:sp>
-      <p:sp>
-        <p:nvSpPr>
-          <p:cNvPr id="4" name="Text 2"/>
-          <p:cNvSpPr/>
-          <p:nvPr/>
-        </p:nvSpPr>
-        <p:spPr>
-          <a:xfrm>
-            <a:off x="548640" y="2011680"/>
-            <a:ext cx="8046720" cy="365760"/>
-          </a:xfrm>
-          <a:prstGeom prst="rect">
-            <a:avLst/>
-          </a:prstGeom>
-          <a:noFill/>
-          <a:ln/>
-        </p:spPr>
-        <p:txBody>
-          <a:bodyPr wrap="square" lIns="0" tIns="0" rIns="0" bIns="0" rtlCol="0" anchor="ctr"/>
-          <a:lstStyle/>
-          <a:p>
-            <a:pPr indent="0" marL="0">
-              <a:buNone/>
-            </a:pPr>
-            <a:r>
-              <a:rPr lang="en-US" sz="2200" b="1" dirty="0">
-                <a:solidFill>
-                  <a:srgbClr val="F5F5F5"/>
-                </a:solidFill>
-                <a:latin typeface="Arial" pitchFamily="34" charset="0"/>
-                <a:ea typeface="Arial" pitchFamily="34" charset="-122"/>
-                <a:cs typeface="Arial" pitchFamily="34" charset="-120"/>
-              </a:rPr>
-              <a:t>Next Steps</a:t>
-            </a:r>
-            <a:endParaRPr lang="en-US" sz="2200" dirty="0"/>
-          </a:p>
-        </p:txBody>
-      </p:sp>
-      <p:sp>
-        <p:nvSpPr>
-          <p:cNvPr id="5" name="Text 3"/>
-          <p:cNvSpPr/>
-          <p:nvPr/>
-        </p:nvSpPr>
-        <p:spPr>
-          <a:xfrm>
-            <a:off x="548640" y="2468880"/>
-            <a:ext cx="8046720" cy="731520"/>
-          </a:xfrm>
-          <a:prstGeom prst="rect">
-            <a:avLst/>
-          </a:prstGeom>
-          <a:noFill/>
-          <a:ln/>
-        </p:spPr>
-        <p:txBody>
-          <a:bodyPr wrap="square" lIns="0" tIns="0" rIns="0" bIns="0" rtlCol="0" anchor="ctr"/>
-          <a:lstStyle/>
-          <a:p>
-            <a:pPr indent="0" marL="0">
-              <a:buNone/>
-            </a:pPr>
-            <a:r>
-              <a:rPr lang="en-US" sz="1500" dirty="0">
-                <a:solidFill>
-                  <a:srgbClr val="CCCCCC"/>
-                </a:solidFill>
-                <a:latin typeface="Arial" pitchFamily="34" charset="0"/>
-                <a:ea typeface="Arial" pitchFamily="34" charset="-122"/>
-                <a:cs typeface="Arial" pitchFamily="34" charset="-120"/>
-              </a:rPr>
-              <a:t>If you would like support turning these ideas into a concrete 90-day execution plan</a:t>
-            </a:r>
-            <a:endParaRPr lang="en-US" sz="1500" dirty="0"/>
-          </a:p>
-          <a:p>
-            <a:pPr indent="0" marL="0">
-              <a:buNone/>
-            </a:pPr>
-            <a:r>
-              <a:rPr lang="en-US" sz="1500" dirty="0">
-                <a:solidFill>
-                  <a:srgbClr val="CCCCCC"/>
-                </a:solidFill>
-                <a:latin typeface="Arial" pitchFamily="34" charset="0"/>
-                <a:ea typeface="Arial" pitchFamily="34" charset="-122"/>
-                <a:cs typeface="Arial" pitchFamily="34" charset="-120"/>
-              </a:rPr>
-              <a:t>or ongoing Chief of Staff-style implementation help, reach out directly.</a:t>
-            </a:r>
-            <a:endParaRPr lang="en-US" sz="1500" dirty="0"/>
-          </a:p>
-        </p:txBody>
-      </p:sp>
-      <p:sp>
-        <p:nvSpPr>
-          <p:cNvPr id="6" name="Text 4"/>
+          <p:cNvPr id="8" name="Text 6"/>
           <p:cNvSpPr/>
           <p:nvPr/>
         </p:nvSpPr>
         <p:spPr>
           <a:xfrm>
             <a:off x="548640" y="3474720"/>
-            <a:ext cx="8046720" cy="731520"/>
-          </a:xfrm>
-          <a:prstGeom prst="rect">
-            <a:avLst/>
-          </a:prstGeom>
-          <a:noFill/>
-          <a:ln/>
-        </p:spPr>
-        <p:txBody>
-          <a:bodyPr wrap="square" lIns="0" tIns="0" rIns="0" bIns="0" rtlCol="0" anchor="ctr"/>
-          <a:lstStyle/>
-          <a:p>
-            <a:pPr indent="0" marL="0">
-              <a:buNone/>
-            </a:pPr>
-            <a:r>
-              <a:rPr lang="en-US" sz="1500" dirty="0">
-                <a:solidFill>
-                  <a:srgbClr val="F5F5F5"/>
-                </a:solidFill>
-                <a:latin typeface="Arial" pitchFamily="34" charset="0"/>
-                <a:ea typeface="Arial" pitchFamily="34" charset="-122"/>
-                <a:cs typeface="Arial" pitchFamily="34" charset="-120"/>
-              </a:rPr>
-              <a:t>Joshua Konkle</a:t>
-            </a:r>
-            <a:endParaRPr lang="en-US" sz="1500" dirty="0"/>
-          </a:p>
-          <a:p>
-            <a:pPr indent="0" marL="0">
-              <a:buNone/>
-            </a:pPr>
-            <a:r>
-              <a:rPr lang="en-US" sz="1500" dirty="0">
-                <a:solidFill>
-                  <a:srgbClr val="F5F5F5"/>
+            <a:ext cx="8046720" cy="274320"/>
+          </a:xfrm>
+          <a:prstGeom prst="rect">
+            <a:avLst/>
+          </a:prstGeom>
+          <a:noFill/>
+          <a:ln/>
+        </p:spPr>
+        <p:txBody>
+          <a:bodyPr wrap="square" lIns="0" tIns="0" rIns="0" bIns="0" rtlCol="0" anchor="ctr"/>
+          <a:lstStyle/>
+          <a:p>
+            <a:pPr indent="0" marL="0">
+              <a:buNone/>
+            </a:pPr>
+            <a:r>
+              <a:rPr lang="en-US" sz="1300" dirty="0">
+                <a:solidFill>
+                  <a:srgbClr val="C9A227"/>
                 </a:solidFill>
                 <a:latin typeface="Arial" pitchFamily="34" charset="0"/>
                 <a:ea typeface="Arial" pitchFamily="34" charset="-122"/>
@@ -3013,7 +3124,46 @@
               </a:rPr>
               <a:t>@7SwanSwimming  ·  512-423-5448  ·  joshua@digitalknowledge.net</a:t>
             </a:r>
-            <a:endParaRPr lang="en-US" sz="1500" dirty="0"/>
+            <a:endParaRPr lang="en-US" sz="1300" dirty="0"/>
+          </a:p>
+        </p:txBody>
+      </p:sp>
+      <p:sp>
+        <p:nvSpPr>
+          <p:cNvPr id="9" name="Text 7"/>
+          <p:cNvSpPr/>
+          <p:nvPr/>
+        </p:nvSpPr>
+        <p:spPr>
+          <a:xfrm>
+            <a:off x="548640" y="4663440"/>
+            <a:ext cx="8046720" cy="228600"/>
+          </a:xfrm>
+          <a:prstGeom prst="rect">
+            <a:avLst/>
+          </a:prstGeom>
+          <a:noFill/>
+          <a:ln/>
+        </p:spPr>
+        <p:txBody>
+          <a:bodyPr wrap="square" lIns="0" tIns="0" rIns="0" bIns="0" rtlCol="0" anchor="ctr"/>
+          <a:lstStyle/>
+          <a:p>
+            <a:pPr indent="0" marL="0">
+              <a:buNone/>
+            </a:pPr>
+            <a:r>
+              <a:rPr lang="en-US" sz="1100" dirty="0">
+                <a:solidFill>
+                  <a:srgbClr val="707070"/>
+                </a:solidFill>
+                <a:latin typeface="Arial" pitchFamily="34" charset="0"/>
+                <a:ea typeface="Arial" pitchFamily="34" charset="-122"/>
+                <a:cs typeface="Arial" pitchFamily="34" charset="-120"/>
+              </a:rPr>
+              <a:t>Copyright © 2026 Digital Knowledge / Patriots Locked In and In Control.</a:t>
+            </a:r>
+            <a:endParaRPr lang="en-US" sz="1100" dirty="0"/>
           </a:p>
         </p:txBody>
       </p:sp>
@@ -3028,13 +3178,6 @@
 <file path=ppt/slides/slide2.xml><?xml version="1.0" encoding="utf-8"?>
 <p:sld xmlns:a="http://schemas.openxmlformats.org/drawingml/2006/main" xmlns:r="http://schemas.openxmlformats.org/officeDocument/2006/relationships" xmlns:p="http://schemas.openxmlformats.org/presentationml/2006/main">
   <p:cSld name="Slide 2">
-    <p:bg>
-      <p:bgPr>
-        <a:solidFill>
-          <a:srgbClr val="FFFFFF"/>
-        </a:solidFill>
-      </p:bgPr>
-    </p:bg>
     <p:spTree>
       <p:nvGrpSpPr>
         <p:cNvPr id="1" name=""/>
@@ -3051,32 +3194,57 @@
       </p:grpSpPr>
       <p:sp>
         <p:nvSpPr>
-          <p:cNvPr id="2" name="Text 0"/>
-          <p:cNvSpPr/>
-          <p:nvPr/>
-        </p:nvSpPr>
-        <p:spPr>
-          <a:xfrm>
-            <a:off x="457200" y="320040"/>
-            <a:ext cx="8229600" cy="457200"/>
-          </a:xfrm>
-          <a:prstGeom prst="rect">
-            <a:avLst/>
-          </a:prstGeom>
-          <a:noFill/>
-          <a:ln/>
-        </p:spPr>
-        <p:txBody>
-          <a:bodyPr wrap="square" lIns="0" tIns="0" rIns="0" bIns="0" rtlCol="0" anchor="ctr"/>
-          <a:lstStyle/>
-          <a:p>
-            <a:pPr indent="0" marL="0">
-              <a:buNone/>
-            </a:pPr>
-            <a:r>
-              <a:rPr lang="en-US" sz="2800" b="1" dirty="0">
-                <a:solidFill>
-                  <a:srgbClr val="1A1A1A"/>
+          <p:cNvPr id="2" name="Shape 0"/>
+          <p:cNvSpPr/>
+          <p:nvPr/>
+        </p:nvSpPr>
+        <p:spPr>
+          <a:xfrm>
+            <a:off x="0" y="0"/>
+            <a:ext cx="9144000" cy="5143500"/>
+          </a:xfrm>
+          <a:prstGeom prst="rect">
+            <a:avLst/>
+          </a:prstGeom>
+          <a:solidFill>
+            <a:srgbClr val="FFFFFF"/>
+          </a:solidFill>
+          <a:ln w="12700">
+            <a:solidFill>
+              <a:srgbClr val="FFFFFF"/>
+            </a:solidFill>
+            <a:prstDash val="solid"/>
+          </a:ln>
+        </p:spPr>
+      </p:sp>
+      <p:sp>
+        <p:nvSpPr>
+          <p:cNvPr id="3" name="Text 1"/>
+          <p:cNvSpPr/>
+          <p:nvPr/>
+        </p:nvSpPr>
+        <p:spPr>
+          <a:xfrm>
+            <a:off x="457200" y="274320"/>
+            <a:ext cx="8229600" cy="365760"/>
+          </a:xfrm>
+          <a:prstGeom prst="rect">
+            <a:avLst/>
+          </a:prstGeom>
+          <a:noFill/>
+          <a:ln/>
+        </p:spPr>
+        <p:txBody>
+          <a:bodyPr wrap="square" lIns="0" tIns="0" rIns="0" bIns="0" rtlCol="0" anchor="ctr"/>
+          <a:lstStyle/>
+          <a:p>
+            <a:pPr indent="0" marL="0">
+              <a:buNone/>
+            </a:pPr>
+            <a:r>
+              <a:rPr lang="en-US" sz="2400" b="1" dirty="0">
+                <a:solidFill>
+                  <a:srgbClr val="1B2A4A"/>
                 </a:solidFill>
                 <a:latin typeface="Arial" pitchFamily="34" charset="0"/>
                 <a:ea typeface="Arial" pitchFamily="34" charset="-122"/>
@@ -3084,68 +3252,36 @@
               </a:rPr>
               <a:t>What You Will Leave With</a:t>
             </a:r>
-            <a:endParaRPr lang="en-US" sz="2800" dirty="0"/>
-          </a:p>
-        </p:txBody>
-      </p:sp>
-      <p:sp>
-        <p:nvSpPr>
-          <p:cNvPr id="3" name="Shape 1"/>
-          <p:cNvSpPr/>
-          <p:nvPr/>
-        </p:nvSpPr>
-        <p:spPr>
-          <a:xfrm>
-            <a:off x="457200" y="1051560"/>
-            <a:ext cx="73152" cy="548640"/>
-          </a:xfrm>
-          <a:prstGeom prst="rect">
-            <a:avLst/>
+            <a:endParaRPr lang="en-US" sz="2400" dirty="0"/>
+          </a:p>
+        </p:txBody>
+      </p:sp>
+      <p:sp>
+        <p:nvSpPr>
+          <p:cNvPr id="4" name="Shape 2"/>
+          <p:cNvSpPr/>
+          <p:nvPr/>
+        </p:nvSpPr>
+        <p:spPr>
+          <a:xfrm>
+            <a:off x="457200" y="868680"/>
+            <a:ext cx="8229600" cy="685800"/>
+          </a:xfrm>
+          <a:prstGeom prst="roundRect">
+            <a:avLst>
+              <a:gd name="adj" fmla="val 8000"/>
+            </a:avLst>
           </a:prstGeom>
           <a:solidFill>
-            <a:srgbClr val="1A1A1A"/>
+            <a:srgbClr val="F7F5F0"/>
           </a:solidFill>
-          <a:ln/>
-        </p:spPr>
-      </p:sp>
-      <p:sp>
-        <p:nvSpPr>
-          <p:cNvPr id="4" name="Text 2"/>
-          <p:cNvSpPr/>
-          <p:nvPr/>
-        </p:nvSpPr>
-        <p:spPr>
-          <a:xfrm>
-            <a:off x="777240" y="1051560"/>
-            <a:ext cx="7772400" cy="548640"/>
-          </a:xfrm>
-          <a:prstGeom prst="rect">
-            <a:avLst/>
-          </a:prstGeom>
-          <a:noFill/>
-          <a:ln/>
-        </p:spPr>
-        <p:txBody>
-          <a:bodyPr wrap="square" lIns="0" tIns="0" rIns="0" bIns="0" rtlCol="0" anchor="ctr"/>
-          <a:lstStyle/>
-          <a:p>
-            <a:pPr indent="0" marL="0">
-              <a:buNone/>
-            </a:pPr>
-            <a:r>
-              <a:rPr lang="en-US" sz="1600" dirty="0">
-                <a:solidFill>
-                  <a:srgbClr val="1A1A1A"/>
-                </a:solidFill>
-                <a:latin typeface="Arial" pitchFamily="34" charset="0"/>
-                <a:ea typeface="Arial" pitchFamily="34" charset="-122"/>
-                <a:cs typeface="Arial" pitchFamily="34" charset="-120"/>
-              </a:rPr>
-              <a:t>Clarity on the difference between goals and the OKR system that effectuats them</a:t>
-            </a:r>
-            <a:endParaRPr lang="en-US" sz="1600" dirty="0"/>
-          </a:p>
-        </p:txBody>
+          <a:ln w="12700">
+            <a:solidFill>
+              <a:srgbClr val="F7F5F0"/>
+            </a:solidFill>
+            <a:prstDash val="solid"/>
+          </a:ln>
+        </p:spPr>
       </p:sp>
       <p:sp>
         <p:nvSpPr>
@@ -3155,16 +3291,21 @@
         </p:nvSpPr>
         <p:spPr>
           <a:xfrm>
-            <a:off x="457200" y="1828800"/>
-            <a:ext cx="73152" cy="548640"/>
+            <a:off x="457200" y="868680"/>
+            <a:ext cx="73152" cy="685800"/>
           </a:xfrm>
           <a:prstGeom prst="rect">
             <a:avLst/>
           </a:prstGeom>
           <a:solidFill>
-            <a:srgbClr val="1A1A1A"/>
+            <a:srgbClr val="C9A227"/>
           </a:solidFill>
-          <a:ln/>
+          <a:ln w="12700">
+            <a:solidFill>
+              <a:srgbClr val="C9A227"/>
+            </a:solidFill>
+            <a:prstDash val="solid"/>
+          </a:ln>
         </p:spPr>
       </p:sp>
       <p:sp>
@@ -3175,26 +3316,117 @@
         </p:nvSpPr>
         <p:spPr>
           <a:xfrm>
-            <a:off x="777240" y="1828800"/>
-            <a:ext cx="7772400" cy="548640"/>
-          </a:xfrm>
-          <a:prstGeom prst="rect">
-            <a:avLst/>
-          </a:prstGeom>
-          <a:noFill/>
-          <a:ln/>
-        </p:spPr>
-        <p:txBody>
-          <a:bodyPr wrap="square" lIns="0" tIns="0" rIns="0" bIns="0" rtlCol="0" anchor="ctr"/>
-          <a:lstStyle/>
-          <a:p>
-            <a:pPr indent="0" marL="0">
-              <a:buNone/>
-            </a:pPr>
-            <a:r>
-              <a:rPr lang="en-US" sz="1600" dirty="0">
-                <a:solidFill>
-                  <a:srgbClr val="1A1A1A"/>
+            <a:off x="731520" y="1033272"/>
+            <a:ext cx="7772400" cy="411480"/>
+          </a:xfrm>
+          <a:prstGeom prst="rect">
+            <a:avLst/>
+          </a:prstGeom>
+          <a:noFill/>
+          <a:ln/>
+        </p:spPr>
+        <p:txBody>
+          <a:bodyPr wrap="square" lIns="0" tIns="0" rIns="0" bIns="0" rtlCol="0" anchor="ctr"/>
+          <a:lstStyle/>
+          <a:p>
+            <a:pPr indent="0" marL="0">
+              <a:buNone/>
+            </a:pPr>
+            <a:r>
+              <a:rPr lang="en-US" sz="1400" dirty="0">
+                <a:solidFill>
+                  <a:srgbClr val="2A2A2A"/>
+                </a:solidFill>
+                <a:latin typeface="Arial" pitchFamily="34" charset="0"/>
+                <a:ea typeface="Arial" pitchFamily="34" charset="-122"/>
+                <a:cs typeface="Arial" pitchFamily="34" charset="-120"/>
+              </a:rPr>
+              <a:t>Clarity on the difference between goals and the OKR system that effectuates them</a:t>
+            </a:r>
+            <a:endParaRPr lang="en-US" sz="1400" dirty="0"/>
+          </a:p>
+        </p:txBody>
+      </p:sp>
+      <p:sp>
+        <p:nvSpPr>
+          <p:cNvPr id="7" name="Shape 5"/>
+          <p:cNvSpPr/>
+          <p:nvPr/>
+        </p:nvSpPr>
+        <p:spPr>
+          <a:xfrm>
+            <a:off x="457200" y="1691640"/>
+            <a:ext cx="8229600" cy="685800"/>
+          </a:xfrm>
+          <a:prstGeom prst="roundRect">
+            <a:avLst>
+              <a:gd name="adj" fmla="val 8000"/>
+            </a:avLst>
+          </a:prstGeom>
+          <a:solidFill>
+            <a:srgbClr val="F7F5F0"/>
+          </a:solidFill>
+          <a:ln w="12700">
+            <a:solidFill>
+              <a:srgbClr val="F7F5F0"/>
+            </a:solidFill>
+            <a:prstDash val="solid"/>
+          </a:ln>
+        </p:spPr>
+      </p:sp>
+      <p:sp>
+        <p:nvSpPr>
+          <p:cNvPr id="8" name="Shape 6"/>
+          <p:cNvSpPr/>
+          <p:nvPr/>
+        </p:nvSpPr>
+        <p:spPr>
+          <a:xfrm>
+            <a:off x="457200" y="1691640"/>
+            <a:ext cx="73152" cy="685800"/>
+          </a:xfrm>
+          <a:prstGeom prst="rect">
+            <a:avLst/>
+          </a:prstGeom>
+          <a:solidFill>
+            <a:srgbClr val="C9A227"/>
+          </a:solidFill>
+          <a:ln w="12700">
+            <a:solidFill>
+              <a:srgbClr val="C9A227"/>
+            </a:solidFill>
+            <a:prstDash val="solid"/>
+          </a:ln>
+        </p:spPr>
+      </p:sp>
+      <p:sp>
+        <p:nvSpPr>
+          <p:cNvPr id="9" name="Text 7"/>
+          <p:cNvSpPr/>
+          <p:nvPr/>
+        </p:nvSpPr>
+        <p:spPr>
+          <a:xfrm>
+            <a:off x="731520" y="1856232"/>
+            <a:ext cx="7772400" cy="411480"/>
+          </a:xfrm>
+          <a:prstGeom prst="rect">
+            <a:avLst/>
+          </a:prstGeom>
+          <a:noFill/>
+          <a:ln/>
+        </p:spPr>
+        <p:txBody>
+          <a:bodyPr wrap="square" lIns="0" tIns="0" rIns="0" bIns="0" rtlCol="0" anchor="ctr"/>
+          <a:lstStyle/>
+          <a:p>
+            <a:pPr indent="0" marL="0">
+              <a:buNone/>
+            </a:pPr>
+            <a:r>
+              <a:rPr lang="en-US" sz="1400" dirty="0">
+                <a:solidFill>
+                  <a:srgbClr val="2A2A2A"/>
                 </a:solidFill>
                 <a:latin typeface="Arial" pitchFamily="34" charset="0"/>
                 <a:ea typeface="Arial" pitchFamily="34" charset="-122"/>
@@ -3202,58 +3434,90 @@
               </a:rPr>
               <a:t>A frame for redesigning OKRs around productive sovereignty</a:t>
             </a:r>
-            <a:endParaRPr lang="en-US" sz="1600" dirty="0"/>
-          </a:p>
-        </p:txBody>
-      </p:sp>
-      <p:sp>
-        <p:nvSpPr>
-          <p:cNvPr id="7" name="Shape 5"/>
-          <p:cNvSpPr/>
-          <p:nvPr/>
-        </p:nvSpPr>
-        <p:spPr>
-          <a:xfrm>
-            <a:off x="457200" y="2606040"/>
-            <a:ext cx="73152" cy="548640"/>
-          </a:xfrm>
-          <a:prstGeom prst="rect">
-            <a:avLst/>
+            <a:endParaRPr lang="en-US" sz="1400" dirty="0"/>
+          </a:p>
+        </p:txBody>
+      </p:sp>
+      <p:sp>
+        <p:nvSpPr>
+          <p:cNvPr id="10" name="Shape 8"/>
+          <p:cNvSpPr/>
+          <p:nvPr/>
+        </p:nvSpPr>
+        <p:spPr>
+          <a:xfrm>
+            <a:off x="457200" y="2514600"/>
+            <a:ext cx="8229600" cy="685800"/>
+          </a:xfrm>
+          <a:prstGeom prst="roundRect">
+            <a:avLst>
+              <a:gd name="adj" fmla="val 8000"/>
+            </a:avLst>
           </a:prstGeom>
           <a:solidFill>
-            <a:srgbClr val="1A1A1A"/>
+            <a:srgbClr val="F7F5F0"/>
           </a:solidFill>
-          <a:ln/>
-        </p:spPr>
-      </p:sp>
-      <p:sp>
-        <p:nvSpPr>
-          <p:cNvPr id="8" name="Text 6"/>
-          <p:cNvSpPr/>
-          <p:nvPr/>
-        </p:nvSpPr>
-        <p:spPr>
-          <a:xfrm>
-            <a:off x="777240" y="2606040"/>
-            <a:ext cx="7772400" cy="548640"/>
-          </a:xfrm>
-          <a:prstGeom prst="rect">
-            <a:avLst/>
-          </a:prstGeom>
-          <a:noFill/>
-          <a:ln/>
-        </p:spPr>
-        <p:txBody>
-          <a:bodyPr wrap="square" lIns="0" tIns="0" rIns="0" bIns="0" rtlCol="0" anchor="ctr"/>
-          <a:lstStyle/>
-          <a:p>
-            <a:pPr indent="0" marL="0">
-              <a:buNone/>
-            </a:pPr>
-            <a:r>
-              <a:rPr lang="en-US" sz="1600" dirty="0">
-                <a:solidFill>
-                  <a:srgbClr val="1A1A1A"/>
+          <a:ln w="12700">
+            <a:solidFill>
+              <a:srgbClr val="F7F5F0"/>
+            </a:solidFill>
+            <a:prstDash val="solid"/>
+          </a:ln>
+        </p:spPr>
+      </p:sp>
+      <p:sp>
+        <p:nvSpPr>
+          <p:cNvPr id="11" name="Shape 9"/>
+          <p:cNvSpPr/>
+          <p:nvPr/>
+        </p:nvSpPr>
+        <p:spPr>
+          <a:xfrm>
+            <a:off x="457200" y="2514600"/>
+            <a:ext cx="73152" cy="685800"/>
+          </a:xfrm>
+          <a:prstGeom prst="rect">
+            <a:avLst/>
+          </a:prstGeom>
+          <a:solidFill>
+            <a:srgbClr val="C9A227"/>
+          </a:solidFill>
+          <a:ln w="12700">
+            <a:solidFill>
+              <a:srgbClr val="C9A227"/>
+            </a:solidFill>
+            <a:prstDash val="solid"/>
+          </a:ln>
+        </p:spPr>
+      </p:sp>
+      <p:sp>
+        <p:nvSpPr>
+          <p:cNvPr id="12" name="Text 10"/>
+          <p:cNvSpPr/>
+          <p:nvPr/>
+        </p:nvSpPr>
+        <p:spPr>
+          <a:xfrm>
+            <a:off x="731520" y="2679192"/>
+            <a:ext cx="7772400" cy="411480"/>
+          </a:xfrm>
+          <a:prstGeom prst="rect">
+            <a:avLst/>
+          </a:prstGeom>
+          <a:noFill/>
+          <a:ln/>
+        </p:spPr>
+        <p:txBody>
+          <a:bodyPr wrap="square" lIns="0" tIns="0" rIns="0" bIns="0" rtlCol="0" anchor="ctr"/>
+          <a:lstStyle/>
+          <a:p>
+            <a:pPr indent="0" marL="0">
+              <a:buNone/>
+            </a:pPr>
+            <a:r>
+              <a:rPr lang="en-US" sz="1400" dirty="0">
+                <a:solidFill>
+                  <a:srgbClr val="2A2A2A"/>
                 </a:solidFill>
                 <a:latin typeface="Arial" pitchFamily="34" charset="0"/>
                 <a:ea typeface="Arial" pitchFamily="34" charset="-122"/>
@@ -3261,58 +3525,90 @@
               </a:rPr>
               <a:t>Practical examples of rewritten Objectives and Key Results</a:t>
             </a:r>
-            <a:endParaRPr lang="en-US" sz="1600" dirty="0"/>
-          </a:p>
-        </p:txBody>
-      </p:sp>
-      <p:sp>
-        <p:nvSpPr>
-          <p:cNvPr id="9" name="Shape 7"/>
-          <p:cNvSpPr/>
-          <p:nvPr/>
-        </p:nvSpPr>
-        <p:spPr>
-          <a:xfrm>
-            <a:off x="457200" y="3383280"/>
-            <a:ext cx="73152" cy="548640"/>
-          </a:xfrm>
-          <a:prstGeom prst="rect">
-            <a:avLst/>
+            <a:endParaRPr lang="en-US" sz="1400" dirty="0"/>
+          </a:p>
+        </p:txBody>
+      </p:sp>
+      <p:sp>
+        <p:nvSpPr>
+          <p:cNvPr id="13" name="Shape 11"/>
+          <p:cNvSpPr/>
+          <p:nvPr/>
+        </p:nvSpPr>
+        <p:spPr>
+          <a:xfrm>
+            <a:off x="457200" y="3337560"/>
+            <a:ext cx="8229600" cy="685800"/>
+          </a:xfrm>
+          <a:prstGeom prst="roundRect">
+            <a:avLst>
+              <a:gd name="adj" fmla="val 8000"/>
+            </a:avLst>
           </a:prstGeom>
           <a:solidFill>
-            <a:srgbClr val="1A1A1A"/>
+            <a:srgbClr val="F7F5F0"/>
           </a:solidFill>
-          <a:ln/>
-        </p:spPr>
-      </p:sp>
-      <p:sp>
-        <p:nvSpPr>
-          <p:cNvPr id="10" name="Text 8"/>
-          <p:cNvSpPr/>
-          <p:nvPr/>
-        </p:nvSpPr>
-        <p:spPr>
-          <a:xfrm>
-            <a:off x="777240" y="3383280"/>
-            <a:ext cx="7772400" cy="548640"/>
-          </a:xfrm>
-          <a:prstGeom prst="rect">
-            <a:avLst/>
-          </a:prstGeom>
-          <a:noFill/>
-          <a:ln/>
-        </p:spPr>
-        <p:txBody>
-          <a:bodyPr wrap="square" lIns="0" tIns="0" rIns="0" bIns="0" rtlCol="0" anchor="ctr"/>
-          <a:lstStyle/>
-          <a:p>
-            <a:pPr indent="0" marL="0">
-              <a:buNone/>
-            </a:pPr>
-            <a:r>
-              <a:rPr lang="en-US" sz="1600" dirty="0">
-                <a:solidFill>
-                  <a:srgbClr val="1A1A1A"/>
+          <a:ln w="12700">
+            <a:solidFill>
+              <a:srgbClr val="F7F5F0"/>
+            </a:solidFill>
+            <a:prstDash val="solid"/>
+          </a:ln>
+        </p:spPr>
+      </p:sp>
+      <p:sp>
+        <p:nvSpPr>
+          <p:cNvPr id="14" name="Shape 12"/>
+          <p:cNvSpPr/>
+          <p:nvPr/>
+        </p:nvSpPr>
+        <p:spPr>
+          <a:xfrm>
+            <a:off x="457200" y="3337560"/>
+            <a:ext cx="73152" cy="685800"/>
+          </a:xfrm>
+          <a:prstGeom prst="rect">
+            <a:avLst/>
+          </a:prstGeom>
+          <a:solidFill>
+            <a:srgbClr val="C9A227"/>
+          </a:solidFill>
+          <a:ln w="12700">
+            <a:solidFill>
+              <a:srgbClr val="C9A227"/>
+            </a:solidFill>
+            <a:prstDash val="solid"/>
+          </a:ln>
+        </p:spPr>
+      </p:sp>
+      <p:sp>
+        <p:nvSpPr>
+          <p:cNvPr id="15" name="Text 13"/>
+          <p:cNvSpPr/>
+          <p:nvPr/>
+        </p:nvSpPr>
+        <p:spPr>
+          <a:xfrm>
+            <a:off x="731520" y="3502152"/>
+            <a:ext cx="7772400" cy="411480"/>
+          </a:xfrm>
+          <a:prstGeom prst="rect">
+            <a:avLst/>
+          </a:prstGeom>
+          <a:noFill/>
+          <a:ln/>
+        </p:spPr>
+        <p:txBody>
+          <a:bodyPr wrap="square" lIns="0" tIns="0" rIns="0" bIns="0" rtlCol="0" anchor="ctr"/>
+          <a:lstStyle/>
+          <a:p>
+            <a:pPr indent="0" marL="0">
+              <a:buNone/>
+            </a:pPr>
+            <a:r>
+              <a:rPr lang="en-US" sz="1400" dirty="0">
+                <a:solidFill>
+                  <a:srgbClr val="2A2A2A"/>
                 </a:solidFill>
                 <a:latin typeface="Arial" pitchFamily="34" charset="0"/>
                 <a:ea typeface="Arial" pitchFamily="34" charset="-122"/>
@@ -3320,38 +3616,38 @@
               </a:rPr>
               <a:t>A simple exercise you can run with your leadership team</a:t>
             </a:r>
-            <a:endParaRPr lang="en-US" sz="1600" dirty="0"/>
-          </a:p>
-        </p:txBody>
-      </p:sp>
-      <p:sp>
-        <p:nvSpPr>
-          <p:cNvPr id="11" name="Text 9"/>
+            <a:endParaRPr lang="en-US" sz="1400" dirty="0"/>
+          </a:p>
+        </p:txBody>
+      </p:sp>
+      <p:sp>
+        <p:nvSpPr>
+          <p:cNvPr id="16" name="Text 14"/>
           <p:cNvSpPr/>
           <p:nvPr/>
         </p:nvSpPr>
         <p:spPr>
           <a:xfrm>
             <a:off x="457200" y="4800600"/>
-            <a:ext cx="5943600" cy="228600"/>
-          </a:xfrm>
-          <a:prstGeom prst="rect">
-            <a:avLst/>
-          </a:prstGeom>
-          <a:noFill/>
-          <a:ln/>
-        </p:spPr>
-        <p:txBody>
-          <a:bodyPr wrap="square" lIns="0" tIns="0" rIns="0" bIns="0" rtlCol="0" anchor="ctr"/>
-          <a:lstStyle/>
-          <a:p>
-            <a:pPr indent="0" marL="0">
-              <a:buNone/>
-            </a:pPr>
-            <a:r>
-              <a:rPr lang="en-US" sz="1000" dirty="0">
-                <a:solidFill>
-                  <a:srgbClr val="555555"/>
+            <a:ext cx="5943600" cy="256032"/>
+          </a:xfrm>
+          <a:prstGeom prst="rect">
+            <a:avLst/>
+          </a:prstGeom>
+          <a:noFill/>
+          <a:ln/>
+        </p:spPr>
+        <p:txBody>
+          <a:bodyPr wrap="square" lIns="0" tIns="0" rIns="0" bIns="0" rtlCol="0" anchor="ctr"/>
+          <a:lstStyle/>
+          <a:p>
+            <a:pPr indent="0" marL="0">
+              <a:buNone/>
+            </a:pPr>
+            <a:r>
+              <a:rPr lang="en-US" sz="1100" dirty="0">
+                <a:solidFill>
+                  <a:srgbClr val="6A6A6A"/>
                 </a:solidFill>
                 <a:latin typeface="Arial" pitchFamily="34" charset="0"/>
                 <a:ea typeface="Arial" pitchFamily="34" charset="-122"/>
@@ -3359,20 +3655,20 @@
               </a:rPr>
               <a:t>Joshua Konkle  |  Chief of Staff Strategist</a:t>
             </a:r>
-            <a:endParaRPr lang="en-US" sz="1000" dirty="0"/>
-          </a:p>
-        </p:txBody>
-      </p:sp>
-      <p:sp>
-        <p:nvSpPr>
-          <p:cNvPr id="12" name="Text 10"/>
-          <p:cNvSpPr/>
-          <p:nvPr/>
-        </p:nvSpPr>
-        <p:spPr>
-          <a:xfrm>
-            <a:off x="7772400" y="4800600"/>
-            <a:ext cx="914400" cy="228600"/>
+            <a:endParaRPr lang="en-US" sz="1100" dirty="0"/>
+          </a:p>
+        </p:txBody>
+      </p:sp>
+      <p:sp>
+        <p:nvSpPr>
+          <p:cNvPr id="17" name="Text 15"/>
+          <p:cNvSpPr/>
+          <p:nvPr/>
+        </p:nvSpPr>
+        <p:spPr>
+          <a:xfrm>
+            <a:off x="7498080" y="4800600"/>
+            <a:ext cx="1188720" cy="256032"/>
           </a:xfrm>
           <a:prstGeom prst="rect">
             <a:avLst/>
@@ -3388,9 +3684,9 @@
               <a:buNone/>
             </a:pPr>
             <a:r>
-              <a:rPr lang="en-US" sz="1000" dirty="0">
-                <a:solidFill>
-                  <a:srgbClr val="555555"/>
+              <a:rPr lang="en-US" sz="1100" dirty="0">
+                <a:solidFill>
+                  <a:srgbClr val="6A6A6A"/>
                 </a:solidFill>
                 <a:latin typeface="Arial" pitchFamily="34" charset="0"/>
                 <a:ea typeface="Arial" pitchFamily="34" charset="-122"/>
@@ -3398,7 +3694,7 @@
               </a:rPr>
               <a:t>2 / 12</a:t>
             </a:r>
-            <a:endParaRPr lang="en-US" sz="1000" dirty="0"/>
+            <a:endParaRPr lang="en-US" sz="1100" dirty="0"/>
           </a:p>
         </p:txBody>
       </p:sp>
@@ -3413,13 +3709,6 @@
 <file path=ppt/slides/slide3.xml><?xml version="1.0" encoding="utf-8"?>
 <p:sld xmlns:a="http://schemas.openxmlformats.org/drawingml/2006/main" xmlns:r="http://schemas.openxmlformats.org/officeDocument/2006/relationships" xmlns:p="http://schemas.openxmlformats.org/presentationml/2006/main">
   <p:cSld name="Slide 3">
-    <p:bg>
-      <p:bgPr>
-        <a:solidFill>
-          <a:srgbClr val="FFFFFF"/>
-        </a:solidFill>
-      </p:bgPr>
-    </p:bg>
     <p:spTree>
       <p:nvGrpSpPr>
         <p:cNvPr id="1" name=""/>
@@ -3436,32 +3725,57 @@
       </p:grpSpPr>
       <p:sp>
         <p:nvSpPr>
-          <p:cNvPr id="2" name="Text 0"/>
+          <p:cNvPr id="2" name="Shape 0"/>
+          <p:cNvSpPr/>
+          <p:nvPr/>
+        </p:nvSpPr>
+        <p:spPr>
+          <a:xfrm>
+            <a:off x="0" y="0"/>
+            <a:ext cx="9144000" cy="5143500"/>
+          </a:xfrm>
+          <a:prstGeom prst="rect">
+            <a:avLst/>
+          </a:prstGeom>
+          <a:solidFill>
+            <a:srgbClr val="FFFFFF"/>
+          </a:solidFill>
+          <a:ln w="12700">
+            <a:solidFill>
+              <a:srgbClr val="FFFFFF"/>
+            </a:solidFill>
+            <a:prstDash val="solid"/>
+          </a:ln>
+        </p:spPr>
+      </p:sp>
+      <p:sp>
+        <p:nvSpPr>
+          <p:cNvPr id="3" name="Text 1"/>
           <p:cNvSpPr/>
           <p:nvPr/>
         </p:nvSpPr>
         <p:spPr>
           <a:xfrm>
             <a:off x="457200" y="320040"/>
-            <a:ext cx="8229600" cy="457200"/>
-          </a:xfrm>
-          <a:prstGeom prst="rect">
-            <a:avLst/>
-          </a:prstGeom>
-          <a:noFill/>
-          <a:ln/>
-        </p:spPr>
-        <p:txBody>
-          <a:bodyPr wrap="square" lIns="0" tIns="0" rIns="0" bIns="0" rtlCol="0" anchor="ctr"/>
-          <a:lstStyle/>
-          <a:p>
-            <a:pPr indent="0" marL="0">
-              <a:buNone/>
-            </a:pPr>
-            <a:r>
-              <a:rPr lang="en-US" sz="2800" b="1" dirty="0">
-                <a:solidFill>
-                  <a:srgbClr val="1A1A1A"/>
+            <a:ext cx="8229600" cy="365760"/>
+          </a:xfrm>
+          <a:prstGeom prst="rect">
+            <a:avLst/>
+          </a:prstGeom>
+          <a:noFill/>
+          <a:ln/>
+        </p:spPr>
+        <p:txBody>
+          <a:bodyPr wrap="square" lIns="0" tIns="0" rIns="0" bIns="0" rtlCol="0" anchor="ctr"/>
+          <a:lstStyle/>
+          <a:p>
+            <a:pPr indent="0" marL="0">
+              <a:buNone/>
+            </a:pPr>
+            <a:r>
+              <a:rPr lang="en-US" sz="2400" b="1" dirty="0">
+                <a:solidFill>
+                  <a:srgbClr val="1B2A4A"/>
                 </a:solidFill>
                 <a:latin typeface="Arial" pitchFamily="34" charset="0"/>
                 <a:ea typeface="Arial" pitchFamily="34" charset="-122"/>
@@ -3469,114 +3783,168 @@
               </a:rPr>
               <a:t>The Critical Distinction</a:t>
             </a:r>
-            <a:endParaRPr lang="en-US" sz="2800" dirty="0"/>
-          </a:p>
-        </p:txBody>
-      </p:sp>
-      <p:sp>
-        <p:nvSpPr>
-          <p:cNvPr id="3" name="Shape 1"/>
-          <p:cNvSpPr/>
-          <p:nvPr/>
-        </p:nvSpPr>
-        <p:spPr>
-          <a:xfrm>
-            <a:off x="457200" y="1051560"/>
-            <a:ext cx="8229600" cy="1371600"/>
-          </a:xfrm>
-          <a:prstGeom prst="rect">
-            <a:avLst/>
+            <a:endParaRPr lang="en-US" sz="2400" dirty="0"/>
+          </a:p>
+        </p:txBody>
+      </p:sp>
+      <p:sp>
+        <p:nvSpPr>
+          <p:cNvPr id="4" name="Text 2"/>
+          <p:cNvSpPr/>
+          <p:nvPr/>
+        </p:nvSpPr>
+        <p:spPr>
+          <a:xfrm>
+            <a:off x="457200" y="1005840"/>
+            <a:ext cx="8229600" cy="365760"/>
+          </a:xfrm>
+          <a:prstGeom prst="rect">
+            <a:avLst/>
+          </a:prstGeom>
+          <a:noFill/>
+          <a:ln/>
+        </p:spPr>
+        <p:txBody>
+          <a:bodyPr wrap="square" lIns="0" tIns="0" rIns="0" bIns="0" rtlCol="0" anchor="ctr"/>
+          <a:lstStyle/>
+          <a:p>
+            <a:pPr indent="0" marL="0">
+              <a:buNone/>
+            </a:pPr>
+            <a:r>
+              <a:rPr lang="en-US" sz="1800" b="1" dirty="0">
+                <a:solidFill>
+                  <a:srgbClr val="1B2A4A"/>
+                </a:solidFill>
+                <a:latin typeface="Arial" pitchFamily="34" charset="0"/>
+                <a:ea typeface="Arial" pitchFamily="34" charset="-122"/>
+                <a:cs typeface="Arial" pitchFamily="34" charset="-120"/>
+              </a:rPr>
+              <a:t>OKRs are not the goals themselves.</a:t>
+            </a:r>
+            <a:endParaRPr lang="en-US" sz="1800" dirty="0"/>
+          </a:p>
+        </p:txBody>
+      </p:sp>
+      <p:sp>
+        <p:nvSpPr>
+          <p:cNvPr id="5" name="Text 3"/>
+          <p:cNvSpPr/>
+          <p:nvPr/>
+        </p:nvSpPr>
+        <p:spPr>
+          <a:xfrm>
+            <a:off x="457200" y="1417320"/>
+            <a:ext cx="8229600" cy="365760"/>
+          </a:xfrm>
+          <a:prstGeom prst="rect">
+            <a:avLst/>
+          </a:prstGeom>
+          <a:noFill/>
+          <a:ln/>
+        </p:spPr>
+        <p:txBody>
+          <a:bodyPr wrap="square" lIns="0" tIns="0" rIns="0" bIns="0" rtlCol="0" anchor="ctr"/>
+          <a:lstStyle/>
+          <a:p>
+            <a:pPr indent="0" marL="0">
+              <a:buNone/>
+            </a:pPr>
+            <a:r>
+              <a:rPr lang="en-US" sz="1600" dirty="0">
+                <a:solidFill>
+                  <a:srgbClr val="2A2A2A"/>
+                </a:solidFill>
+                <a:latin typeface="Arial" pitchFamily="34" charset="0"/>
+                <a:ea typeface="Arial" pitchFamily="34" charset="-122"/>
+                <a:cs typeface="Arial" pitchFamily="34" charset="-120"/>
+              </a:rPr>
+              <a:t>They are a system for translating direction into coordinated execution.</a:t>
+            </a:r>
+            <a:endParaRPr lang="en-US" sz="1600" dirty="0"/>
+          </a:p>
+        </p:txBody>
+      </p:sp>
+      <p:sp>
+        <p:nvSpPr>
+          <p:cNvPr id="6" name="Shape 4"/>
+          <p:cNvSpPr/>
+          <p:nvPr/>
+        </p:nvSpPr>
+        <p:spPr>
+          <a:xfrm>
+            <a:off x="457200" y="2103120"/>
+            <a:ext cx="8229600" cy="2011680"/>
+          </a:xfrm>
+          <a:prstGeom prst="roundRect">
+            <a:avLst>
+              <a:gd name="adj" fmla="val 3636"/>
+            </a:avLst>
           </a:prstGeom>
           <a:solidFill>
-            <a:srgbClr val="F7F7F7"/>
+            <a:srgbClr val="F7F5F0"/>
           </a:solidFill>
-          <a:ln/>
-        </p:spPr>
-      </p:sp>
-      <p:sp>
-        <p:nvSpPr>
-          <p:cNvPr id="4" name="Text 2"/>
-          <p:cNvSpPr/>
-          <p:nvPr/>
-        </p:nvSpPr>
-        <p:spPr>
-          <a:xfrm>
-            <a:off x="731520" y="1280160"/>
-            <a:ext cx="7680960" cy="914400"/>
-          </a:xfrm>
-          <a:prstGeom prst="rect">
-            <a:avLst/>
-          </a:prstGeom>
-          <a:noFill/>
-          <a:ln/>
-        </p:spPr>
-        <p:txBody>
-          <a:bodyPr wrap="square" lIns="0" tIns="0" rIns="0" bIns="0" rtlCol="0" anchor="ctr"/>
-          <a:lstStyle/>
-          <a:p>
-            <a:pPr indent="0" marL="0">
-              <a:buNone/>
-            </a:pPr>
-            <a:r>
-              <a:rPr lang="en-US" sz="2000" b="1" dirty="0">
-                <a:solidFill>
-                  <a:srgbClr val="1A1A1A"/>
-                </a:solidFill>
-                <a:latin typeface="Arial" pitchFamily="34" charset="0"/>
-                <a:ea typeface="Arial" pitchFamily="34" charset="-122"/>
-                <a:cs typeface="Arial" pitchFamily="34" charset="-120"/>
-              </a:rPr>
-              <a:t>OKRs are not the goals themselves.</a:t>
-            </a:r>
-            <a:endParaRPr lang="en-US" sz="2000" dirty="0"/>
-          </a:p>
-          <a:p>
-            <a:pPr indent="0" marL="0">
-              <a:buNone/>
-            </a:pPr>
-            <a:r>
-              <a:rPr lang="en-US" sz="2000" b="1" dirty="0">
-                <a:solidFill>
-                  <a:srgbClr val="1A1A1A"/>
-                </a:solidFill>
-                <a:latin typeface="Arial" pitchFamily="34" charset="0"/>
-                <a:ea typeface="Arial" pitchFamily="34" charset="-122"/>
-                <a:cs typeface="Arial" pitchFamily="34" charset="-120"/>
-              </a:rPr>
-              <a:t>They are a system for translating direction into coordinated execution.</a:t>
-            </a:r>
-            <a:endParaRPr lang="en-US" sz="2000" dirty="0"/>
-          </a:p>
-        </p:txBody>
-      </p:sp>
-      <p:sp>
-        <p:nvSpPr>
-          <p:cNvPr id="5" name="Text 3"/>
-          <p:cNvSpPr/>
-          <p:nvPr/>
-        </p:nvSpPr>
-        <p:spPr>
-          <a:xfrm>
-            <a:off x="457200" y="2697480"/>
-            <a:ext cx="8229600" cy="457200"/>
-          </a:xfrm>
-          <a:prstGeom prst="rect">
-            <a:avLst/>
-          </a:prstGeom>
-          <a:noFill/>
-          <a:ln/>
-        </p:spPr>
-        <p:txBody>
-          <a:bodyPr wrap="square" lIns="0" tIns="0" rIns="0" bIns="0" rtlCol="0" anchor="ctr"/>
-          <a:lstStyle/>
-          <a:p>
-            <a:pPr indent="0" marL="0">
-              <a:buNone/>
-            </a:pPr>
-            <a:r>
-              <a:rPr lang="en-US" sz="1600" dirty="0">
-                <a:solidFill>
-                  <a:srgbClr val="555555"/>
+          <a:ln w="12700">
+            <a:solidFill>
+              <a:srgbClr val="F7F5F0"/>
+            </a:solidFill>
+            <a:prstDash val="solid"/>
+          </a:ln>
+        </p:spPr>
+      </p:sp>
+      <p:sp>
+        <p:nvSpPr>
+          <p:cNvPr id="7" name="Shape 5"/>
+          <p:cNvSpPr/>
+          <p:nvPr/>
+        </p:nvSpPr>
+        <p:spPr>
+          <a:xfrm>
+            <a:off x="457200" y="2103120"/>
+            <a:ext cx="91440" cy="2011680"/>
+          </a:xfrm>
+          <a:prstGeom prst="rect">
+            <a:avLst/>
+          </a:prstGeom>
+          <a:solidFill>
+            <a:srgbClr val="C9A227"/>
+          </a:solidFill>
+          <a:ln w="12700">
+            <a:solidFill>
+              <a:srgbClr val="C9A227"/>
+            </a:solidFill>
+            <a:prstDash val="solid"/>
+          </a:ln>
+        </p:spPr>
+      </p:sp>
+      <p:sp>
+        <p:nvSpPr>
+          <p:cNvPr id="8" name="Text 6"/>
+          <p:cNvSpPr/>
+          <p:nvPr/>
+        </p:nvSpPr>
+        <p:spPr>
+          <a:xfrm>
+            <a:off x="777240" y="2331720"/>
+            <a:ext cx="7680960" cy="1645920"/>
+          </a:xfrm>
+          <a:prstGeom prst="rect">
+            <a:avLst/>
+          </a:prstGeom>
+          <a:noFill/>
+          <a:ln/>
+        </p:spPr>
+        <p:txBody>
+          <a:bodyPr wrap="square" lIns="0" tIns="0" rIns="0" bIns="0" rtlCol="0" anchor="ctr"/>
+          <a:lstStyle/>
+          <a:p>
+            <a:pPr indent="0" marL="0">
+              <a:buNone/>
+            </a:pPr>
+            <a:r>
+              <a:rPr lang="en-US" sz="1500" dirty="0">
+                <a:solidFill>
+                  <a:srgbClr val="2A2A2A"/>
                 </a:solidFill>
                 <a:latin typeface="Arial" pitchFamily="34" charset="0"/>
                 <a:ea typeface="Arial" pitchFamily="34" charset="-122"/>
@@ -3584,30 +3952,14 @@
               </a:rPr>
               <a:t>When the system is aimed at the wrong outcomes, even strong effort produces misaligned results.</a:t>
             </a:r>
-            <a:endParaRPr lang="en-US" sz="1600" dirty="0"/>
-          </a:p>
-        </p:txBody>
-      </p:sp>
-      <p:sp>
-        <p:nvSpPr>
-          <p:cNvPr id="6" name="Text 4"/>
-          <p:cNvSpPr/>
-          <p:nvPr/>
-        </p:nvSpPr>
-        <p:spPr>
-          <a:xfrm>
-            <a:off x="457200" y="3291840"/>
-            <a:ext cx="8229600" cy="731520"/>
-          </a:xfrm>
-          <a:prstGeom prst="rect">
-            <a:avLst/>
-          </a:prstGeom>
-          <a:noFill/>
-          <a:ln/>
-        </p:spPr>
-        <p:txBody>
-          <a:bodyPr wrap="square" lIns="0" tIns="0" rIns="0" bIns="0" rtlCol="0" anchor="ctr"/>
-          <a:lstStyle/>
+            <a:endParaRPr lang="en-US" sz="1500" dirty="0"/>
+          </a:p>
+          <a:p>
+            <a:pPr indent="0" marL="0">
+              <a:buNone/>
+            </a:pPr>
+            <a:endParaRPr lang="en-US" sz="1500" dirty="0"/>
+          </a:p>
           <a:p>
             <a:pPr indent="0" marL="0">
               <a:buNone/>
@@ -3615,7 +3967,7 @@
             <a:r>
               <a:rPr lang="en-US" sz="1500" dirty="0">
                 <a:solidFill>
-                  <a:srgbClr val="1A1A1A"/>
+                  <a:srgbClr val="2A2A2A"/>
                 </a:solidFill>
                 <a:latin typeface="Arial" pitchFamily="34" charset="0"/>
                 <a:ea typeface="Arial" pitchFamily="34" charset="-122"/>
@@ -3629,32 +3981,32 @@
       </p:sp>
       <p:sp>
         <p:nvSpPr>
-          <p:cNvPr id="7" name="Text 5"/>
+          <p:cNvPr id="9" name="Text 7"/>
           <p:cNvSpPr/>
           <p:nvPr/>
         </p:nvSpPr>
         <p:spPr>
           <a:xfrm>
             <a:off x="457200" y="4800600"/>
-            <a:ext cx="5943600" cy="228600"/>
-          </a:xfrm>
-          <a:prstGeom prst="rect">
-            <a:avLst/>
-          </a:prstGeom>
-          <a:noFill/>
-          <a:ln/>
-        </p:spPr>
-        <p:txBody>
-          <a:bodyPr wrap="square" lIns="0" tIns="0" rIns="0" bIns="0" rtlCol="0" anchor="ctr"/>
-          <a:lstStyle/>
-          <a:p>
-            <a:pPr indent="0" marL="0">
-              <a:buNone/>
-            </a:pPr>
-            <a:r>
-              <a:rPr lang="en-US" sz="1000" dirty="0">
-                <a:solidFill>
-                  <a:srgbClr val="555555"/>
+            <a:ext cx="5943600" cy="256032"/>
+          </a:xfrm>
+          <a:prstGeom prst="rect">
+            <a:avLst/>
+          </a:prstGeom>
+          <a:noFill/>
+          <a:ln/>
+        </p:spPr>
+        <p:txBody>
+          <a:bodyPr wrap="square" lIns="0" tIns="0" rIns="0" bIns="0" rtlCol="0" anchor="ctr"/>
+          <a:lstStyle/>
+          <a:p>
+            <a:pPr indent="0" marL="0">
+              <a:buNone/>
+            </a:pPr>
+            <a:r>
+              <a:rPr lang="en-US" sz="1100" dirty="0">
+                <a:solidFill>
+                  <a:srgbClr val="6A6A6A"/>
                 </a:solidFill>
                 <a:latin typeface="Arial" pitchFamily="34" charset="0"/>
                 <a:ea typeface="Arial" pitchFamily="34" charset="-122"/>
@@ -3662,20 +4014,20 @@
               </a:rPr>
               <a:t>Joshua Konkle  |  Chief of Staff Strategist</a:t>
             </a:r>
-            <a:endParaRPr lang="en-US" sz="1000" dirty="0"/>
-          </a:p>
-        </p:txBody>
-      </p:sp>
-      <p:sp>
-        <p:nvSpPr>
-          <p:cNvPr id="8" name="Text 6"/>
-          <p:cNvSpPr/>
-          <p:nvPr/>
-        </p:nvSpPr>
-        <p:spPr>
-          <a:xfrm>
-            <a:off x="7772400" y="4800600"/>
-            <a:ext cx="914400" cy="228600"/>
+            <a:endParaRPr lang="en-US" sz="1100" dirty="0"/>
+          </a:p>
+        </p:txBody>
+      </p:sp>
+      <p:sp>
+        <p:nvSpPr>
+          <p:cNvPr id="10" name="Text 8"/>
+          <p:cNvSpPr/>
+          <p:nvPr/>
+        </p:nvSpPr>
+        <p:spPr>
+          <a:xfrm>
+            <a:off x="7498080" y="4800600"/>
+            <a:ext cx="1188720" cy="256032"/>
           </a:xfrm>
           <a:prstGeom prst="rect">
             <a:avLst/>
@@ -3691,9 +4043,9 @@
               <a:buNone/>
             </a:pPr>
             <a:r>
-              <a:rPr lang="en-US" sz="1000" dirty="0">
-                <a:solidFill>
-                  <a:srgbClr val="555555"/>
+              <a:rPr lang="en-US" sz="1100" dirty="0">
+                <a:solidFill>
+                  <a:srgbClr val="6A6A6A"/>
                 </a:solidFill>
                 <a:latin typeface="Arial" pitchFamily="34" charset="0"/>
                 <a:ea typeface="Arial" pitchFamily="34" charset="-122"/>
@@ -3701,7 +4053,7 @@
               </a:rPr>
               <a:t>3 / 12</a:t>
             </a:r>
-            <a:endParaRPr lang="en-US" sz="1000" dirty="0"/>
+            <a:endParaRPr lang="en-US" sz="1100" dirty="0"/>
           </a:p>
         </p:txBody>
       </p:sp>
@@ -3716,13 +4068,6 @@
 <file path=ppt/slides/slide4.xml><?xml version="1.0" encoding="utf-8"?>
 <p:sld xmlns:a="http://schemas.openxmlformats.org/drawingml/2006/main" xmlns:r="http://schemas.openxmlformats.org/officeDocument/2006/relationships" xmlns:p="http://schemas.openxmlformats.org/presentationml/2006/main">
   <p:cSld name="Slide 4">
-    <p:bg>
-      <p:bgPr>
-        <a:solidFill>
-          <a:srgbClr val="FFFFFF"/>
-        </a:solidFill>
-      </p:bgPr>
-    </p:bg>
     <p:spTree>
       <p:nvGrpSpPr>
         <p:cNvPr id="1" name=""/>
@@ -3739,32 +4084,57 @@
       </p:grpSpPr>
       <p:sp>
         <p:nvSpPr>
-          <p:cNvPr id="2" name="Text 0"/>
-          <p:cNvSpPr/>
-          <p:nvPr/>
-        </p:nvSpPr>
-        <p:spPr>
-          <a:xfrm>
-            <a:off x="457200" y="274320"/>
-            <a:ext cx="8229600" cy="411480"/>
-          </a:xfrm>
-          <a:prstGeom prst="rect">
-            <a:avLst/>
-          </a:prstGeom>
-          <a:noFill/>
-          <a:ln/>
-        </p:spPr>
-        <p:txBody>
-          <a:bodyPr wrap="square" lIns="0" tIns="0" rIns="0" bIns="0" rtlCol="0" anchor="ctr"/>
-          <a:lstStyle/>
-          <a:p>
-            <a:pPr indent="0" marL="0">
-              <a:buNone/>
-            </a:pPr>
-            <a:r>
-              <a:rPr lang="en-US" sz="2600" b="1" dirty="0">
-                <a:solidFill>
-                  <a:srgbClr val="1A1A1A"/>
+          <p:cNvPr id="2" name="Shape 0"/>
+          <p:cNvSpPr/>
+          <p:nvPr/>
+        </p:nvSpPr>
+        <p:spPr>
+          <a:xfrm>
+            <a:off x="0" y="0"/>
+            <a:ext cx="9144000" cy="5143500"/>
+          </a:xfrm>
+          <a:prstGeom prst="rect">
+            <a:avLst/>
+          </a:prstGeom>
+          <a:solidFill>
+            <a:srgbClr val="FFFFFF"/>
+          </a:solidFill>
+          <a:ln w="12700">
+            <a:solidFill>
+              <a:srgbClr val="FFFFFF"/>
+            </a:solidFill>
+            <a:prstDash val="solid"/>
+          </a:ln>
+        </p:spPr>
+      </p:sp>
+      <p:sp>
+        <p:nvSpPr>
+          <p:cNvPr id="3" name="Text 1"/>
+          <p:cNvSpPr/>
+          <p:nvPr/>
+        </p:nvSpPr>
+        <p:spPr>
+          <a:xfrm>
+            <a:off x="457200" y="201168"/>
+            <a:ext cx="8229600" cy="320040"/>
+          </a:xfrm>
+          <a:prstGeom prst="rect">
+            <a:avLst/>
+          </a:prstGeom>
+          <a:noFill/>
+          <a:ln/>
+        </p:spPr>
+        <p:txBody>
+          <a:bodyPr wrap="square" lIns="0" tIns="0" rIns="0" bIns="0" rtlCol="0" anchor="ctr"/>
+          <a:lstStyle/>
+          <a:p>
+            <a:pPr indent="0" marL="0">
+              <a:buNone/>
+            </a:pPr>
+            <a:r>
+              <a:rPr lang="en-US" sz="2200" b="1" dirty="0">
+                <a:solidFill>
+                  <a:srgbClr val="1B2A4A"/>
                 </a:solidFill>
                 <a:latin typeface="Arial" pitchFamily="34" charset="0"/>
                 <a:ea typeface="Arial" pitchFamily="34" charset="-122"/>
@@ -3772,19 +4142,19 @@
               </a:rPr>
               <a:t>The Productive Pragmatism Frame</a:t>
             </a:r>
-            <a:endParaRPr lang="en-US" sz="2600" dirty="0"/>
-          </a:p>
-        </p:txBody>
-      </p:sp>
-      <p:sp>
-        <p:nvSpPr>
-          <p:cNvPr id="3" name="Text 1"/>
-          <p:cNvSpPr/>
-          <p:nvPr/>
-        </p:nvSpPr>
-        <p:spPr>
-          <a:xfrm>
-            <a:off x="457200" y="777240"/>
+            <a:endParaRPr lang="en-US" sz="2200" dirty="0"/>
+          </a:p>
+        </p:txBody>
+      </p:sp>
+      <p:sp>
+        <p:nvSpPr>
+          <p:cNvPr id="4" name="Text 2"/>
+          <p:cNvSpPr/>
+          <p:nvPr/>
+        </p:nvSpPr>
+        <p:spPr>
+          <a:xfrm>
+            <a:off x="457200" y="530352"/>
             <a:ext cx="8229600" cy="320040"/>
           </a:xfrm>
           <a:prstGeom prst="rect">
@@ -3801,9 +4171,9 @@
               <a:buNone/>
             </a:pPr>
             <a:r>
-              <a:rPr lang="en-US" sz="1400" dirty="0">
-                <a:solidFill>
-                  <a:srgbClr val="555555"/>
+              <a:rPr lang="en-US" sz="1300" dirty="0">
+                <a:solidFill>
+                  <a:srgbClr val="5A5A5A"/>
                 </a:solidFill>
                 <a:latin typeface="Arial" pitchFamily="34" charset="0"/>
                 <a:ea typeface="Arial" pitchFamily="34" charset="-122"/>
@@ -3811,20 +4181,20 @@
               </a:rPr>
               <a:t>Any system used to drive execution — including OKRs — must be re-oriented to these principles</a:t>
             </a:r>
-            <a:endParaRPr lang="en-US" sz="1400" dirty="0"/>
-          </a:p>
-        </p:txBody>
-      </p:sp>
-      <p:sp>
-        <p:nvSpPr>
-          <p:cNvPr id="4" name="Text 2"/>
-          <p:cNvSpPr/>
-          <p:nvPr/>
-        </p:nvSpPr>
-        <p:spPr>
-          <a:xfrm>
-            <a:off x="457200" y="1280160"/>
-            <a:ext cx="640080" cy="594360"/>
+            <a:endParaRPr lang="en-US" sz="1300" dirty="0"/>
+          </a:p>
+        </p:txBody>
+      </p:sp>
+      <p:sp>
+        <p:nvSpPr>
+          <p:cNvPr id="5" name="Text 3"/>
+          <p:cNvSpPr/>
+          <p:nvPr/>
+        </p:nvSpPr>
+        <p:spPr>
+          <a:xfrm>
+            <a:off x="457200" y="1078992"/>
+            <a:ext cx="640080" cy="365760"/>
           </a:xfrm>
           <a:prstGeom prst="rect">
             <a:avLst/>
@@ -3842,7 +4212,7 @@
             <a:r>
               <a:rPr lang="en-US" sz="1800" b="1" dirty="0">
                 <a:solidFill>
-                  <a:srgbClr val="555555"/>
+                  <a:srgbClr val="C9A227"/>
                 </a:solidFill>
                 <a:latin typeface="Arial" pitchFamily="34" charset="0"/>
                 <a:ea typeface="Arial" pitchFamily="34" charset="-122"/>
@@ -3856,14 +4226,14 @@
       </p:sp>
       <p:sp>
         <p:nvSpPr>
-          <p:cNvPr id="5" name="Text 3"/>
-          <p:cNvSpPr/>
-          <p:nvPr/>
-        </p:nvSpPr>
-        <p:spPr>
-          <a:xfrm>
-            <a:off x="1280160" y="1280160"/>
-            <a:ext cx="7132320" cy="274320"/>
+          <p:cNvPr id="6" name="Text 4"/>
+          <p:cNvSpPr/>
+          <p:nvPr/>
+        </p:nvSpPr>
+        <p:spPr>
+          <a:xfrm>
+            <a:off x="1234440" y="1005840"/>
+            <a:ext cx="7132320" cy="256032"/>
           </a:xfrm>
           <a:prstGeom prst="rect">
             <a:avLst/>
@@ -3881,7 +4251,7 @@
             <a:r>
               <a:rPr lang="en-US" sz="1500" b="1" dirty="0">
                 <a:solidFill>
-                  <a:srgbClr val="1A1A1A"/>
+                  <a:srgbClr val="1B2A4A"/>
                 </a:solidFill>
                 <a:latin typeface="Arial" pitchFamily="34" charset="0"/>
                 <a:ea typeface="Arial" pitchFamily="34" charset="-122"/>
@@ -3895,14 +4265,14 @@
       </p:sp>
       <p:sp>
         <p:nvSpPr>
-          <p:cNvPr id="6" name="Text 4"/>
-          <p:cNvSpPr/>
-          <p:nvPr/>
-        </p:nvSpPr>
-        <p:spPr>
-          <a:xfrm>
-            <a:off x="1280160" y="1554480"/>
-            <a:ext cx="7132320" cy="274320"/>
+          <p:cNvPr id="7" name="Text 5"/>
+          <p:cNvSpPr/>
+          <p:nvPr/>
+        </p:nvSpPr>
+        <p:spPr>
+          <a:xfrm>
+            <a:off x="1234440" y="1280160"/>
+            <a:ext cx="7132320" cy="320040"/>
           </a:xfrm>
           <a:prstGeom prst="rect">
             <a:avLst/>
@@ -3920,7 +4290,7 @@
             <a:r>
               <a:rPr lang="en-US" sz="1300" dirty="0">
                 <a:solidFill>
-                  <a:srgbClr val="555555"/>
+                  <a:srgbClr val="2A2A2A"/>
                 </a:solidFill>
                 <a:latin typeface="Arial" pitchFamily="34" charset="0"/>
                 <a:ea typeface="Arial" pitchFamily="34" charset="-122"/>
@@ -3934,14 +4304,14 @@
       </p:sp>
       <p:sp>
         <p:nvSpPr>
-          <p:cNvPr id="7" name="Text 5"/>
-          <p:cNvSpPr/>
-          <p:nvPr/>
-        </p:nvSpPr>
-        <p:spPr>
-          <a:xfrm>
-            <a:off x="457200" y="2057400"/>
-            <a:ext cx="640080" cy="594360"/>
+          <p:cNvPr id="8" name="Text 6"/>
+          <p:cNvSpPr/>
+          <p:nvPr/>
+        </p:nvSpPr>
+        <p:spPr>
+          <a:xfrm>
+            <a:off x="457200" y="1901952"/>
+            <a:ext cx="640080" cy="365760"/>
           </a:xfrm>
           <a:prstGeom prst="rect">
             <a:avLst/>
@@ -3959,7 +4329,7 @@
             <a:r>
               <a:rPr lang="en-US" sz="1800" b="1" dirty="0">
                 <a:solidFill>
-                  <a:srgbClr val="555555"/>
+                  <a:srgbClr val="C9A227"/>
                 </a:solidFill>
                 <a:latin typeface="Arial" pitchFamily="34" charset="0"/>
                 <a:ea typeface="Arial" pitchFamily="34" charset="-122"/>
@@ -3973,14 +4343,14 @@
       </p:sp>
       <p:sp>
         <p:nvSpPr>
-          <p:cNvPr id="8" name="Text 6"/>
-          <p:cNvSpPr/>
-          <p:nvPr/>
-        </p:nvSpPr>
-        <p:spPr>
-          <a:xfrm>
-            <a:off x="1280160" y="2057400"/>
-            <a:ext cx="7132320" cy="274320"/>
+          <p:cNvPr id="9" name="Text 7"/>
+          <p:cNvSpPr/>
+          <p:nvPr/>
+        </p:nvSpPr>
+        <p:spPr>
+          <a:xfrm>
+            <a:off x="1234440" y="1828800"/>
+            <a:ext cx="7132320" cy="256032"/>
           </a:xfrm>
           <a:prstGeom prst="rect">
             <a:avLst/>
@@ -3998,7 +4368,7 @@
             <a:r>
               <a:rPr lang="en-US" sz="1500" b="1" dirty="0">
                 <a:solidFill>
-                  <a:srgbClr val="1A1A1A"/>
+                  <a:srgbClr val="1B2A4A"/>
                 </a:solidFill>
                 <a:latin typeface="Arial" pitchFamily="34" charset="0"/>
                 <a:ea typeface="Arial" pitchFamily="34" charset="-122"/>
@@ -4012,14 +4382,14 @@
       </p:sp>
       <p:sp>
         <p:nvSpPr>
-          <p:cNvPr id="9" name="Text 7"/>
-          <p:cNvSpPr/>
-          <p:nvPr/>
-        </p:nvSpPr>
-        <p:spPr>
-          <a:xfrm>
-            <a:off x="1280160" y="2331720"/>
-            <a:ext cx="7132320" cy="274320"/>
+          <p:cNvPr id="10" name="Text 8"/>
+          <p:cNvSpPr/>
+          <p:nvPr/>
+        </p:nvSpPr>
+        <p:spPr>
+          <a:xfrm>
+            <a:off x="1234440" y="2103120"/>
+            <a:ext cx="7132320" cy="320040"/>
           </a:xfrm>
           <a:prstGeom prst="rect">
             <a:avLst/>
@@ -4037,7 +4407,7 @@
             <a:r>
               <a:rPr lang="en-US" sz="1300" dirty="0">
                 <a:solidFill>
-                  <a:srgbClr val="555555"/>
+                  <a:srgbClr val="2A2A2A"/>
                 </a:solidFill>
                 <a:latin typeface="Arial" pitchFamily="34" charset="0"/>
                 <a:ea typeface="Arial" pitchFamily="34" charset="-122"/>
@@ -4051,14 +4421,14 @@
       </p:sp>
       <p:sp>
         <p:nvSpPr>
-          <p:cNvPr id="10" name="Text 8"/>
-          <p:cNvSpPr/>
-          <p:nvPr/>
-        </p:nvSpPr>
-        <p:spPr>
-          <a:xfrm>
-            <a:off x="457200" y="2834640"/>
-            <a:ext cx="640080" cy="594360"/>
+          <p:cNvPr id="11" name="Text 9"/>
+          <p:cNvSpPr/>
+          <p:nvPr/>
+        </p:nvSpPr>
+        <p:spPr>
+          <a:xfrm>
+            <a:off x="457200" y="2724912"/>
+            <a:ext cx="640080" cy="365760"/>
           </a:xfrm>
           <a:prstGeom prst="rect">
             <a:avLst/>
@@ -4076,7 +4446,7 @@
             <a:r>
               <a:rPr lang="en-US" sz="1800" b="1" dirty="0">
                 <a:solidFill>
-                  <a:srgbClr val="555555"/>
+                  <a:srgbClr val="C9A227"/>
                 </a:solidFill>
                 <a:latin typeface="Arial" pitchFamily="34" charset="0"/>
                 <a:ea typeface="Arial" pitchFamily="34" charset="-122"/>
@@ -4090,14 +4460,14 @@
       </p:sp>
       <p:sp>
         <p:nvSpPr>
-          <p:cNvPr id="11" name="Text 9"/>
-          <p:cNvSpPr/>
-          <p:nvPr/>
-        </p:nvSpPr>
-        <p:spPr>
-          <a:xfrm>
-            <a:off x="1280160" y="2834640"/>
-            <a:ext cx="7132320" cy="274320"/>
+          <p:cNvPr id="12" name="Text 10"/>
+          <p:cNvSpPr/>
+          <p:nvPr/>
+        </p:nvSpPr>
+        <p:spPr>
+          <a:xfrm>
+            <a:off x="1234440" y="2651760"/>
+            <a:ext cx="7132320" cy="256032"/>
           </a:xfrm>
           <a:prstGeom prst="rect">
             <a:avLst/>
@@ -4115,7 +4485,7 @@
             <a:r>
               <a:rPr lang="en-US" sz="1500" b="1" dirty="0">
                 <a:solidFill>
-                  <a:srgbClr val="1A1A1A"/>
+                  <a:srgbClr val="1B2A4A"/>
                 </a:solidFill>
                 <a:latin typeface="Arial" pitchFamily="34" charset="0"/>
                 <a:ea typeface="Arial" pitchFamily="34" charset="-122"/>
@@ -4129,14 +4499,14 @@
       </p:sp>
       <p:sp>
         <p:nvSpPr>
-          <p:cNvPr id="12" name="Text 10"/>
-          <p:cNvSpPr/>
-          <p:nvPr/>
-        </p:nvSpPr>
-        <p:spPr>
-          <a:xfrm>
-            <a:off x="1280160" y="3108960"/>
-            <a:ext cx="7132320" cy="274320"/>
+          <p:cNvPr id="13" name="Text 11"/>
+          <p:cNvSpPr/>
+          <p:nvPr/>
+        </p:nvSpPr>
+        <p:spPr>
+          <a:xfrm>
+            <a:off x="1234440" y="2926080"/>
+            <a:ext cx="7132320" cy="320040"/>
           </a:xfrm>
           <a:prstGeom prst="rect">
             <a:avLst/>
@@ -4154,13 +4524,13 @@
             <a:r>
               <a:rPr lang="en-US" sz="1300" dirty="0">
                 <a:solidFill>
-                  <a:srgbClr val="555555"/>
-                </a:solidFill>
-                <a:latin typeface="Arial" pitchFamily="34" charset="0"/>
-                <a:ea typeface="Arial" pitchFamily="34" charset="-122"/>
-                <a:cs typeface="Arial" pitchFamily="34" charset="-120"/>
-              </a:rPr>
-              <a:t>Capital flows toward domestic capacity, not temporary labor extraction</a:t>
+                  <a:srgbClr val="2A2A2A"/>
+                </a:solidFill>
+                <a:latin typeface="Arial" pitchFamily="34" charset="0"/>
+                <a:ea typeface="Arial" pitchFamily="34" charset="-122"/>
+                <a:cs typeface="Arial" pitchFamily="34" charset="-120"/>
+              </a:rPr>
+              <a:t>Capital and effort flow toward domestic capacity, not temporary labor extraction</a:t>
             </a:r>
             <a:endParaRPr lang="en-US" sz="1300" dirty="0"/>
           </a:p>
@@ -4168,14 +4538,14 @@
       </p:sp>
       <p:sp>
         <p:nvSpPr>
-          <p:cNvPr id="13" name="Text 11"/>
-          <p:cNvSpPr/>
-          <p:nvPr/>
-        </p:nvSpPr>
-        <p:spPr>
-          <a:xfrm>
-            <a:off x="457200" y="3611880"/>
-            <a:ext cx="640080" cy="594360"/>
+          <p:cNvPr id="14" name="Text 12"/>
+          <p:cNvSpPr/>
+          <p:nvPr/>
+        </p:nvSpPr>
+        <p:spPr>
+          <a:xfrm>
+            <a:off x="457200" y="3547872"/>
+            <a:ext cx="640080" cy="365760"/>
           </a:xfrm>
           <a:prstGeom prst="rect">
             <a:avLst/>
@@ -4193,7 +4563,7 @@
             <a:r>
               <a:rPr lang="en-US" sz="1800" b="1" dirty="0">
                 <a:solidFill>
-                  <a:srgbClr val="555555"/>
+                  <a:srgbClr val="C9A227"/>
                 </a:solidFill>
                 <a:latin typeface="Arial" pitchFamily="34" charset="0"/>
                 <a:ea typeface="Arial" pitchFamily="34" charset="-122"/>
@@ -4207,14 +4577,14 @@
       </p:sp>
       <p:sp>
         <p:nvSpPr>
-          <p:cNvPr id="14" name="Text 12"/>
-          <p:cNvSpPr/>
-          <p:nvPr/>
-        </p:nvSpPr>
-        <p:spPr>
-          <a:xfrm>
-            <a:off x="1280160" y="3611880"/>
-            <a:ext cx="7132320" cy="274320"/>
+          <p:cNvPr id="15" name="Text 13"/>
+          <p:cNvSpPr/>
+          <p:nvPr/>
+        </p:nvSpPr>
+        <p:spPr>
+          <a:xfrm>
+            <a:off x="1234440" y="3474720"/>
+            <a:ext cx="7132320" cy="256032"/>
           </a:xfrm>
           <a:prstGeom prst="rect">
             <a:avLst/>
@@ -4232,7 +4602,7 @@
             <a:r>
               <a:rPr lang="en-US" sz="1500" b="1" dirty="0">
                 <a:solidFill>
-                  <a:srgbClr val="1A1A1A"/>
+                  <a:srgbClr val="1B2A4A"/>
                 </a:solidFill>
                 <a:latin typeface="Arial" pitchFamily="34" charset="0"/>
                 <a:ea typeface="Arial" pitchFamily="34" charset="-122"/>
@@ -4246,14 +4616,14 @@
       </p:sp>
       <p:sp>
         <p:nvSpPr>
-          <p:cNvPr id="15" name="Text 13"/>
-          <p:cNvSpPr/>
-          <p:nvPr/>
-        </p:nvSpPr>
-        <p:spPr>
-          <a:xfrm>
-            <a:off x="1280160" y="3886200"/>
-            <a:ext cx="7132320" cy="274320"/>
+          <p:cNvPr id="16" name="Text 14"/>
+          <p:cNvSpPr/>
+          <p:nvPr/>
+        </p:nvSpPr>
+        <p:spPr>
+          <a:xfrm>
+            <a:off x="1234440" y="3749040"/>
+            <a:ext cx="7132320" cy="320040"/>
           </a:xfrm>
           <a:prstGeom prst="rect">
             <a:avLst/>
@@ -4271,7 +4641,7 @@
             <a:r>
               <a:rPr lang="en-US" sz="1300" dirty="0">
                 <a:solidFill>
-                  <a:srgbClr val="555555"/>
+                  <a:srgbClr val="2A2A2A"/>
                 </a:solidFill>
                 <a:latin typeface="Arial" pitchFamily="34" charset="0"/>
                 <a:ea typeface="Arial" pitchFamily="34" charset="-122"/>
@@ -4285,32 +4655,32 @@
       </p:sp>
       <p:sp>
         <p:nvSpPr>
-          <p:cNvPr id="16" name="Text 14"/>
+          <p:cNvPr id="17" name="Text 15"/>
           <p:cNvSpPr/>
           <p:nvPr/>
         </p:nvSpPr>
         <p:spPr>
           <a:xfrm>
             <a:off x="457200" y="4800600"/>
-            <a:ext cx="5943600" cy="228600"/>
-          </a:xfrm>
-          <a:prstGeom prst="rect">
-            <a:avLst/>
-          </a:prstGeom>
-          <a:noFill/>
-          <a:ln/>
-        </p:spPr>
-        <p:txBody>
-          <a:bodyPr wrap="square" lIns="0" tIns="0" rIns="0" bIns="0" rtlCol="0" anchor="ctr"/>
-          <a:lstStyle/>
-          <a:p>
-            <a:pPr indent="0" marL="0">
-              <a:buNone/>
-            </a:pPr>
-            <a:r>
-              <a:rPr lang="en-US" sz="1000" dirty="0">
-                <a:solidFill>
-                  <a:srgbClr val="555555"/>
+            <a:ext cx="5943600" cy="256032"/>
+          </a:xfrm>
+          <a:prstGeom prst="rect">
+            <a:avLst/>
+          </a:prstGeom>
+          <a:noFill/>
+          <a:ln/>
+        </p:spPr>
+        <p:txBody>
+          <a:bodyPr wrap="square" lIns="0" tIns="0" rIns="0" bIns="0" rtlCol="0" anchor="ctr"/>
+          <a:lstStyle/>
+          <a:p>
+            <a:pPr indent="0" marL="0">
+              <a:buNone/>
+            </a:pPr>
+            <a:r>
+              <a:rPr lang="en-US" sz="1100" dirty="0">
+                <a:solidFill>
+                  <a:srgbClr val="6A6A6A"/>
                 </a:solidFill>
                 <a:latin typeface="Arial" pitchFamily="34" charset="0"/>
                 <a:ea typeface="Arial" pitchFamily="34" charset="-122"/>
@@ -4318,20 +4688,20 @@
               </a:rPr>
               <a:t>Joshua Konkle  |  Chief of Staff Strategist</a:t>
             </a:r>
-            <a:endParaRPr lang="en-US" sz="1000" dirty="0"/>
-          </a:p>
-        </p:txBody>
-      </p:sp>
-      <p:sp>
-        <p:nvSpPr>
-          <p:cNvPr id="17" name="Text 15"/>
-          <p:cNvSpPr/>
-          <p:nvPr/>
-        </p:nvSpPr>
-        <p:spPr>
-          <a:xfrm>
-            <a:off x="7772400" y="4800600"/>
-            <a:ext cx="914400" cy="228600"/>
+            <a:endParaRPr lang="en-US" sz="1100" dirty="0"/>
+          </a:p>
+        </p:txBody>
+      </p:sp>
+      <p:sp>
+        <p:nvSpPr>
+          <p:cNvPr id="18" name="Text 16"/>
+          <p:cNvSpPr/>
+          <p:nvPr/>
+        </p:nvSpPr>
+        <p:spPr>
+          <a:xfrm>
+            <a:off x="7498080" y="4800600"/>
+            <a:ext cx="1188720" cy="256032"/>
           </a:xfrm>
           <a:prstGeom prst="rect">
             <a:avLst/>
@@ -4347,9 +4717,9 @@
               <a:buNone/>
             </a:pPr>
             <a:r>
-              <a:rPr lang="en-US" sz="1000" dirty="0">
-                <a:solidFill>
-                  <a:srgbClr val="555555"/>
+              <a:rPr lang="en-US" sz="1100" dirty="0">
+                <a:solidFill>
+                  <a:srgbClr val="6A6A6A"/>
                 </a:solidFill>
                 <a:latin typeface="Arial" pitchFamily="34" charset="0"/>
                 <a:ea typeface="Arial" pitchFamily="34" charset="-122"/>
@@ -4357,7 +4727,7 @@
               </a:rPr>
               <a:t>4 / 12</a:t>
             </a:r>
-            <a:endParaRPr lang="en-US" sz="1000" dirty="0"/>
+            <a:endParaRPr lang="en-US" sz="1100" dirty="0"/>
           </a:p>
         </p:txBody>
       </p:sp>
@@ -4372,13 +4742,6 @@
 <file path=ppt/slides/slide5.xml><?xml version="1.0" encoding="utf-8"?>
 <p:sld xmlns:a="http://schemas.openxmlformats.org/drawingml/2006/main" xmlns:r="http://schemas.openxmlformats.org/officeDocument/2006/relationships" xmlns:p="http://schemas.openxmlformats.org/presentationml/2006/main">
   <p:cSld name="Slide 5">
-    <p:bg>
-      <p:bgPr>
-        <a:solidFill>
-          <a:srgbClr val="FFFFFF"/>
-        </a:solidFill>
-      </p:bgPr>
-    </p:bg>
     <p:spTree>
       <p:nvGrpSpPr>
         <p:cNvPr id="1" name=""/>
@@ -4395,13 +4758,182 @@
       </p:grpSpPr>
       <p:sp>
         <p:nvSpPr>
-          <p:cNvPr id="2" name="Text 0"/>
-          <p:cNvSpPr/>
-          <p:nvPr/>
-        </p:nvSpPr>
-        <p:spPr>
-          <a:xfrm>
-            <a:off x="457200" y="274320"/>
+          <p:cNvPr id="2" name="Shape 0"/>
+          <p:cNvSpPr/>
+          <p:nvPr/>
+        </p:nvSpPr>
+        <p:spPr>
+          <a:xfrm>
+            <a:off x="0" y="0"/>
+            <a:ext cx="9144000" cy="5143500"/>
+          </a:xfrm>
+          <a:prstGeom prst="rect">
+            <a:avLst/>
+          </a:prstGeom>
+          <a:solidFill>
+            <a:srgbClr val="FFFFFF"/>
+          </a:solidFill>
+          <a:ln w="12700">
+            <a:solidFill>
+              <a:srgbClr val="FFFFFF"/>
+            </a:solidFill>
+            <a:prstDash val="solid"/>
+          </a:ln>
+        </p:spPr>
+      </p:sp>
+      <p:sp>
+        <p:nvSpPr>
+          <p:cNvPr id="3" name="Text 1"/>
+          <p:cNvSpPr/>
+          <p:nvPr/>
+        </p:nvSpPr>
+        <p:spPr>
+          <a:xfrm>
+            <a:off x="457200" y="228600"/>
+            <a:ext cx="8229600" cy="320040"/>
+          </a:xfrm>
+          <a:prstGeom prst="rect">
+            <a:avLst/>
+          </a:prstGeom>
+          <a:noFill/>
+          <a:ln/>
+        </p:spPr>
+        <p:txBody>
+          <a:bodyPr wrap="square" lIns="0" tIns="0" rIns="0" bIns="0" rtlCol="0" anchor="ctr"/>
+          <a:lstStyle/>
+          <a:p>
+            <a:pPr indent="0" marL="0">
+              <a:buNone/>
+            </a:pPr>
+            <a:r>
+              <a:rPr lang="en-US" sz="2200" b="1" dirty="0">
+                <a:solidFill>
+                  <a:srgbClr val="1B2A4A"/>
+                </a:solidFill>
+                <a:latin typeface="Arial" pitchFamily="34" charset="0"/>
+                <a:ea typeface="Arial" pitchFamily="34" charset="-122"/>
+                <a:cs typeface="Arial" pitchFamily="34" charset="-120"/>
+              </a:rPr>
+              <a:t>Workforce Reality</a:t>
+            </a:r>
+            <a:endParaRPr lang="en-US" sz="2200" dirty="0"/>
+          </a:p>
+        </p:txBody>
+      </p:sp>
+      <p:sp>
+        <p:nvSpPr>
+          <p:cNvPr id="4" name="Shape 2"/>
+          <p:cNvSpPr/>
+          <p:nvPr/>
+        </p:nvSpPr>
+        <p:spPr>
+          <a:xfrm>
+            <a:off x="457200" y="685800"/>
+            <a:ext cx="8229600" cy="914400"/>
+          </a:xfrm>
+          <a:prstGeom prst="roundRect">
+            <a:avLst>
+              <a:gd name="adj" fmla="val 6000"/>
+            </a:avLst>
+          </a:prstGeom>
+          <a:solidFill>
+            <a:srgbClr val="1B2A4A"/>
+          </a:solidFill>
+          <a:ln w="12700">
+            <a:solidFill>
+              <a:srgbClr val="1B2A4A"/>
+            </a:solidFill>
+            <a:prstDash val="solid"/>
+          </a:ln>
+        </p:spPr>
+      </p:sp>
+      <p:sp>
+        <p:nvSpPr>
+          <p:cNvPr id="5" name="Text 3"/>
+          <p:cNvSpPr/>
+          <p:nvPr/>
+        </p:nvSpPr>
+        <p:spPr>
+          <a:xfrm>
+            <a:off x="640080" y="822960"/>
+            <a:ext cx="7863840" cy="685800"/>
+          </a:xfrm>
+          <a:prstGeom prst="rect">
+            <a:avLst/>
+          </a:prstGeom>
+          <a:noFill/>
+          <a:ln/>
+        </p:spPr>
+        <p:txBody>
+          <a:bodyPr wrap="square" lIns="0" tIns="0" rIns="0" bIns="0" rtlCol="0" anchor="ctr"/>
+          <a:lstStyle/>
+          <a:p>
+            <a:pPr indent="0" marL="0">
+              <a:buNone/>
+            </a:pPr>
+            <a:r>
+              <a:rPr lang="en-US" sz="1400" dirty="0">
+                <a:solidFill>
+                  <a:srgbClr val="FFFFFF"/>
+                </a:solidFill>
+                <a:latin typeface="Arial" pitchFamily="34" charset="0"/>
+                <a:ea typeface="Arial" pitchFamily="34" charset="-122"/>
+                <a:cs typeface="Arial" pitchFamily="34" charset="-120"/>
+              </a:rPr>
+              <a:t>Heavy reliance on temporary or short-cycle non-sovereign labor for core roles often undermines institutional knowledge, innovation culture, and creative problem-solving.</a:t>
+            </a:r>
+            <a:endParaRPr lang="en-US" sz="1400" dirty="0"/>
+          </a:p>
+        </p:txBody>
+      </p:sp>
+      <p:sp>
+        <p:nvSpPr>
+          <p:cNvPr id="6" name="Text 4"/>
+          <p:cNvSpPr/>
+          <p:nvPr/>
+        </p:nvSpPr>
+        <p:spPr>
+          <a:xfrm>
+            <a:off x="457200" y="1828800"/>
+            <a:ext cx="8229600" cy="274320"/>
+          </a:xfrm>
+          <a:prstGeom prst="rect">
+            <a:avLst/>
+          </a:prstGeom>
+          <a:noFill/>
+          <a:ln/>
+        </p:spPr>
+        <p:txBody>
+          <a:bodyPr wrap="square" lIns="0" tIns="0" rIns="0" bIns="0" rtlCol="0" anchor="ctr"/>
+          <a:lstStyle/>
+          <a:p>
+            <a:pPr indent="0" marL="0">
+              <a:buNone/>
+            </a:pPr>
+            <a:r>
+              <a:rPr lang="en-US" sz="1400" b="1" dirty="0">
+                <a:solidFill>
+                  <a:srgbClr val="C9A227"/>
+                </a:solidFill>
+                <a:latin typeface="Arial" pitchFamily="34" charset="0"/>
+                <a:ea typeface="Arial" pitchFamily="34" charset="-122"/>
+                <a:cs typeface="Arial" pitchFamily="34" charset="-120"/>
+              </a:rPr>
+              <a:t>Diagnostic Questions for the OKR System</a:t>
+            </a:r>
+            <a:endParaRPr lang="en-US" sz="1400" dirty="0"/>
+          </a:p>
+        </p:txBody>
+      </p:sp>
+      <p:sp>
+        <p:nvSpPr>
+          <p:cNvPr id="7" name="Text 5"/>
+          <p:cNvSpPr/>
+          <p:nvPr/>
+        </p:nvSpPr>
+        <p:spPr>
+          <a:xfrm>
+            <a:off x="457200" y="2194560"/>
             <a:ext cx="8229600" cy="411480"/>
           </a:xfrm>
           <a:prstGeom prst="rect">
@@ -4418,54 +4950,15 @@
               <a:buNone/>
             </a:pPr>
             <a:r>
-              <a:rPr lang="en-US" sz="2600" b="1" dirty="0">
-                <a:solidFill>
-                  <a:srgbClr val="1A1A1A"/>
-                </a:solidFill>
-                <a:latin typeface="Arial" pitchFamily="34" charset="0"/>
-                <a:ea typeface="Arial" pitchFamily="34" charset="-122"/>
-                <a:cs typeface="Arial" pitchFamily="34" charset="-120"/>
-              </a:rPr>
-              <a:t>Workforce Reality</a:t>
-            </a:r>
-            <a:endParaRPr lang="en-US" sz="2600" dirty="0"/>
-          </a:p>
-        </p:txBody>
-      </p:sp>
-      <p:sp>
-        <p:nvSpPr>
-          <p:cNvPr id="3" name="Text 1"/>
-          <p:cNvSpPr/>
-          <p:nvPr/>
-        </p:nvSpPr>
-        <p:spPr>
-          <a:xfrm>
-            <a:off x="457200" y="822960"/>
-            <a:ext cx="8229600" cy="548640"/>
-          </a:xfrm>
-          <a:prstGeom prst="rect">
-            <a:avLst/>
-          </a:prstGeom>
-          <a:noFill/>
-          <a:ln/>
-        </p:spPr>
-        <p:txBody>
-          <a:bodyPr wrap="square" lIns="0" tIns="0" rIns="0" bIns="0" rtlCol="0" anchor="ctr"/>
-          <a:lstStyle/>
-          <a:p>
-            <a:pPr indent="0" marL="0">
-              <a:buNone/>
-            </a:pPr>
-            <a:r>
               <a:rPr lang="en-US" sz="1400" dirty="0">
                 <a:solidFill>
-                  <a:srgbClr val="555555"/>
-                </a:solidFill>
-                <a:latin typeface="Arial" pitchFamily="34" charset="0"/>
-                <a:ea typeface="Arial" pitchFamily="34" charset="-122"/>
-                <a:cs typeface="Arial" pitchFamily="34" charset="-120"/>
-              </a:rPr>
-              <a:t>Heavy reliance on temporary or short-cycle non-sovereign labor for core roles often undermines institutional knowledge, innovation culture, and creative problem-solving.</a:t>
+                  <a:srgbClr val="2A2A2A"/>
+                </a:solidFill>
+                <a:latin typeface="Arial" pitchFamily="34" charset="0"/>
+                <a:ea typeface="Arial" pitchFamily="34" charset="-122"/>
+                <a:cs typeface="Arial" pitchFamily="34" charset="-120"/>
+              </a:rPr>
+              <a:t>1.  Which roles are truly critical to productive capacity over the next 3–5 years?</a:t>
             </a:r>
             <a:endParaRPr lang="en-US" sz="1400" dirty="0"/>
           </a:p>
@@ -4473,53 +4966,14 @@
       </p:sp>
       <p:sp>
         <p:nvSpPr>
-          <p:cNvPr id="4" name="Text 2"/>
-          <p:cNvSpPr/>
-          <p:nvPr/>
-        </p:nvSpPr>
-        <p:spPr>
-          <a:xfrm>
-            <a:off x="457200" y="1554480"/>
-            <a:ext cx="8229600" cy="320040"/>
-          </a:xfrm>
-          <a:prstGeom prst="rect">
-            <a:avLst/>
-          </a:prstGeom>
-          <a:noFill/>
-          <a:ln/>
-        </p:spPr>
-        <p:txBody>
-          <a:bodyPr wrap="square" lIns="0" tIns="0" rIns="0" bIns="0" rtlCol="0" anchor="ctr"/>
-          <a:lstStyle/>
-          <a:p>
-            <a:pPr indent="0" marL="0">
-              <a:buNone/>
-            </a:pPr>
-            <a:r>
-              <a:rPr lang="en-US" sz="1600" b="1" dirty="0">
-                <a:solidFill>
-                  <a:srgbClr val="1A1A1A"/>
-                </a:solidFill>
-                <a:latin typeface="Arial" pitchFamily="34" charset="0"/>
-                <a:ea typeface="Arial" pitchFamily="34" charset="-122"/>
-                <a:cs typeface="Arial" pitchFamily="34" charset="-120"/>
-              </a:rPr>
-              <a:t>Diagnostic Questions for the OKR System</a:t>
-            </a:r>
-            <a:endParaRPr lang="en-US" sz="1600" dirty="0"/>
-          </a:p>
-        </p:txBody>
-      </p:sp>
-      <p:sp>
-        <p:nvSpPr>
-          <p:cNvPr id="5" name="Text 3"/>
-          <p:cNvSpPr/>
-          <p:nvPr/>
-        </p:nvSpPr>
-        <p:spPr>
-          <a:xfrm>
-            <a:off x="457200" y="2011680"/>
-            <a:ext cx="8229600" cy="457200"/>
+          <p:cNvPr id="8" name="Text 6"/>
+          <p:cNvSpPr/>
+          <p:nvPr/>
+        </p:nvSpPr>
+        <p:spPr>
+          <a:xfrm>
+            <a:off x="457200" y="2651760"/>
+            <a:ext cx="8229600" cy="411480"/>
           </a:xfrm>
           <a:prstGeom prst="rect">
             <a:avLst/>
@@ -4537,13 +4991,13 @@
             <a:r>
               <a:rPr lang="en-US" sz="1400" dirty="0">
                 <a:solidFill>
-                  <a:srgbClr val="1A1A1A"/>
-                </a:solidFill>
-                <a:latin typeface="Arial" pitchFamily="34" charset="0"/>
-                <a:ea typeface="Arial" pitchFamily="34" charset="-122"/>
-                <a:cs typeface="Arial" pitchFamily="34" charset="-120"/>
-              </a:rPr>
-              <a:t>1.  Which roles are truly critical to productive capacity over the next 3–5 years?</a:t>
+                  <a:srgbClr val="2A2A2A"/>
+                </a:solidFill>
+                <a:latin typeface="Arial" pitchFamily="34" charset="0"/>
+                <a:ea typeface="Arial" pitchFamily="34" charset="-122"/>
+                <a:cs typeface="Arial" pitchFamily="34" charset="-120"/>
+              </a:rPr>
+              <a:t>2.  What percentage of those roles are filled by long-term American workers vs. temporary labor?</a:t>
             </a:r>
             <a:endParaRPr lang="en-US" sz="1400" dirty="0"/>
           </a:p>
@@ -4551,14 +5005,14 @@
       </p:sp>
       <p:sp>
         <p:nvSpPr>
-          <p:cNvPr id="6" name="Text 4"/>
-          <p:cNvSpPr/>
-          <p:nvPr/>
-        </p:nvSpPr>
-        <p:spPr>
-          <a:xfrm>
-            <a:off x="457200" y="2560320"/>
-            <a:ext cx="8229600" cy="457200"/>
+          <p:cNvPr id="9" name="Text 7"/>
+          <p:cNvSpPr/>
+          <p:nvPr/>
+        </p:nvSpPr>
+        <p:spPr>
+          <a:xfrm>
+            <a:off x="457200" y="3108960"/>
+            <a:ext cx="8229600" cy="411480"/>
           </a:xfrm>
           <a:prstGeom prst="rect">
             <a:avLst/>
@@ -4576,13 +5030,13 @@
             <a:r>
               <a:rPr lang="en-US" sz="1400" dirty="0">
                 <a:solidFill>
-                  <a:srgbClr val="1A1A1A"/>
-                </a:solidFill>
-                <a:latin typeface="Arial" pitchFamily="34" charset="0"/>
-                <a:ea typeface="Arial" pitchFamily="34" charset="-122"/>
-                <a:cs typeface="Arial" pitchFamily="34" charset="-120"/>
-              </a:rPr>
-              <a:t>2.  What percentage of those roles are filled by long-term American workers vs. temporary labor?</a:t>
+                  <a:srgbClr val="2A2A2A"/>
+                </a:solidFill>
+                <a:latin typeface="Arial" pitchFamily="34" charset="0"/>
+                <a:ea typeface="Arial" pitchFamily="34" charset="-122"/>
+                <a:cs typeface="Arial" pitchFamily="34" charset="-120"/>
+              </a:rPr>
+              <a:t>3.  Are our current OKRs reinforcing long-term capability or simply managing short-term headcount?</a:t>
             </a:r>
             <a:endParaRPr lang="en-US" sz="1400" dirty="0"/>
           </a:p>
@@ -4590,14 +5044,14 @@
       </p:sp>
       <p:sp>
         <p:nvSpPr>
-          <p:cNvPr id="7" name="Text 5"/>
-          <p:cNvSpPr/>
-          <p:nvPr/>
-        </p:nvSpPr>
-        <p:spPr>
-          <a:xfrm>
-            <a:off x="457200" y="3108960"/>
-            <a:ext cx="8229600" cy="457200"/>
+          <p:cNvPr id="10" name="Text 8"/>
+          <p:cNvSpPr/>
+          <p:nvPr/>
+        </p:nvSpPr>
+        <p:spPr>
+          <a:xfrm>
+            <a:off x="457200" y="3566160"/>
+            <a:ext cx="8229600" cy="411480"/>
           </a:xfrm>
           <a:prstGeom prst="rect">
             <a:avLst/>
@@ -4615,13 +5069,13 @@
             <a:r>
               <a:rPr lang="en-US" sz="1400" dirty="0">
                 <a:solidFill>
-                  <a:srgbClr val="1A1A1A"/>
-                </a:solidFill>
-                <a:latin typeface="Arial" pitchFamily="34" charset="0"/>
-                <a:ea typeface="Arial" pitchFamily="34" charset="-122"/>
-                <a:cs typeface="Arial" pitchFamily="34" charset="-120"/>
-              </a:rPr>
-              <a:t>3.  Are our current OKRs reinforcing long-term capability or simply managing short-term headcount?</a:t>
+                  <a:srgbClr val="2A2A2A"/>
+                </a:solidFill>
+                <a:latin typeface="Arial" pitchFamily="34" charset="0"/>
+                <a:ea typeface="Arial" pitchFamily="34" charset="-122"/>
+                <a:cs typeface="Arial" pitchFamily="34" charset="-120"/>
+              </a:rPr>
+              <a:t>4.  Do our Key Results reward capability growth and innovation, or only cost and speed-to-fill?</a:t>
             </a:r>
             <a:endParaRPr lang="en-US" sz="1400" dirty="0"/>
           </a:p>
@@ -4629,71 +5083,32 @@
       </p:sp>
       <p:sp>
         <p:nvSpPr>
-          <p:cNvPr id="8" name="Text 6"/>
-          <p:cNvSpPr/>
-          <p:nvPr/>
-        </p:nvSpPr>
-        <p:spPr>
-          <a:xfrm>
-            <a:off x="457200" y="3657600"/>
-            <a:ext cx="8229600" cy="457200"/>
-          </a:xfrm>
-          <a:prstGeom prst="rect">
-            <a:avLst/>
-          </a:prstGeom>
-          <a:noFill/>
-          <a:ln/>
-        </p:spPr>
-        <p:txBody>
-          <a:bodyPr wrap="square" lIns="0" tIns="0" rIns="0" bIns="0" rtlCol="0" anchor="ctr"/>
-          <a:lstStyle/>
-          <a:p>
-            <a:pPr indent="0" marL="0">
-              <a:buNone/>
-            </a:pPr>
-            <a:r>
-              <a:rPr lang="en-US" sz="1400" dirty="0">
-                <a:solidFill>
-                  <a:srgbClr val="1A1A1A"/>
-                </a:solidFill>
-                <a:latin typeface="Arial" pitchFamily="34" charset="0"/>
-                <a:ea typeface="Arial" pitchFamily="34" charset="-122"/>
-                <a:cs typeface="Arial" pitchFamily="34" charset="-120"/>
-              </a:rPr>
-              <a:t>4.  Do our Key Results reward capability growth and innovation, or only cost and speed-to-fill?</a:t>
-            </a:r>
-            <a:endParaRPr lang="en-US" sz="1400" dirty="0"/>
-          </a:p>
-        </p:txBody>
-      </p:sp>
-      <p:sp>
-        <p:nvSpPr>
-          <p:cNvPr id="9" name="Text 7"/>
+          <p:cNvPr id="11" name="Text 9"/>
           <p:cNvSpPr/>
           <p:nvPr/>
         </p:nvSpPr>
         <p:spPr>
           <a:xfrm>
             <a:off x="457200" y="4800600"/>
-            <a:ext cx="5943600" cy="228600"/>
-          </a:xfrm>
-          <a:prstGeom prst="rect">
-            <a:avLst/>
-          </a:prstGeom>
-          <a:noFill/>
-          <a:ln/>
-        </p:spPr>
-        <p:txBody>
-          <a:bodyPr wrap="square" lIns="0" tIns="0" rIns="0" bIns="0" rtlCol="0" anchor="ctr"/>
-          <a:lstStyle/>
-          <a:p>
-            <a:pPr indent="0" marL="0">
-              <a:buNone/>
-            </a:pPr>
-            <a:r>
-              <a:rPr lang="en-US" sz="1000" dirty="0">
-                <a:solidFill>
-                  <a:srgbClr val="555555"/>
+            <a:ext cx="5943600" cy="256032"/>
+          </a:xfrm>
+          <a:prstGeom prst="rect">
+            <a:avLst/>
+          </a:prstGeom>
+          <a:noFill/>
+          <a:ln/>
+        </p:spPr>
+        <p:txBody>
+          <a:bodyPr wrap="square" lIns="0" tIns="0" rIns="0" bIns="0" rtlCol="0" anchor="ctr"/>
+          <a:lstStyle/>
+          <a:p>
+            <a:pPr indent="0" marL="0">
+              <a:buNone/>
+            </a:pPr>
+            <a:r>
+              <a:rPr lang="en-US" sz="1100" dirty="0">
+                <a:solidFill>
+                  <a:srgbClr val="6A6A6A"/>
                 </a:solidFill>
                 <a:latin typeface="Arial" pitchFamily="34" charset="0"/>
                 <a:ea typeface="Arial" pitchFamily="34" charset="-122"/>
@@ -4701,20 +5116,20 @@
               </a:rPr>
               <a:t>Joshua Konkle  |  Chief of Staff Strategist</a:t>
             </a:r>
-            <a:endParaRPr lang="en-US" sz="1000" dirty="0"/>
-          </a:p>
-        </p:txBody>
-      </p:sp>
-      <p:sp>
-        <p:nvSpPr>
-          <p:cNvPr id="10" name="Text 8"/>
-          <p:cNvSpPr/>
-          <p:nvPr/>
-        </p:nvSpPr>
-        <p:spPr>
-          <a:xfrm>
-            <a:off x="7772400" y="4800600"/>
-            <a:ext cx="914400" cy="228600"/>
+            <a:endParaRPr lang="en-US" sz="1100" dirty="0"/>
+          </a:p>
+        </p:txBody>
+      </p:sp>
+      <p:sp>
+        <p:nvSpPr>
+          <p:cNvPr id="12" name="Text 10"/>
+          <p:cNvSpPr/>
+          <p:nvPr/>
+        </p:nvSpPr>
+        <p:spPr>
+          <a:xfrm>
+            <a:off x="7498080" y="4800600"/>
+            <a:ext cx="1188720" cy="256032"/>
           </a:xfrm>
           <a:prstGeom prst="rect">
             <a:avLst/>
@@ -4730,9 +5145,9 @@
               <a:buNone/>
             </a:pPr>
             <a:r>
-              <a:rPr lang="en-US" sz="1000" dirty="0">
-                <a:solidFill>
-                  <a:srgbClr val="555555"/>
+              <a:rPr lang="en-US" sz="1100" dirty="0">
+                <a:solidFill>
+                  <a:srgbClr val="6A6A6A"/>
                 </a:solidFill>
                 <a:latin typeface="Arial" pitchFamily="34" charset="0"/>
                 <a:ea typeface="Arial" pitchFamily="34" charset="-122"/>
@@ -4740,7 +5155,7 @@
               </a:rPr>
               <a:t>5 / 12</a:t>
             </a:r>
-            <a:endParaRPr lang="en-US" sz="1000" dirty="0"/>
+            <a:endParaRPr lang="en-US" sz="1100" dirty="0"/>
           </a:p>
         </p:txBody>
       </p:sp>
@@ -4755,13 +5170,6 @@
 <file path=ppt/slides/slide6.xml><?xml version="1.0" encoding="utf-8"?>
 <p:sld xmlns:a="http://schemas.openxmlformats.org/drawingml/2006/main" xmlns:r="http://schemas.openxmlformats.org/officeDocument/2006/relationships" xmlns:p="http://schemas.openxmlformats.org/presentationml/2006/main">
   <p:cSld name="Slide 6">
-    <p:bg>
-      <p:bgPr>
-        <a:solidFill>
-          <a:srgbClr val="FFFFFF"/>
-        </a:solidFill>
-      </p:bgPr>
-    </p:bg>
     <p:spTree>
       <p:nvGrpSpPr>
         <p:cNvPr id="1" name=""/>
@@ -4778,32 +5186,57 @@
       </p:grpSpPr>
       <p:sp>
         <p:nvSpPr>
-          <p:cNvPr id="2" name="Text 0"/>
+          <p:cNvPr id="2" name="Shape 0"/>
+          <p:cNvSpPr/>
+          <p:nvPr/>
+        </p:nvSpPr>
+        <p:spPr>
+          <a:xfrm>
+            <a:off x="0" y="0"/>
+            <a:ext cx="9144000" cy="5143500"/>
+          </a:xfrm>
+          <a:prstGeom prst="rect">
+            <a:avLst/>
+          </a:prstGeom>
+          <a:solidFill>
+            <a:srgbClr val="FFFFFF"/>
+          </a:solidFill>
+          <a:ln w="12700">
+            <a:solidFill>
+              <a:srgbClr val="FFFFFF"/>
+            </a:solidFill>
+            <a:prstDash val="solid"/>
+          </a:ln>
+        </p:spPr>
+      </p:sp>
+      <p:sp>
+        <p:nvSpPr>
+          <p:cNvPr id="3" name="Text 1"/>
           <p:cNvSpPr/>
           <p:nvPr/>
         </p:nvSpPr>
         <p:spPr>
           <a:xfrm>
             <a:off x="457200" y="274320"/>
-            <a:ext cx="8229600" cy="411480"/>
-          </a:xfrm>
-          <a:prstGeom prst="rect">
-            <a:avLst/>
-          </a:prstGeom>
-          <a:noFill/>
-          <a:ln/>
-        </p:spPr>
-        <p:txBody>
-          <a:bodyPr wrap="square" lIns="0" tIns="0" rIns="0" bIns="0" rtlCol="0" anchor="ctr"/>
-          <a:lstStyle/>
-          <a:p>
-            <a:pPr indent="0" marL="0">
-              <a:buNone/>
-            </a:pPr>
-            <a:r>
-              <a:rPr lang="en-US" sz="2600" b="1" dirty="0">
-                <a:solidFill>
-                  <a:srgbClr val="1A1A1A"/>
+            <a:ext cx="8229600" cy="365760"/>
+          </a:xfrm>
+          <a:prstGeom prst="rect">
+            <a:avLst/>
+          </a:prstGeom>
+          <a:noFill/>
+          <a:ln/>
+        </p:spPr>
+        <p:txBody>
+          <a:bodyPr wrap="square" lIns="0" tIns="0" rIns="0" bIns="0" rtlCol="0" anchor="ctr"/>
+          <a:lstStyle/>
+          <a:p>
+            <a:pPr indent="0" marL="0">
+              <a:buNone/>
+            </a:pPr>
+            <a:r>
+              <a:rPr lang="en-US" sz="2200" b="1" dirty="0">
+                <a:solidFill>
+                  <a:srgbClr val="1B2A4A"/>
                 </a:solidFill>
                 <a:latin typeface="Arial" pitchFamily="34" charset="0"/>
                 <a:ea typeface="Arial" pitchFamily="34" charset="-122"/>
@@ -4811,19 +5244,19 @@
               </a:rPr>
               <a:t>Location &amp; Domestic Capacity</a:t>
             </a:r>
-            <a:endParaRPr lang="en-US" sz="2600" dirty="0"/>
-          </a:p>
-        </p:txBody>
-      </p:sp>
-      <p:sp>
-        <p:nvSpPr>
-          <p:cNvPr id="3" name="Text 1"/>
-          <p:cNvSpPr/>
-          <p:nvPr/>
-        </p:nvSpPr>
-        <p:spPr>
-          <a:xfrm>
-            <a:off x="457200" y="822960"/>
+            <a:endParaRPr lang="en-US" sz="2200" dirty="0"/>
+          </a:p>
+        </p:txBody>
+      </p:sp>
+      <p:sp>
+        <p:nvSpPr>
+          <p:cNvPr id="4" name="Text 2"/>
+          <p:cNvSpPr/>
+          <p:nvPr/>
+        </p:nvSpPr>
+        <p:spPr>
+          <a:xfrm>
+            <a:off x="457200" y="777240"/>
             <a:ext cx="8229600" cy="320040"/>
           </a:xfrm>
           <a:prstGeom prst="rect">
@@ -4842,7 +5275,7 @@
             <a:r>
               <a:rPr lang="en-US" sz="1400" dirty="0">
                 <a:solidFill>
-                  <a:srgbClr val="555555"/>
+                  <a:srgbClr val="5A5A5A"/>
                 </a:solidFill>
                 <a:latin typeface="Arial" pitchFamily="34" charset="0"/>
                 <a:ea typeface="Arial" pitchFamily="34" charset="-122"/>
@@ -4856,35 +5289,143 @@
       </p:sp>
       <p:sp>
         <p:nvSpPr>
-          <p:cNvPr id="4" name="Shape 2"/>
-          <p:cNvSpPr/>
-          <p:nvPr/>
-        </p:nvSpPr>
-        <p:spPr>
-          <a:xfrm>
-            <a:off x="457200" y="1463040"/>
+          <p:cNvPr id="5" name="Shape 3"/>
+          <p:cNvSpPr/>
+          <p:nvPr/>
+        </p:nvSpPr>
+        <p:spPr>
+          <a:xfrm>
+            <a:off x="502920" y="1417320"/>
             <a:ext cx="365760" cy="365760"/>
           </a:xfrm>
           <a:prstGeom prst="ellipse">
             <a:avLst/>
           </a:prstGeom>
           <a:solidFill>
-            <a:srgbClr val="1A1A1A"/>
+            <a:srgbClr val="1B2A4A"/>
           </a:solidFill>
-          <a:ln/>
-        </p:spPr>
-      </p:sp>
-      <p:sp>
-        <p:nvSpPr>
-          <p:cNvPr id="5" name="Text 3"/>
-          <p:cNvSpPr/>
-          <p:nvPr/>
-        </p:nvSpPr>
-        <p:spPr>
-          <a:xfrm>
-            <a:off x="457200" y="1463040"/>
+          <a:ln w="12700">
+            <a:solidFill>
+              <a:srgbClr val="1B2A4A"/>
+            </a:solidFill>
+            <a:prstDash val="solid"/>
+          </a:ln>
+        </p:spPr>
+      </p:sp>
+      <p:sp>
+        <p:nvSpPr>
+          <p:cNvPr id="6" name="Text 4"/>
+          <p:cNvSpPr/>
+          <p:nvPr/>
+        </p:nvSpPr>
+        <p:spPr>
+          <a:xfrm>
+            <a:off x="502920" y="1463040"/>
+            <a:ext cx="365760" cy="274320"/>
+          </a:xfrm>
+          <a:prstGeom prst="rect">
+            <a:avLst/>
+          </a:prstGeom>
+          <a:noFill/>
+          <a:ln/>
+        </p:spPr>
+        <p:txBody>
+          <a:bodyPr wrap="square" lIns="0" tIns="0" rIns="0" bIns="0" rtlCol="0" anchor="ctr"/>
+          <a:lstStyle/>
+          <a:p>
+            <a:pPr algn="ctr" indent="0" marL="0">
+              <a:buNone/>
+            </a:pPr>
+            <a:r>
+              <a:rPr lang="en-US" sz="1400" b="1" dirty="0">
+                <a:solidFill>
+                  <a:srgbClr val="C9A227"/>
+                </a:solidFill>
+                <a:latin typeface="Arial" pitchFamily="34" charset="0"/>
+                <a:ea typeface="Arial" pitchFamily="34" charset="-122"/>
+                <a:cs typeface="Arial" pitchFamily="34" charset="-120"/>
+              </a:rPr>
+              <a:t>1</a:t>
+            </a:r>
+            <a:endParaRPr lang="en-US" sz="1400" dirty="0"/>
+          </a:p>
+        </p:txBody>
+      </p:sp>
+      <p:sp>
+        <p:nvSpPr>
+          <p:cNvPr id="7" name="Text 5"/>
+          <p:cNvSpPr/>
+          <p:nvPr/>
+        </p:nvSpPr>
+        <p:spPr>
+          <a:xfrm>
+            <a:off x="1051560" y="1417320"/>
+            <a:ext cx="7498080" cy="640080"/>
+          </a:xfrm>
+          <a:prstGeom prst="rect">
+            <a:avLst/>
+          </a:prstGeom>
+          <a:noFill/>
+          <a:ln/>
+        </p:spPr>
+        <p:txBody>
+          <a:bodyPr wrap="square" lIns="0" tIns="0" rIns="0" bIns="0" rtlCol="0" anchor="ctr"/>
+          <a:lstStyle/>
+          <a:p>
+            <a:pPr indent="0" marL="0">
+              <a:buNone/>
+            </a:pPr>
+            <a:r>
+              <a:rPr lang="en-US" sz="1400" dirty="0">
+                <a:solidFill>
+                  <a:srgbClr val="2A2A2A"/>
+                </a:solidFill>
+                <a:latin typeface="Arial" pitchFamily="34" charset="0"/>
+                <a:ea typeface="Arial" pitchFamily="34" charset="-122"/>
+                <a:cs typeface="Arial" pitchFamily="34" charset="-120"/>
+              </a:rPr>
+              <a:t>Does this location choice increase or decrease long-term domestic capability?</a:t>
+            </a:r>
+            <a:endParaRPr lang="en-US" sz="1400" dirty="0"/>
+          </a:p>
+        </p:txBody>
+      </p:sp>
+      <p:sp>
+        <p:nvSpPr>
+          <p:cNvPr id="8" name="Shape 6"/>
+          <p:cNvSpPr/>
+          <p:nvPr/>
+        </p:nvSpPr>
+        <p:spPr>
+          <a:xfrm>
+            <a:off x="502920" y="2331720"/>
             <a:ext cx="365760" cy="365760"/>
           </a:xfrm>
+          <a:prstGeom prst="ellipse">
+            <a:avLst/>
+          </a:prstGeom>
+          <a:solidFill>
+            <a:srgbClr val="1B2A4A"/>
+          </a:solidFill>
+          <a:ln w="12700">
+            <a:solidFill>
+              <a:srgbClr val="1B2A4A"/>
+            </a:solidFill>
+            <a:prstDash val="solid"/>
+          </a:ln>
+        </p:spPr>
+      </p:sp>
+      <p:sp>
+        <p:nvSpPr>
+          <p:cNvPr id="9" name="Text 7"/>
+          <p:cNvSpPr/>
+          <p:nvPr/>
+        </p:nvSpPr>
+        <p:spPr>
+          <a:xfrm>
+            <a:off x="502920" y="2377440"/>
+            <a:ext cx="365760" cy="274320"/>
+          </a:xfrm>
           <a:prstGeom prst="rect">
             <a:avLst/>
           </a:prstGeom>
@@ -4901,13 +5442,13 @@
             <a:r>
               <a:rPr lang="en-US" sz="1400" b="1" dirty="0">
                 <a:solidFill>
-                  <a:srgbClr val="F5F5F5"/>
-                </a:solidFill>
-                <a:latin typeface="Arial" pitchFamily="34" charset="0"/>
-                <a:ea typeface="Arial" pitchFamily="34" charset="-122"/>
-                <a:cs typeface="Arial" pitchFamily="34" charset="-120"/>
-              </a:rPr>
-              <a:t>1</a:t>
+                  <a:srgbClr val="C9A227"/>
+                </a:solidFill>
+                <a:latin typeface="Arial" pitchFamily="34" charset="0"/>
+                <a:ea typeface="Arial" pitchFamily="34" charset="-122"/>
+                <a:cs typeface="Arial" pitchFamily="34" charset="-120"/>
+              </a:rPr>
+              <a:t>2</a:t>
             </a:r>
             <a:endParaRPr lang="en-US" sz="1400" dirty="0"/>
           </a:p>
@@ -4915,13 +5456,13 @@
       </p:sp>
       <p:sp>
         <p:nvSpPr>
-          <p:cNvPr id="6" name="Text 4"/>
-          <p:cNvSpPr/>
-          <p:nvPr/>
-        </p:nvSpPr>
-        <p:spPr>
-          <a:xfrm>
-            <a:off x="1051560" y="1371600"/>
+          <p:cNvPr id="10" name="Text 8"/>
+          <p:cNvSpPr/>
+          <p:nvPr/>
+        </p:nvSpPr>
+        <p:spPr>
+          <a:xfrm>
+            <a:off x="1051560" y="2331720"/>
             <a:ext cx="7498080" cy="640080"/>
           </a:xfrm>
           <a:prstGeom prst="rect">
@@ -4938,50 +5479,55 @@
               <a:buNone/>
             </a:pPr>
             <a:r>
-              <a:rPr lang="en-US" sz="1500" dirty="0">
-                <a:solidFill>
-                  <a:srgbClr val="1A1A1A"/>
-                </a:solidFill>
-                <a:latin typeface="Arial" pitchFamily="34" charset="0"/>
-                <a:ea typeface="Arial" pitchFamily="34" charset="-122"/>
-                <a:cs typeface="Arial" pitchFamily="34" charset="-120"/>
-              </a:rPr>
-              <a:t>Does this location choice increase or decrease long-term domestic capability?</a:t>
-            </a:r>
-            <a:endParaRPr lang="en-US" sz="1500" dirty="0"/>
-          </a:p>
-        </p:txBody>
-      </p:sp>
-      <p:sp>
-        <p:nvSpPr>
-          <p:cNvPr id="7" name="Shape 5"/>
-          <p:cNvSpPr/>
-          <p:nvPr/>
-        </p:nvSpPr>
-        <p:spPr>
-          <a:xfrm>
-            <a:off x="457200" y="2377440"/>
+              <a:rPr lang="en-US" sz="1400" dirty="0">
+                <a:solidFill>
+                  <a:srgbClr val="2A2A2A"/>
+                </a:solidFill>
+                <a:latin typeface="Arial" pitchFamily="34" charset="0"/>
+                <a:ea typeface="Arial" pitchFamily="34" charset="-122"/>
+                <a:cs typeface="Arial" pitchFamily="34" charset="-120"/>
+              </a:rPr>
+              <a:t>How does it affect our ability to set and achieve meaningful goals around workforce quality and innovation?</a:t>
+            </a:r>
+            <a:endParaRPr lang="en-US" sz="1400" dirty="0"/>
+          </a:p>
+        </p:txBody>
+      </p:sp>
+      <p:sp>
+        <p:nvSpPr>
+          <p:cNvPr id="11" name="Shape 9"/>
+          <p:cNvSpPr/>
+          <p:nvPr/>
+        </p:nvSpPr>
+        <p:spPr>
+          <a:xfrm>
+            <a:off x="502920" y="3246120"/>
             <a:ext cx="365760" cy="365760"/>
           </a:xfrm>
           <a:prstGeom prst="ellipse">
             <a:avLst/>
           </a:prstGeom>
           <a:solidFill>
-            <a:srgbClr val="1A1A1A"/>
+            <a:srgbClr val="1B2A4A"/>
           </a:solidFill>
-          <a:ln/>
-        </p:spPr>
-      </p:sp>
-      <p:sp>
-        <p:nvSpPr>
-          <p:cNvPr id="8" name="Text 6"/>
-          <p:cNvSpPr/>
-          <p:nvPr/>
-        </p:nvSpPr>
-        <p:spPr>
-          <a:xfrm>
-            <a:off x="457200" y="2377440"/>
-            <a:ext cx="365760" cy="365760"/>
+          <a:ln w="12700">
+            <a:solidFill>
+              <a:srgbClr val="1B2A4A"/>
+            </a:solidFill>
+            <a:prstDash val="solid"/>
+          </a:ln>
+        </p:spPr>
+      </p:sp>
+      <p:sp>
+        <p:nvSpPr>
+          <p:cNvPr id="12" name="Text 10"/>
+          <p:cNvSpPr/>
+          <p:nvPr/>
+        </p:nvSpPr>
+        <p:spPr>
+          <a:xfrm>
+            <a:off x="502920" y="3291840"/>
+            <a:ext cx="365760" cy="274320"/>
           </a:xfrm>
           <a:prstGeom prst="rect">
             <a:avLst/>
@@ -4999,13 +5545,13 @@
             <a:r>
               <a:rPr lang="en-US" sz="1400" b="1" dirty="0">
                 <a:solidFill>
-                  <a:srgbClr val="F5F5F5"/>
-                </a:solidFill>
-                <a:latin typeface="Arial" pitchFamily="34" charset="0"/>
-                <a:ea typeface="Arial" pitchFamily="34" charset="-122"/>
-                <a:cs typeface="Arial" pitchFamily="34" charset="-120"/>
-              </a:rPr>
-              <a:t>2</a:t>
+                  <a:srgbClr val="C9A227"/>
+                </a:solidFill>
+                <a:latin typeface="Arial" pitchFamily="34" charset="0"/>
+                <a:ea typeface="Arial" pitchFamily="34" charset="-122"/>
+                <a:cs typeface="Arial" pitchFamily="34" charset="-120"/>
+              </a:rPr>
+              <a:t>3</a:t>
             </a:r>
             <a:endParaRPr lang="en-US" sz="1400" dirty="0"/>
           </a:p>
@@ -5013,13 +5559,13 @@
       </p:sp>
       <p:sp>
         <p:nvSpPr>
-          <p:cNvPr id="9" name="Text 7"/>
-          <p:cNvSpPr/>
-          <p:nvPr/>
-        </p:nvSpPr>
-        <p:spPr>
-          <a:xfrm>
-            <a:off x="1051560" y="2286000"/>
+          <p:cNvPr id="13" name="Text 11"/>
+          <p:cNvSpPr/>
+          <p:nvPr/>
+        </p:nvSpPr>
+        <p:spPr>
+          <a:xfrm>
+            <a:off x="1051560" y="3246120"/>
             <a:ext cx="7498080" cy="640080"/>
           </a:xfrm>
           <a:prstGeom prst="rect">
@@ -5036,74 +5582,15 @@
               <a:buNone/>
             </a:pPr>
             <a:r>
-              <a:rPr lang="en-US" sz="1500" dirty="0">
-                <a:solidFill>
-                  <a:srgbClr val="1A1A1A"/>
-                </a:solidFill>
-                <a:latin typeface="Arial" pitchFamily="34" charset="0"/>
-                <a:ea typeface="Arial" pitchFamily="34" charset="-122"/>
-                <a:cs typeface="Arial" pitchFamily="34" charset="-120"/>
-              </a:rPr>
-              <a:t>How does it affect our ability to set and achieve meaningful goals around workforce quality and innovation?</a:t>
-            </a:r>
-            <a:endParaRPr lang="en-US" sz="1500" dirty="0"/>
-          </a:p>
-        </p:txBody>
-      </p:sp>
-      <p:sp>
-        <p:nvSpPr>
-          <p:cNvPr id="10" name="Shape 8"/>
-          <p:cNvSpPr/>
-          <p:nvPr/>
-        </p:nvSpPr>
-        <p:spPr>
-          <a:xfrm>
-            <a:off x="457200" y="3291840"/>
-            <a:ext cx="365760" cy="365760"/>
-          </a:xfrm>
-          <a:prstGeom prst="ellipse">
-            <a:avLst/>
-          </a:prstGeom>
-          <a:solidFill>
-            <a:srgbClr val="1A1A1A"/>
-          </a:solidFill>
-          <a:ln/>
-        </p:spPr>
-      </p:sp>
-      <p:sp>
-        <p:nvSpPr>
-          <p:cNvPr id="11" name="Text 9"/>
-          <p:cNvSpPr/>
-          <p:nvPr/>
-        </p:nvSpPr>
-        <p:spPr>
-          <a:xfrm>
-            <a:off x="457200" y="3291840"/>
-            <a:ext cx="365760" cy="365760"/>
-          </a:xfrm>
-          <a:prstGeom prst="rect">
-            <a:avLst/>
-          </a:prstGeom>
-          <a:noFill/>
-          <a:ln/>
-        </p:spPr>
-        <p:txBody>
-          <a:bodyPr wrap="square" lIns="0" tIns="0" rIns="0" bIns="0" rtlCol="0" anchor="ctr"/>
-          <a:lstStyle/>
-          <a:p>
-            <a:pPr algn="ctr" indent="0" marL="0">
-              <a:buNone/>
-            </a:pPr>
-            <a:r>
-              <a:rPr lang="en-US" sz="1400" b="1" dirty="0">
-                <a:solidFill>
-                  <a:srgbClr val="F5F5F5"/>
-                </a:solidFill>
-                <a:latin typeface="Arial" pitchFamily="34" charset="0"/>
-                <a:ea typeface="Arial" pitchFamily="34" charset="-122"/>
-                <a:cs typeface="Arial" pitchFamily="34" charset="-120"/>
-              </a:rPr>
-              <a:t>3</a:t>
+              <a:rPr lang="en-US" sz="1400" dirty="0">
+                <a:solidFill>
+                  <a:srgbClr val="2A2A2A"/>
+                </a:solidFill>
+                <a:latin typeface="Arial" pitchFamily="34" charset="0"/>
+                <a:ea typeface="Arial" pitchFamily="34" charset="-122"/>
+                <a:cs typeface="Arial" pitchFamily="34" charset="-120"/>
+              </a:rPr>
+              <a:t>Are we treating non-domestic options as temporary bridges toward greater American capacity, or as permanent low-cost substitutes?</a:t>
             </a:r>
             <a:endParaRPr lang="en-US" sz="1400" dirty="0"/>
           </a:p>
@@ -5111,71 +5598,32 @@
       </p:sp>
       <p:sp>
         <p:nvSpPr>
-          <p:cNvPr id="12" name="Text 10"/>
-          <p:cNvSpPr/>
-          <p:nvPr/>
-        </p:nvSpPr>
-        <p:spPr>
-          <a:xfrm>
-            <a:off x="1051560" y="3200400"/>
-            <a:ext cx="7498080" cy="640080"/>
-          </a:xfrm>
-          <a:prstGeom prst="rect">
-            <a:avLst/>
-          </a:prstGeom>
-          <a:noFill/>
-          <a:ln/>
-        </p:spPr>
-        <p:txBody>
-          <a:bodyPr wrap="square" lIns="0" tIns="0" rIns="0" bIns="0" rtlCol="0" anchor="ctr"/>
-          <a:lstStyle/>
-          <a:p>
-            <a:pPr indent="0" marL="0">
-              <a:buNone/>
-            </a:pPr>
-            <a:r>
-              <a:rPr lang="en-US" sz="1500" dirty="0">
-                <a:solidFill>
-                  <a:srgbClr val="1A1A1A"/>
-                </a:solidFill>
-                <a:latin typeface="Arial" pitchFamily="34" charset="0"/>
-                <a:ea typeface="Arial" pitchFamily="34" charset="-122"/>
-                <a:cs typeface="Arial" pitchFamily="34" charset="-120"/>
-              </a:rPr>
-              <a:t>Are we treating non-domestic options as temporary bridges toward greater American capacity, or as permanent low-cost substitutes?</a:t>
-            </a:r>
-            <a:endParaRPr lang="en-US" sz="1500" dirty="0"/>
-          </a:p>
-        </p:txBody>
-      </p:sp>
-      <p:sp>
-        <p:nvSpPr>
-          <p:cNvPr id="13" name="Text 11"/>
+          <p:cNvPr id="14" name="Text 12"/>
           <p:cNvSpPr/>
           <p:nvPr/>
         </p:nvSpPr>
         <p:spPr>
           <a:xfrm>
             <a:off x="457200" y="4800600"/>
-            <a:ext cx="5943600" cy="228600"/>
-          </a:xfrm>
-          <a:prstGeom prst="rect">
-            <a:avLst/>
-          </a:prstGeom>
-          <a:noFill/>
-          <a:ln/>
-        </p:spPr>
-        <p:txBody>
-          <a:bodyPr wrap="square" lIns="0" tIns="0" rIns="0" bIns="0" rtlCol="0" anchor="ctr"/>
-          <a:lstStyle/>
-          <a:p>
-            <a:pPr indent="0" marL="0">
-              <a:buNone/>
-            </a:pPr>
-            <a:r>
-              <a:rPr lang="en-US" sz="1000" dirty="0">
-                <a:solidFill>
-                  <a:srgbClr val="555555"/>
+            <a:ext cx="5943600" cy="256032"/>
+          </a:xfrm>
+          <a:prstGeom prst="rect">
+            <a:avLst/>
+          </a:prstGeom>
+          <a:noFill/>
+          <a:ln/>
+        </p:spPr>
+        <p:txBody>
+          <a:bodyPr wrap="square" lIns="0" tIns="0" rIns="0" bIns="0" rtlCol="0" anchor="ctr"/>
+          <a:lstStyle/>
+          <a:p>
+            <a:pPr indent="0" marL="0">
+              <a:buNone/>
+            </a:pPr>
+            <a:r>
+              <a:rPr lang="en-US" sz="1100" dirty="0">
+                <a:solidFill>
+                  <a:srgbClr val="6A6A6A"/>
                 </a:solidFill>
                 <a:latin typeface="Arial" pitchFamily="34" charset="0"/>
                 <a:ea typeface="Arial" pitchFamily="34" charset="-122"/>
@@ -5183,20 +5631,20 @@
               </a:rPr>
               <a:t>Joshua Konkle  |  Chief of Staff Strategist</a:t>
             </a:r>
-            <a:endParaRPr lang="en-US" sz="1000" dirty="0"/>
-          </a:p>
-        </p:txBody>
-      </p:sp>
-      <p:sp>
-        <p:nvSpPr>
-          <p:cNvPr id="14" name="Text 12"/>
-          <p:cNvSpPr/>
-          <p:nvPr/>
-        </p:nvSpPr>
-        <p:spPr>
-          <a:xfrm>
-            <a:off x="7772400" y="4800600"/>
-            <a:ext cx="914400" cy="228600"/>
+            <a:endParaRPr lang="en-US" sz="1100" dirty="0"/>
+          </a:p>
+        </p:txBody>
+      </p:sp>
+      <p:sp>
+        <p:nvSpPr>
+          <p:cNvPr id="15" name="Text 13"/>
+          <p:cNvSpPr/>
+          <p:nvPr/>
+        </p:nvSpPr>
+        <p:spPr>
+          <a:xfrm>
+            <a:off x="7498080" y="4800600"/>
+            <a:ext cx="1188720" cy="256032"/>
           </a:xfrm>
           <a:prstGeom prst="rect">
             <a:avLst/>
@@ -5212,9 +5660,9 @@
               <a:buNone/>
             </a:pPr>
             <a:r>
-              <a:rPr lang="en-US" sz="1000" dirty="0">
-                <a:solidFill>
-                  <a:srgbClr val="555555"/>
+              <a:rPr lang="en-US" sz="1100" dirty="0">
+                <a:solidFill>
+                  <a:srgbClr val="6A6A6A"/>
                 </a:solidFill>
                 <a:latin typeface="Arial" pitchFamily="34" charset="0"/>
                 <a:ea typeface="Arial" pitchFamily="34" charset="-122"/>
@@ -5222,7 +5670,7 @@
               </a:rPr>
               <a:t>6 / 12</a:t>
             </a:r>
-            <a:endParaRPr lang="en-US" sz="1000" dirty="0"/>
+            <a:endParaRPr lang="en-US" sz="1100" dirty="0"/>
           </a:p>
         </p:txBody>
       </p:sp>
@@ -5237,13 +5685,6 @@
 <file path=ppt/slides/slide7.xml><?xml version="1.0" encoding="utf-8"?>
 <p:sld xmlns:a="http://schemas.openxmlformats.org/drawingml/2006/main" xmlns:r="http://schemas.openxmlformats.org/officeDocument/2006/relationships" xmlns:p="http://schemas.openxmlformats.org/presentationml/2006/main">
   <p:cSld name="Slide 7">
-    <p:bg>
-      <p:bgPr>
-        <a:solidFill>
-          <a:srgbClr val="FFFFFF"/>
-        </a:solidFill>
-      </p:bgPr>
-    </p:bg>
     <p:spTree>
       <p:nvGrpSpPr>
         <p:cNvPr id="1" name=""/>
@@ -5260,32 +5701,57 @@
       </p:grpSpPr>
       <p:sp>
         <p:nvSpPr>
-          <p:cNvPr id="2" name="Text 0"/>
-          <p:cNvSpPr/>
-          <p:nvPr/>
-        </p:nvSpPr>
-        <p:spPr>
-          <a:xfrm>
-            <a:off x="457200" y="274320"/>
-            <a:ext cx="8229600" cy="411480"/>
-          </a:xfrm>
-          <a:prstGeom prst="rect">
-            <a:avLst/>
-          </a:prstGeom>
-          <a:noFill/>
-          <a:ln/>
-        </p:spPr>
-        <p:txBody>
-          <a:bodyPr wrap="square" lIns="0" tIns="0" rIns="0" bIns="0" rtlCol="0" anchor="ctr"/>
-          <a:lstStyle/>
-          <a:p>
-            <a:pPr indent="0" marL="0">
-              <a:buNone/>
-            </a:pPr>
-            <a:r>
-              <a:rPr lang="en-US" sz="2600" b="1" dirty="0">
-                <a:solidFill>
-                  <a:srgbClr val="1A1A1A"/>
+          <p:cNvPr id="2" name="Shape 0"/>
+          <p:cNvSpPr/>
+          <p:nvPr/>
+        </p:nvSpPr>
+        <p:spPr>
+          <a:xfrm>
+            <a:off x="0" y="0"/>
+            <a:ext cx="9144000" cy="5143500"/>
+          </a:xfrm>
+          <a:prstGeom prst="rect">
+            <a:avLst/>
+          </a:prstGeom>
+          <a:solidFill>
+            <a:srgbClr val="FFFFFF"/>
+          </a:solidFill>
+          <a:ln w="12700">
+            <a:solidFill>
+              <a:srgbClr val="FFFFFF"/>
+            </a:solidFill>
+            <a:prstDash val="solid"/>
+          </a:ln>
+        </p:spPr>
+      </p:sp>
+      <p:sp>
+        <p:nvSpPr>
+          <p:cNvPr id="3" name="Text 1"/>
+          <p:cNvSpPr/>
+          <p:nvPr/>
+        </p:nvSpPr>
+        <p:spPr>
+          <a:xfrm>
+            <a:off x="457200" y="228600"/>
+            <a:ext cx="8229600" cy="320040"/>
+          </a:xfrm>
+          <a:prstGeom prst="rect">
+            <a:avLst/>
+          </a:prstGeom>
+          <a:noFill/>
+          <a:ln/>
+        </p:spPr>
+        <p:txBody>
+          <a:bodyPr wrap="square" lIns="0" tIns="0" rIns="0" bIns="0" rtlCol="0" anchor="ctr"/>
+          <a:lstStyle/>
+          <a:p>
+            <a:pPr indent="0" marL="0">
+              <a:buNone/>
+            </a:pPr>
+            <a:r>
+              <a:rPr lang="en-US" sz="2200" b="1" dirty="0">
+                <a:solidFill>
+                  <a:srgbClr val="1B2A4A"/>
                 </a:solidFill>
                 <a:latin typeface="Arial" pitchFamily="34" charset="0"/>
                 <a:ea typeface="Arial" pitchFamily="34" charset="-122"/>
@@ -5293,46 +5759,7 @@
               </a:rPr>
               <a:t>OKR Redesign Principles</a:t>
             </a:r>
-            <a:endParaRPr lang="en-US" sz="2600" dirty="0"/>
-          </a:p>
-        </p:txBody>
-      </p:sp>
-      <p:sp>
-        <p:nvSpPr>
-          <p:cNvPr id="3" name="Text 1"/>
-          <p:cNvSpPr/>
-          <p:nvPr/>
-        </p:nvSpPr>
-        <p:spPr>
-          <a:xfrm>
-            <a:off x="457200" y="822960"/>
-            <a:ext cx="8229600" cy="320040"/>
-          </a:xfrm>
-          <a:prstGeom prst="rect">
-            <a:avLst/>
-          </a:prstGeom>
-          <a:noFill/>
-          <a:ln/>
-        </p:spPr>
-        <p:txBody>
-          <a:bodyPr wrap="square" lIns="0" tIns="0" rIns="0" bIns="0" rtlCol="0" anchor="ctr"/>
-          <a:lstStyle/>
-          <a:p>
-            <a:pPr indent="0" marL="0">
-              <a:buNone/>
-            </a:pPr>
-            <a:r>
-              <a:rPr lang="en-US" sz="1600" b="1" dirty="0">
-                <a:solidFill>
-                  <a:srgbClr val="1A1A1A"/>
-                </a:solidFill>
-                <a:latin typeface="Arial" pitchFamily="34" charset="0"/>
-                <a:ea typeface="Arial" pitchFamily="34" charset="-122"/>
-                <a:cs typeface="Arial" pitchFamily="34" charset="-120"/>
-              </a:rPr>
-              <a:t>Clarifying the System</a:t>
-            </a:r>
-            <a:endParaRPr lang="en-US" sz="1600" dirty="0"/>
+            <a:endParaRPr lang="en-US" sz="2200" dirty="0"/>
           </a:p>
         </p:txBody>
       </p:sp>
@@ -5344,8 +5771,138 @@
         </p:nvSpPr>
         <p:spPr>
           <a:xfrm>
-            <a:off x="457200" y="1188720"/>
-            <a:ext cx="8229600" cy="548640"/>
+            <a:off x="457200" y="640080"/>
+            <a:ext cx="8229600" cy="274320"/>
+          </a:xfrm>
+          <a:prstGeom prst="rect">
+            <a:avLst/>
+          </a:prstGeom>
+          <a:noFill/>
+          <a:ln/>
+        </p:spPr>
+        <p:txBody>
+          <a:bodyPr wrap="square" lIns="0" tIns="0" rIns="0" bIns="0" rtlCol="0" anchor="ctr"/>
+          <a:lstStyle/>
+          <a:p>
+            <a:pPr indent="0" marL="0">
+              <a:buNone/>
+            </a:pPr>
+            <a:r>
+              <a:rPr lang="en-US" sz="1300" dirty="0">
+                <a:solidFill>
+                  <a:srgbClr val="5A5A5A"/>
+                </a:solidFill>
+                <a:latin typeface="Arial" pitchFamily="34" charset="0"/>
+                <a:ea typeface="Arial" pitchFamily="34" charset="-122"/>
+                <a:cs typeface="Arial" pitchFamily="34" charset="-120"/>
+              </a:rPr>
+              <a:t>Objectives = directional goals    ·    Key Results = measurable evidence of progress</a:t>
+            </a:r>
+            <a:endParaRPr lang="en-US" sz="1300" dirty="0"/>
+          </a:p>
+        </p:txBody>
+      </p:sp>
+      <p:sp>
+        <p:nvSpPr>
+          <p:cNvPr id="5" name="Text 3"/>
+          <p:cNvSpPr/>
+          <p:nvPr/>
+        </p:nvSpPr>
+        <p:spPr>
+          <a:xfrm>
+            <a:off x="457200" y="914400"/>
+            <a:ext cx="8229600" cy="274320"/>
+          </a:xfrm>
+          <a:prstGeom prst="rect">
+            <a:avLst/>
+          </a:prstGeom>
+          <a:noFill/>
+          <a:ln/>
+        </p:spPr>
+        <p:txBody>
+          <a:bodyPr wrap="square" lIns="0" tIns="0" rIns="0" bIns="0" rtlCol="0" anchor="ctr"/>
+          <a:lstStyle/>
+          <a:p>
+            <a:pPr indent="0" marL="0">
+              <a:buNone/>
+            </a:pPr>
+            <a:r>
+              <a:rPr lang="en-US" sz="1300" dirty="0">
+                <a:solidFill>
+                  <a:srgbClr val="5A5A5A"/>
+                </a:solidFill>
+                <a:latin typeface="Arial" pitchFamily="34" charset="0"/>
+                <a:ea typeface="Arial" pitchFamily="34" charset="-122"/>
+                <a:cs typeface="Arial" pitchFamily="34" charset="-120"/>
+              </a:rPr>
+              <a:t>OKRs as a whole = the operating system that translates strategy into coordinated execution</a:t>
+            </a:r>
+            <a:endParaRPr lang="en-US" sz="1300" dirty="0"/>
+          </a:p>
+        </p:txBody>
+      </p:sp>
+      <p:sp>
+        <p:nvSpPr>
+          <p:cNvPr id="6" name="Shape 4"/>
+          <p:cNvSpPr/>
+          <p:nvPr/>
+        </p:nvSpPr>
+        <p:spPr>
+          <a:xfrm>
+            <a:off x="457200" y="1417320"/>
+            <a:ext cx="8229600" cy="822960"/>
+          </a:xfrm>
+          <a:prstGeom prst="roundRect">
+            <a:avLst>
+              <a:gd name="adj" fmla="val 6667"/>
+            </a:avLst>
+          </a:prstGeom>
+          <a:solidFill>
+            <a:srgbClr val="F7F5F0"/>
+          </a:solidFill>
+          <a:ln w="12700">
+            <a:solidFill>
+              <a:srgbClr val="F7F5F0"/>
+            </a:solidFill>
+            <a:prstDash val="solid"/>
+          </a:ln>
+        </p:spPr>
+      </p:sp>
+      <p:sp>
+        <p:nvSpPr>
+          <p:cNvPr id="7" name="Shape 5"/>
+          <p:cNvSpPr/>
+          <p:nvPr/>
+        </p:nvSpPr>
+        <p:spPr>
+          <a:xfrm>
+            <a:off x="457200" y="1417320"/>
+            <a:ext cx="73152" cy="822960"/>
+          </a:xfrm>
+          <a:prstGeom prst="rect">
+            <a:avLst/>
+          </a:prstGeom>
+          <a:solidFill>
+            <a:srgbClr val="C9A227"/>
+          </a:solidFill>
+          <a:ln w="12700">
+            <a:solidFill>
+              <a:srgbClr val="C9A227"/>
+            </a:solidFill>
+            <a:prstDash val="solid"/>
+          </a:ln>
+        </p:spPr>
+      </p:sp>
+      <p:sp>
+        <p:nvSpPr>
+          <p:cNvPr id="8" name="Text 6"/>
+          <p:cNvSpPr/>
+          <p:nvPr/>
+        </p:nvSpPr>
+        <p:spPr>
+          <a:xfrm>
+            <a:off x="731520" y="1554480"/>
+            <a:ext cx="7772400" cy="594360"/>
           </a:xfrm>
           <a:prstGeom prst="rect">
             <a:avLst/>
@@ -5363,16 +5920,90 @@
             <a:r>
               <a:rPr lang="en-US" sz="1400" dirty="0">
                 <a:solidFill>
-                  <a:srgbClr val="555555"/>
-                </a:solidFill>
-                <a:latin typeface="Arial" pitchFamily="34" charset="0"/>
-                <a:ea typeface="Arial" pitchFamily="34" charset="-122"/>
-                <a:cs typeface="Arial" pitchFamily="34" charset="-120"/>
-              </a:rPr>
-              <a:t>Objectives = directional goals    ·    Key Results = measurable evidence of progress</a:t>
+                  <a:srgbClr val="2A2A2A"/>
+                </a:solidFill>
+                <a:latin typeface="Arial" pitchFamily="34" charset="0"/>
+                <a:ea typeface="Arial" pitchFamily="34" charset="-122"/>
+                <a:cs typeface="Arial" pitchFamily="34" charset="-120"/>
+              </a:rPr>
+              <a:t>Objectives should explicitly strengthen domestic productive capacity, sovereign workforce development, and innovation-driven productivity</a:t>
             </a:r>
             <a:endParaRPr lang="en-US" sz="1400" dirty="0"/>
           </a:p>
+        </p:txBody>
+      </p:sp>
+      <p:sp>
+        <p:nvSpPr>
+          <p:cNvPr id="9" name="Shape 7"/>
+          <p:cNvSpPr/>
+          <p:nvPr/>
+        </p:nvSpPr>
+        <p:spPr>
+          <a:xfrm>
+            <a:off x="457200" y="2377440"/>
+            <a:ext cx="8229600" cy="822960"/>
+          </a:xfrm>
+          <a:prstGeom prst="roundRect">
+            <a:avLst>
+              <a:gd name="adj" fmla="val 6667"/>
+            </a:avLst>
+          </a:prstGeom>
+          <a:solidFill>
+            <a:srgbClr val="F7F5F0"/>
+          </a:solidFill>
+          <a:ln w="12700">
+            <a:solidFill>
+              <a:srgbClr val="F7F5F0"/>
+            </a:solidFill>
+            <a:prstDash val="solid"/>
+          </a:ln>
+        </p:spPr>
+      </p:sp>
+      <p:sp>
+        <p:nvSpPr>
+          <p:cNvPr id="10" name="Shape 8"/>
+          <p:cNvSpPr/>
+          <p:nvPr/>
+        </p:nvSpPr>
+        <p:spPr>
+          <a:xfrm>
+            <a:off x="457200" y="2377440"/>
+            <a:ext cx="73152" cy="822960"/>
+          </a:xfrm>
+          <a:prstGeom prst="rect">
+            <a:avLst/>
+          </a:prstGeom>
+          <a:solidFill>
+            <a:srgbClr val="C9A227"/>
+          </a:solidFill>
+          <a:ln w="12700">
+            <a:solidFill>
+              <a:srgbClr val="C9A227"/>
+            </a:solidFill>
+            <a:prstDash val="solid"/>
+          </a:ln>
+        </p:spPr>
+      </p:sp>
+      <p:sp>
+        <p:nvSpPr>
+          <p:cNvPr id="11" name="Text 9"/>
+          <p:cNvSpPr/>
+          <p:nvPr/>
+        </p:nvSpPr>
+        <p:spPr>
+          <a:xfrm>
+            <a:off x="731520" y="2514600"/>
+            <a:ext cx="7772400" cy="594360"/>
+          </a:xfrm>
+          <a:prstGeom prst="rect">
+            <a:avLst/>
+          </a:prstGeom>
+          <a:noFill/>
+          <a:ln/>
+        </p:spPr>
+        <p:txBody>
+          <a:bodyPr wrap="square" lIns="0" tIns="0" rIns="0" bIns="0" rtlCol="0" anchor="ctr"/>
+          <a:lstStyle/>
           <a:p>
             <a:pPr indent="0" marL="0">
               <a:buNone/>
@@ -5380,13 +6011,13 @@
             <a:r>
               <a:rPr lang="en-US" sz="1400" dirty="0">
                 <a:solidFill>
-                  <a:srgbClr val="555555"/>
-                </a:solidFill>
-                <a:latin typeface="Arial" pitchFamily="34" charset="0"/>
-                <a:ea typeface="Arial" pitchFamily="34" charset="-122"/>
-                <a:cs typeface="Arial" pitchFamily="34" charset="-120"/>
-              </a:rPr>
-              <a:t>OKRs as a whole = the operating system that translates strategy into coordinated execution</a:t>
+                  <a:srgbClr val="2A2A2A"/>
+                </a:solidFill>
+                <a:latin typeface="Arial" pitchFamily="34" charset="0"/>
+                <a:ea typeface="Arial" pitchFamily="34" charset="-122"/>
+                <a:cs typeface="Arial" pitchFamily="34" charset="-120"/>
+              </a:rPr>
+              <a:t>Key Results should measure capability growth, retention of high-skill American talent, expansion of domestic capacity, and genuine process or technology innovation</a:t>
             </a:r>
             <a:endParaRPr lang="en-US" sz="1400" dirty="0"/>
           </a:p>
@@ -5394,53 +6025,66 @@
       </p:sp>
       <p:sp>
         <p:nvSpPr>
-          <p:cNvPr id="5" name="Text 3"/>
-          <p:cNvSpPr/>
-          <p:nvPr/>
-        </p:nvSpPr>
-        <p:spPr>
-          <a:xfrm>
-            <a:off x="457200" y="1965960"/>
-            <a:ext cx="8229600" cy="320040"/>
-          </a:xfrm>
-          <a:prstGeom prst="rect">
-            <a:avLst/>
-          </a:prstGeom>
-          <a:noFill/>
-          <a:ln/>
-        </p:spPr>
-        <p:txBody>
-          <a:bodyPr wrap="square" lIns="0" tIns="0" rIns="0" bIns="0" rtlCol="0" anchor="ctr"/>
-          <a:lstStyle/>
-          <a:p>
-            <a:pPr indent="0" marL="0">
-              <a:buNone/>
-            </a:pPr>
-            <a:r>
-              <a:rPr lang="en-US" sz="1600" b="1" dirty="0">
-                <a:solidFill>
-                  <a:srgbClr val="1A1A1A"/>
-                </a:solidFill>
-                <a:latin typeface="Arial" pitchFamily="34" charset="0"/>
-                <a:ea typeface="Arial" pitchFamily="34" charset="-122"/>
-                <a:cs typeface="Arial" pitchFamily="34" charset="-120"/>
-              </a:rPr>
-              <a:t>Hamiltonian Redesign</a:t>
-            </a:r>
-            <a:endParaRPr lang="en-US" sz="1600" dirty="0"/>
-          </a:p>
-        </p:txBody>
-      </p:sp>
-      <p:sp>
-        <p:nvSpPr>
-          <p:cNvPr id="6" name="Text 4"/>
-          <p:cNvSpPr/>
-          <p:nvPr/>
-        </p:nvSpPr>
-        <p:spPr>
-          <a:xfrm>
-            <a:off x="457200" y="2377440"/>
-            <a:ext cx="8229600" cy="594360"/>
+          <p:cNvPr id="12" name="Shape 10"/>
+          <p:cNvSpPr/>
+          <p:nvPr/>
+        </p:nvSpPr>
+        <p:spPr>
+          <a:xfrm>
+            <a:off x="457200" y="3337560"/>
+            <a:ext cx="8229600" cy="822960"/>
+          </a:xfrm>
+          <a:prstGeom prst="roundRect">
+            <a:avLst>
+              <a:gd name="adj" fmla="val 6667"/>
+            </a:avLst>
+          </a:prstGeom>
+          <a:solidFill>
+            <a:srgbClr val="F7F5F0"/>
+          </a:solidFill>
+          <a:ln w="12700">
+            <a:solidFill>
+              <a:srgbClr val="F7F5F0"/>
+            </a:solidFill>
+            <a:prstDash val="solid"/>
+          </a:ln>
+        </p:spPr>
+      </p:sp>
+      <p:sp>
+        <p:nvSpPr>
+          <p:cNvPr id="13" name="Shape 11"/>
+          <p:cNvSpPr/>
+          <p:nvPr/>
+        </p:nvSpPr>
+        <p:spPr>
+          <a:xfrm>
+            <a:off x="457200" y="3337560"/>
+            <a:ext cx="73152" cy="822960"/>
+          </a:xfrm>
+          <a:prstGeom prst="rect">
+            <a:avLst/>
+          </a:prstGeom>
+          <a:solidFill>
+            <a:srgbClr val="C9A227"/>
+          </a:solidFill>
+          <a:ln w="12700">
+            <a:solidFill>
+              <a:srgbClr val="C9A227"/>
+            </a:solidFill>
+            <a:prstDash val="solid"/>
+          </a:ln>
+        </p:spPr>
+      </p:sp>
+      <p:sp>
+        <p:nvSpPr>
+          <p:cNvPr id="14" name="Text 12"/>
+          <p:cNvSpPr/>
+          <p:nvPr/>
+        </p:nvSpPr>
+        <p:spPr>
+          <a:xfrm>
+            <a:off x="731520" y="3474720"/>
+            <a:ext cx="7772400" cy="594360"/>
           </a:xfrm>
           <a:prstGeom prst="rect">
             <a:avLst/>
@@ -5458,13 +6102,13 @@
             <a:r>
               <a:rPr lang="en-US" sz="1400" dirty="0">
                 <a:solidFill>
-                  <a:srgbClr val="1A1A1A"/>
-                </a:solidFill>
-                <a:latin typeface="Arial" pitchFamily="34" charset="0"/>
-                <a:ea typeface="Arial" pitchFamily="34" charset="-122"/>
-                <a:cs typeface="Arial" pitchFamily="34" charset="-120"/>
-              </a:rPr>
-              <a:t>•  Objectives should explicitly strengthen domestic productive capacity, sovereign workforce development, and innovation-driven productivity</a:t>
+                  <a:srgbClr val="2A2A2A"/>
+                </a:solidFill>
+                <a:latin typeface="Arial" pitchFamily="34" charset="0"/>
+                <a:ea typeface="Arial" pitchFamily="34" charset="-122"/>
+                <a:cs typeface="Arial" pitchFamily="34" charset="-120"/>
+              </a:rPr>
+              <a:t>Avoid Key Results that only reward lower unit labor cost or maximum headcount flexibility</a:t>
             </a:r>
             <a:endParaRPr lang="en-US" sz="1400" dirty="0"/>
           </a:p>
@@ -5472,110 +6116,32 @@
       </p:sp>
       <p:sp>
         <p:nvSpPr>
-          <p:cNvPr id="7" name="Text 5"/>
-          <p:cNvSpPr/>
-          <p:nvPr/>
-        </p:nvSpPr>
-        <p:spPr>
-          <a:xfrm>
-            <a:off x="457200" y="3017520"/>
-            <a:ext cx="8229600" cy="594360"/>
-          </a:xfrm>
-          <a:prstGeom prst="rect">
-            <a:avLst/>
-          </a:prstGeom>
-          <a:noFill/>
-          <a:ln/>
-        </p:spPr>
-        <p:txBody>
-          <a:bodyPr wrap="square" lIns="0" tIns="0" rIns="0" bIns="0" rtlCol="0" anchor="ctr"/>
-          <a:lstStyle/>
-          <a:p>
-            <a:pPr indent="0" marL="0">
-              <a:buNone/>
-            </a:pPr>
-            <a:r>
-              <a:rPr lang="en-US" sz="1400" dirty="0">
-                <a:solidFill>
-                  <a:srgbClr val="1A1A1A"/>
-                </a:solidFill>
-                <a:latin typeface="Arial" pitchFamily="34" charset="0"/>
-                <a:ea typeface="Arial" pitchFamily="34" charset="-122"/>
-                <a:cs typeface="Arial" pitchFamily="34" charset="-120"/>
-              </a:rPr>
-              <a:t>•  Key Results should measure capability growth, retention of high-skill American talent, expansion of domestic capacity, and genuine process or technology innovation</a:t>
-            </a:r>
-            <a:endParaRPr lang="en-US" sz="1400" dirty="0"/>
-          </a:p>
-        </p:txBody>
-      </p:sp>
-      <p:sp>
-        <p:nvSpPr>
-          <p:cNvPr id="8" name="Text 6"/>
-          <p:cNvSpPr/>
-          <p:nvPr/>
-        </p:nvSpPr>
-        <p:spPr>
-          <a:xfrm>
-            <a:off x="457200" y="3657600"/>
-            <a:ext cx="8229600" cy="594360"/>
-          </a:xfrm>
-          <a:prstGeom prst="rect">
-            <a:avLst/>
-          </a:prstGeom>
-          <a:noFill/>
-          <a:ln/>
-        </p:spPr>
-        <p:txBody>
-          <a:bodyPr wrap="square" lIns="0" tIns="0" rIns="0" bIns="0" rtlCol="0" anchor="ctr"/>
-          <a:lstStyle/>
-          <a:p>
-            <a:pPr indent="0" marL="0">
-              <a:buNone/>
-            </a:pPr>
-            <a:r>
-              <a:rPr lang="en-US" sz="1400" dirty="0">
-                <a:solidFill>
-                  <a:srgbClr val="1A1A1A"/>
-                </a:solidFill>
-                <a:latin typeface="Arial" pitchFamily="34" charset="0"/>
-                <a:ea typeface="Arial" pitchFamily="34" charset="-122"/>
-                <a:cs typeface="Arial" pitchFamily="34" charset="-120"/>
-              </a:rPr>
-              <a:t>•  Avoid Key Results that only reward lower unit labor cost or maximum headcount flexibility</a:t>
-            </a:r>
-            <a:endParaRPr lang="en-US" sz="1400" dirty="0"/>
-          </a:p>
-        </p:txBody>
-      </p:sp>
-      <p:sp>
-        <p:nvSpPr>
-          <p:cNvPr id="9" name="Text 7"/>
+          <p:cNvPr id="15" name="Text 13"/>
           <p:cNvSpPr/>
           <p:nvPr/>
         </p:nvSpPr>
         <p:spPr>
           <a:xfrm>
             <a:off x="457200" y="4800600"/>
-            <a:ext cx="5943600" cy="228600"/>
-          </a:xfrm>
-          <a:prstGeom prst="rect">
-            <a:avLst/>
-          </a:prstGeom>
-          <a:noFill/>
-          <a:ln/>
-        </p:spPr>
-        <p:txBody>
-          <a:bodyPr wrap="square" lIns="0" tIns="0" rIns="0" bIns="0" rtlCol="0" anchor="ctr"/>
-          <a:lstStyle/>
-          <a:p>
-            <a:pPr indent="0" marL="0">
-              <a:buNone/>
-            </a:pPr>
-            <a:r>
-              <a:rPr lang="en-US" sz="1000" dirty="0">
-                <a:solidFill>
-                  <a:srgbClr val="555555"/>
+            <a:ext cx="5943600" cy="256032"/>
+          </a:xfrm>
+          <a:prstGeom prst="rect">
+            <a:avLst/>
+          </a:prstGeom>
+          <a:noFill/>
+          <a:ln/>
+        </p:spPr>
+        <p:txBody>
+          <a:bodyPr wrap="square" lIns="0" tIns="0" rIns="0" bIns="0" rtlCol="0" anchor="ctr"/>
+          <a:lstStyle/>
+          <a:p>
+            <a:pPr indent="0" marL="0">
+              <a:buNone/>
+            </a:pPr>
+            <a:r>
+              <a:rPr lang="en-US" sz="1100" dirty="0">
+                <a:solidFill>
+                  <a:srgbClr val="6A6A6A"/>
                 </a:solidFill>
                 <a:latin typeface="Arial" pitchFamily="34" charset="0"/>
                 <a:ea typeface="Arial" pitchFamily="34" charset="-122"/>
@@ -5583,20 +6149,20 @@
               </a:rPr>
               <a:t>Joshua Konkle  |  Chief of Staff Strategist</a:t>
             </a:r>
-            <a:endParaRPr lang="en-US" sz="1000" dirty="0"/>
-          </a:p>
-        </p:txBody>
-      </p:sp>
-      <p:sp>
-        <p:nvSpPr>
-          <p:cNvPr id="10" name="Text 8"/>
-          <p:cNvSpPr/>
-          <p:nvPr/>
-        </p:nvSpPr>
-        <p:spPr>
-          <a:xfrm>
-            <a:off x="7772400" y="4800600"/>
-            <a:ext cx="914400" cy="228600"/>
+            <a:endParaRPr lang="en-US" sz="1100" dirty="0"/>
+          </a:p>
+        </p:txBody>
+      </p:sp>
+      <p:sp>
+        <p:nvSpPr>
+          <p:cNvPr id="16" name="Text 14"/>
+          <p:cNvSpPr/>
+          <p:nvPr/>
+        </p:nvSpPr>
+        <p:spPr>
+          <a:xfrm>
+            <a:off x="7498080" y="4800600"/>
+            <a:ext cx="1188720" cy="256032"/>
           </a:xfrm>
           <a:prstGeom prst="rect">
             <a:avLst/>
@@ -5612,9 +6178,9 @@
               <a:buNone/>
             </a:pPr>
             <a:r>
-              <a:rPr lang="en-US" sz="1000" dirty="0">
-                <a:solidFill>
-                  <a:srgbClr val="555555"/>
+              <a:rPr lang="en-US" sz="1100" dirty="0">
+                <a:solidFill>
+                  <a:srgbClr val="6A6A6A"/>
                 </a:solidFill>
                 <a:latin typeface="Arial" pitchFamily="34" charset="0"/>
                 <a:ea typeface="Arial" pitchFamily="34" charset="-122"/>
@@ -5622,7 +6188,7 @@
               </a:rPr>
               <a:t>7 / 12</a:t>
             </a:r>
-            <a:endParaRPr lang="en-US" sz="1000" dirty="0"/>
+            <a:endParaRPr lang="en-US" sz="1100" dirty="0"/>
           </a:p>
         </p:txBody>
       </p:sp>
@@ -5637,13 +6203,6 @@
 <file path=ppt/slides/slide8.xml><?xml version="1.0" encoding="utf-8"?>
 <p:sld xmlns:a="http://schemas.openxmlformats.org/drawingml/2006/main" xmlns:r="http://schemas.openxmlformats.org/officeDocument/2006/relationships" xmlns:p="http://schemas.openxmlformats.org/presentationml/2006/main">
   <p:cSld name="Slide 8">
-    <p:bg>
-      <p:bgPr>
-        <a:solidFill>
-          <a:srgbClr val="FFFFFF"/>
-        </a:solidFill>
-      </p:bgPr>
-    </p:bg>
     <p:spTree>
       <p:nvGrpSpPr>
         <p:cNvPr id="1" name=""/>
@@ -5660,63 +6219,24 @@
       </p:grpSpPr>
       <p:sp>
         <p:nvSpPr>
-          <p:cNvPr id="2" name="Text 0"/>
-          <p:cNvSpPr/>
-          <p:nvPr/>
-        </p:nvSpPr>
-        <p:spPr>
-          <a:xfrm>
-            <a:off x="457200" y="228600"/>
-            <a:ext cx="8229600" cy="365760"/>
-          </a:xfrm>
-          <a:prstGeom prst="rect">
-            <a:avLst/>
-          </a:prstGeom>
-          <a:noFill/>
-          <a:ln/>
-        </p:spPr>
-        <p:txBody>
-          <a:bodyPr wrap="square" lIns="0" tIns="0" rIns="0" bIns="0" rtlCol="0" anchor="ctr"/>
-          <a:lstStyle/>
-          <a:p>
-            <a:pPr indent="0" marL="0">
-              <a:buNone/>
-            </a:pPr>
-            <a:r>
-              <a:rPr lang="en-US" sz="2400" b="1" dirty="0">
-                <a:solidFill>
-                  <a:srgbClr val="1A1A1A"/>
-                </a:solidFill>
-                <a:latin typeface="Arial" pitchFamily="34" charset="0"/>
-                <a:ea typeface="Arial" pitchFamily="34" charset="-122"/>
-                <a:cs typeface="Arial" pitchFamily="34" charset="-120"/>
-              </a:rPr>
-              <a:t>Practical Examples</a:t>
-            </a:r>
-            <a:endParaRPr lang="en-US" sz="2400" dirty="0"/>
-          </a:p>
-        </p:txBody>
-      </p:sp>
-      <p:sp>
-        <p:nvSpPr>
-          <p:cNvPr id="3" name="Shape 1"/>
-          <p:cNvSpPr/>
-          <p:nvPr/>
-        </p:nvSpPr>
-        <p:spPr>
-          <a:xfrm>
-            <a:off x="365760" y="777240"/>
-            <a:ext cx="4023360" cy="1737360"/>
+          <p:cNvPr id="2" name="Shape 0"/>
+          <p:cNvSpPr/>
+          <p:nvPr/>
+        </p:nvSpPr>
+        <p:spPr>
+          <a:xfrm>
+            <a:off x="0" y="0"/>
+            <a:ext cx="9144000" cy="5143500"/>
           </a:xfrm>
           <a:prstGeom prst="rect">
             <a:avLst/>
           </a:prstGeom>
           <a:solidFill>
-            <a:srgbClr val="F7F7F7"/>
+            <a:srgbClr val="FFFFFF"/>
           </a:solidFill>
           <a:ln w="12700">
             <a:solidFill>
-              <a:srgbClr val="CCCCCC"/>
+              <a:srgbClr val="FFFFFF"/>
             </a:solidFill>
             <a:prstDash val="solid"/>
           </a:ln>
@@ -5724,200 +6244,65 @@
       </p:sp>
       <p:sp>
         <p:nvSpPr>
-          <p:cNvPr id="4" name="Text 2"/>
-          <p:cNvSpPr/>
-          <p:nvPr/>
-        </p:nvSpPr>
-        <p:spPr>
-          <a:xfrm>
-            <a:off x="548640" y="868680"/>
-            <a:ext cx="3657600" cy="274320"/>
-          </a:xfrm>
-          <a:prstGeom prst="rect">
-            <a:avLst/>
-          </a:prstGeom>
-          <a:noFill/>
-          <a:ln/>
-        </p:spPr>
-        <p:txBody>
-          <a:bodyPr wrap="square" lIns="0" tIns="0" rIns="0" bIns="0" rtlCol="0" anchor="ctr"/>
-          <a:lstStyle/>
-          <a:p>
-            <a:pPr indent="0" marL="0">
-              <a:buNone/>
-            </a:pPr>
-            <a:r>
-              <a:rPr lang="en-US" sz="1200" b="1" dirty="0">
-                <a:solidFill>
-                  <a:srgbClr val="555555"/>
-                </a:solidFill>
-                <a:latin typeface="Arial" pitchFamily="34" charset="0"/>
-                <a:ea typeface="Arial" pitchFamily="34" charset="-122"/>
-                <a:cs typeface="Arial" pitchFamily="34" charset="-120"/>
-              </a:rPr>
-              <a:t>BEFORE</a:t>
-            </a:r>
-            <a:endParaRPr lang="en-US" sz="1200" dirty="0"/>
-          </a:p>
-        </p:txBody>
-      </p:sp>
-      <p:sp>
-        <p:nvSpPr>
-          <p:cNvPr id="5" name="Text 3"/>
-          <p:cNvSpPr/>
-          <p:nvPr/>
-        </p:nvSpPr>
-        <p:spPr>
-          <a:xfrm>
-            <a:off x="548640" y="1234440"/>
-            <a:ext cx="3657600" cy="1005840"/>
-          </a:xfrm>
-          <a:prstGeom prst="rect">
-            <a:avLst/>
-          </a:prstGeom>
-          <a:noFill/>
-          <a:ln/>
-        </p:spPr>
-        <p:txBody>
-          <a:bodyPr wrap="square" lIns="0" tIns="0" rIns="0" bIns="0" rtlCol="0" anchor="ctr"/>
-          <a:lstStyle/>
-          <a:p>
-            <a:pPr indent="0" marL="0">
-              <a:buNone/>
-            </a:pPr>
-            <a:r>
-              <a:rPr lang="en-US" sz="1500" dirty="0">
-                <a:solidFill>
-                  <a:srgbClr val="1A1A1A"/>
-                </a:solidFill>
-                <a:latin typeface="Arial" pitchFamily="34" charset="0"/>
-                <a:ea typeface="Arial" pitchFamily="34" charset="-122"/>
-                <a:cs typeface="Arial" pitchFamily="34" charset="-120"/>
-              </a:rPr>
-              <a:t>Reduce production labor cost by 12%</a:t>
-            </a:r>
-            <a:endParaRPr lang="en-US" sz="1500" dirty="0"/>
-          </a:p>
-        </p:txBody>
-      </p:sp>
-      <p:sp>
-        <p:nvSpPr>
-          <p:cNvPr id="6" name="Shape 4"/>
-          <p:cNvSpPr/>
-          <p:nvPr/>
-        </p:nvSpPr>
-        <p:spPr>
-          <a:xfrm>
-            <a:off x="4754880" y="777240"/>
-            <a:ext cx="4023360" cy="1737360"/>
-          </a:xfrm>
-          <a:prstGeom prst="rect">
-            <a:avLst/>
+          <p:cNvPr id="3" name="Text 1"/>
+          <p:cNvSpPr/>
+          <p:nvPr/>
+        </p:nvSpPr>
+        <p:spPr>
+          <a:xfrm>
+            <a:off x="457200" y="228600"/>
+            <a:ext cx="8229600" cy="320040"/>
+          </a:xfrm>
+          <a:prstGeom prst="rect">
+            <a:avLst/>
+          </a:prstGeom>
+          <a:noFill/>
+          <a:ln/>
+        </p:spPr>
+        <p:txBody>
+          <a:bodyPr wrap="square" lIns="0" tIns="0" rIns="0" bIns="0" rtlCol="0" anchor="ctr"/>
+          <a:lstStyle/>
+          <a:p>
+            <a:pPr indent="0" marL="0">
+              <a:buNone/>
+            </a:pPr>
+            <a:r>
+              <a:rPr lang="en-US" sz="2200" b="1" dirty="0">
+                <a:solidFill>
+                  <a:srgbClr val="1B2A4A"/>
+                </a:solidFill>
+                <a:latin typeface="Arial" pitchFamily="34" charset="0"/>
+                <a:ea typeface="Arial" pitchFamily="34" charset="-122"/>
+                <a:cs typeface="Arial" pitchFamily="34" charset="-120"/>
+              </a:rPr>
+              <a:t>Practical Examples</a:t>
+            </a:r>
+            <a:endParaRPr lang="en-US" sz="2200" dirty="0"/>
+          </a:p>
+        </p:txBody>
+      </p:sp>
+      <p:sp>
+        <p:nvSpPr>
+          <p:cNvPr id="4" name="Shape 2"/>
+          <p:cNvSpPr/>
+          <p:nvPr/>
+        </p:nvSpPr>
+        <p:spPr>
+          <a:xfrm>
+            <a:off x="457200" y="731520"/>
+            <a:ext cx="3931920" cy="1691640"/>
+          </a:xfrm>
+          <a:prstGeom prst="roundRect">
+            <a:avLst>
+              <a:gd name="adj" fmla="val 3243"/>
+            </a:avLst>
           </a:prstGeom>
           <a:solidFill>
-            <a:srgbClr val="111111"/>
-          </a:solidFill>
-          <a:ln/>
-        </p:spPr>
-      </p:sp>
-      <p:sp>
-        <p:nvSpPr>
-          <p:cNvPr id="7" name="Text 5"/>
-          <p:cNvSpPr/>
-          <p:nvPr/>
-        </p:nvSpPr>
-        <p:spPr>
-          <a:xfrm>
-            <a:off x="4937760" y="868680"/>
-            <a:ext cx="3657600" cy="274320"/>
-          </a:xfrm>
-          <a:prstGeom prst="rect">
-            <a:avLst/>
-          </a:prstGeom>
-          <a:noFill/>
-          <a:ln/>
-        </p:spPr>
-        <p:txBody>
-          <a:bodyPr wrap="square" lIns="0" tIns="0" rIns="0" bIns="0" rtlCol="0" anchor="ctr"/>
-          <a:lstStyle/>
-          <a:p>
-            <a:pPr indent="0" marL="0">
-              <a:buNone/>
-            </a:pPr>
-            <a:r>
-              <a:rPr lang="en-US" sz="1200" b="1" dirty="0">
-                <a:solidFill>
-                  <a:srgbClr val="AAAAAA"/>
-                </a:solidFill>
-                <a:latin typeface="Arial" pitchFamily="34" charset="0"/>
-                <a:ea typeface="Arial" pitchFamily="34" charset="-122"/>
-                <a:cs typeface="Arial" pitchFamily="34" charset="-120"/>
-              </a:rPr>
-              <a:t>AFTER</a:t>
-            </a:r>
-            <a:endParaRPr lang="en-US" sz="1200" dirty="0"/>
-          </a:p>
-        </p:txBody>
-      </p:sp>
-      <p:sp>
-        <p:nvSpPr>
-          <p:cNvPr id="8" name="Text 6"/>
-          <p:cNvSpPr/>
-          <p:nvPr/>
-        </p:nvSpPr>
-        <p:spPr>
-          <a:xfrm>
-            <a:off x="4937760" y="1234440"/>
-            <a:ext cx="3657600" cy="1097280"/>
-          </a:xfrm>
-          <a:prstGeom prst="rect">
-            <a:avLst/>
-          </a:prstGeom>
-          <a:noFill/>
-          <a:ln/>
-        </p:spPr>
-        <p:txBody>
-          <a:bodyPr wrap="square" lIns="0" tIns="0" rIns="0" bIns="0" rtlCol="0" anchor="ctr"/>
-          <a:lstStyle/>
-          <a:p>
-            <a:pPr indent="0" marL="0">
-              <a:buNone/>
-            </a:pPr>
-            <a:r>
-              <a:rPr lang="en-US" sz="1400" dirty="0">
-                <a:solidFill>
-                  <a:srgbClr val="F5F5F5"/>
-                </a:solidFill>
-                <a:latin typeface="Arial" pitchFamily="34" charset="0"/>
-                <a:ea typeface="Arial" pitchFamily="34" charset="-122"/>
-                <a:cs typeface="Arial" pitchFamily="34" charset="-120"/>
-              </a:rPr>
-              <a:t>Increase the share of critical production roles filled by long-term American talent while improving output per labor hour through process innovation</a:t>
-            </a:r>
-            <a:endParaRPr lang="en-US" sz="1400" dirty="0"/>
-          </a:p>
-        </p:txBody>
-      </p:sp>
-      <p:sp>
-        <p:nvSpPr>
-          <p:cNvPr id="9" name="Shape 7"/>
-          <p:cNvSpPr/>
-          <p:nvPr/>
-        </p:nvSpPr>
-        <p:spPr>
-          <a:xfrm>
-            <a:off x="365760" y="2743200"/>
-            <a:ext cx="4023360" cy="1554480"/>
-          </a:xfrm>
-          <a:prstGeom prst="rect">
-            <a:avLst/>
-          </a:prstGeom>
-          <a:solidFill>
-            <a:srgbClr val="F7F7F7"/>
+            <a:srgbClr val="3A3A3A"/>
           </a:solidFill>
           <a:ln w="12700">
             <a:solidFill>
-              <a:srgbClr val="CCCCCC"/>
+              <a:srgbClr val="3A3A3A"/>
             </a:solidFill>
             <a:prstDash val="solid"/>
           </a:ln>
@@ -5925,32 +6310,32 @@
       </p:sp>
       <p:sp>
         <p:nvSpPr>
-          <p:cNvPr id="10" name="Text 8"/>
-          <p:cNvSpPr/>
-          <p:nvPr/>
-        </p:nvSpPr>
-        <p:spPr>
-          <a:xfrm>
-            <a:off x="548640" y="2834640"/>
-            <a:ext cx="3657600" cy="228600"/>
-          </a:xfrm>
-          <a:prstGeom prst="rect">
-            <a:avLst/>
-          </a:prstGeom>
-          <a:noFill/>
-          <a:ln/>
-        </p:spPr>
-        <p:txBody>
-          <a:bodyPr wrap="square" lIns="0" tIns="0" rIns="0" bIns="0" rtlCol="0" anchor="ctr"/>
-          <a:lstStyle/>
-          <a:p>
-            <a:pPr indent="0" marL="0">
-              <a:buNone/>
-            </a:pPr>
-            <a:r>
-              <a:rPr lang="en-US" sz="1200" b="1" dirty="0">
-                <a:solidFill>
-                  <a:srgbClr val="555555"/>
+          <p:cNvPr id="5" name="Text 3"/>
+          <p:cNvSpPr/>
+          <p:nvPr/>
+        </p:nvSpPr>
+        <p:spPr>
+          <a:xfrm>
+            <a:off x="640080" y="868680"/>
+            <a:ext cx="3566160" cy="228600"/>
+          </a:xfrm>
+          <a:prstGeom prst="rect">
+            <a:avLst/>
+          </a:prstGeom>
+          <a:noFill/>
+          <a:ln/>
+        </p:spPr>
+        <p:txBody>
+          <a:bodyPr wrap="square" lIns="0" tIns="0" rIns="0" bIns="0" rtlCol="0" anchor="ctr"/>
+          <a:lstStyle/>
+          <a:p>
+            <a:pPr indent="0" marL="0">
+              <a:buNone/>
+            </a:pPr>
+            <a:r>
+              <a:rPr lang="en-US" sz="1100" b="1" dirty="0">
+                <a:solidFill>
+                  <a:srgbClr val="C9A227"/>
                 </a:solidFill>
                 <a:latin typeface="Arial" pitchFamily="34" charset="0"/>
                 <a:ea typeface="Arial" pitchFamily="34" charset="-122"/>
@@ -5958,9 +6343,180 @@
               </a:rPr>
               <a:t>BEFORE</a:t>
             </a:r>
-            <a:endParaRPr lang="en-US" sz="1200" dirty="0"/>
-          </a:p>
-        </p:txBody>
+            <a:endParaRPr lang="en-US" sz="1100" dirty="0"/>
+          </a:p>
+        </p:txBody>
+      </p:sp>
+      <p:sp>
+        <p:nvSpPr>
+          <p:cNvPr id="6" name="Text 4"/>
+          <p:cNvSpPr/>
+          <p:nvPr/>
+        </p:nvSpPr>
+        <p:spPr>
+          <a:xfrm>
+            <a:off x="640080" y="1188720"/>
+            <a:ext cx="3566160" cy="1051560"/>
+          </a:xfrm>
+          <a:prstGeom prst="rect">
+            <a:avLst/>
+          </a:prstGeom>
+          <a:noFill/>
+          <a:ln/>
+        </p:spPr>
+        <p:txBody>
+          <a:bodyPr wrap="square" lIns="0" tIns="0" rIns="0" bIns="0" rtlCol="0" anchor="ctr"/>
+          <a:lstStyle/>
+          <a:p>
+            <a:pPr indent="0" marL="0">
+              <a:buNone/>
+            </a:pPr>
+            <a:r>
+              <a:rPr lang="en-US" sz="1300" dirty="0">
+                <a:solidFill>
+                  <a:srgbClr val="FFFFFF"/>
+                </a:solidFill>
+                <a:latin typeface="Arial" pitchFamily="34" charset="0"/>
+                <a:ea typeface="Arial" pitchFamily="34" charset="-122"/>
+                <a:cs typeface="Arial" pitchFamily="34" charset="-120"/>
+              </a:rPr>
+              <a:t>Reduce production labor cost by 12%</a:t>
+            </a:r>
+            <a:endParaRPr lang="en-US" sz="1300" dirty="0"/>
+          </a:p>
+        </p:txBody>
+      </p:sp>
+      <p:sp>
+        <p:nvSpPr>
+          <p:cNvPr id="7" name="Shape 5"/>
+          <p:cNvSpPr/>
+          <p:nvPr/>
+        </p:nvSpPr>
+        <p:spPr>
+          <a:xfrm>
+            <a:off x="4754880" y="731520"/>
+            <a:ext cx="3931920" cy="1691640"/>
+          </a:xfrm>
+          <a:prstGeom prst="roundRect">
+            <a:avLst>
+              <a:gd name="adj" fmla="val 3243"/>
+            </a:avLst>
+          </a:prstGeom>
+          <a:solidFill>
+            <a:srgbClr val="1B2A4A"/>
+          </a:solidFill>
+          <a:ln w="12700">
+            <a:solidFill>
+              <a:srgbClr val="1B2A4A"/>
+            </a:solidFill>
+            <a:prstDash val="solid"/>
+          </a:ln>
+        </p:spPr>
+      </p:sp>
+      <p:sp>
+        <p:nvSpPr>
+          <p:cNvPr id="8" name="Text 6"/>
+          <p:cNvSpPr/>
+          <p:nvPr/>
+        </p:nvSpPr>
+        <p:spPr>
+          <a:xfrm>
+            <a:off x="4937760" y="868680"/>
+            <a:ext cx="3566160" cy="228600"/>
+          </a:xfrm>
+          <a:prstGeom prst="rect">
+            <a:avLst/>
+          </a:prstGeom>
+          <a:noFill/>
+          <a:ln/>
+        </p:spPr>
+        <p:txBody>
+          <a:bodyPr wrap="square" lIns="0" tIns="0" rIns="0" bIns="0" rtlCol="0" anchor="ctr"/>
+          <a:lstStyle/>
+          <a:p>
+            <a:pPr indent="0" marL="0">
+              <a:buNone/>
+            </a:pPr>
+            <a:r>
+              <a:rPr lang="en-US" sz="1100" b="1" dirty="0">
+                <a:solidFill>
+                  <a:srgbClr val="C9A227"/>
+                </a:solidFill>
+                <a:latin typeface="Arial" pitchFamily="34" charset="0"/>
+                <a:ea typeface="Arial" pitchFamily="34" charset="-122"/>
+                <a:cs typeface="Arial" pitchFamily="34" charset="-120"/>
+              </a:rPr>
+              <a:t>AFTER</a:t>
+            </a:r>
+            <a:endParaRPr lang="en-US" sz="1100" dirty="0"/>
+          </a:p>
+        </p:txBody>
+      </p:sp>
+      <p:sp>
+        <p:nvSpPr>
+          <p:cNvPr id="9" name="Text 7"/>
+          <p:cNvSpPr/>
+          <p:nvPr/>
+        </p:nvSpPr>
+        <p:spPr>
+          <a:xfrm>
+            <a:off x="4937760" y="1188720"/>
+            <a:ext cx="3566160" cy="1051560"/>
+          </a:xfrm>
+          <a:prstGeom prst="rect">
+            <a:avLst/>
+          </a:prstGeom>
+          <a:noFill/>
+          <a:ln/>
+        </p:spPr>
+        <p:txBody>
+          <a:bodyPr wrap="square" lIns="0" tIns="0" rIns="0" bIns="0" rtlCol="0" anchor="ctr"/>
+          <a:lstStyle/>
+          <a:p>
+            <a:pPr indent="0" marL="0">
+              <a:buNone/>
+            </a:pPr>
+            <a:r>
+              <a:rPr lang="en-US" sz="1300" dirty="0">
+                <a:solidFill>
+                  <a:srgbClr val="FFFFFF"/>
+                </a:solidFill>
+                <a:latin typeface="Arial" pitchFamily="34" charset="0"/>
+                <a:ea typeface="Arial" pitchFamily="34" charset="-122"/>
+                <a:cs typeface="Arial" pitchFamily="34" charset="-120"/>
+              </a:rPr>
+              <a:t>Increase the share of critical production roles filled by long-term American talent while improving output per labor hour through process innovation</a:t>
+            </a:r>
+            <a:endParaRPr lang="en-US" sz="1300" dirty="0"/>
+          </a:p>
+        </p:txBody>
+      </p:sp>
+      <p:sp>
+        <p:nvSpPr>
+          <p:cNvPr id="10" name="Shape 8"/>
+          <p:cNvSpPr/>
+          <p:nvPr/>
+        </p:nvSpPr>
+        <p:spPr>
+          <a:xfrm>
+            <a:off x="457200" y="2606040"/>
+            <a:ext cx="3931920" cy="1691640"/>
+          </a:xfrm>
+          <a:prstGeom prst="roundRect">
+            <a:avLst>
+              <a:gd name="adj" fmla="val 3243"/>
+            </a:avLst>
+          </a:prstGeom>
+          <a:solidFill>
+            <a:srgbClr val="3A3A3A"/>
+          </a:solidFill>
+          <a:ln w="12700">
+            <a:solidFill>
+              <a:srgbClr val="3A3A3A"/>
+            </a:solidFill>
+            <a:prstDash val="solid"/>
+          </a:ln>
+        </p:spPr>
       </p:sp>
       <p:sp>
         <p:nvSpPr>
@@ -5970,26 +6526,65 @@
         </p:nvSpPr>
         <p:spPr>
           <a:xfrm>
-            <a:off x="548640" y="3154680"/>
-            <a:ext cx="3657600" cy="914400"/>
-          </a:xfrm>
-          <a:prstGeom prst="rect">
-            <a:avLst/>
-          </a:prstGeom>
-          <a:noFill/>
-          <a:ln/>
-        </p:spPr>
-        <p:txBody>
-          <a:bodyPr wrap="square" lIns="0" tIns="0" rIns="0" bIns="0" rtlCol="0" anchor="ctr"/>
-          <a:lstStyle/>
-          <a:p>
-            <a:pPr indent="0" marL="0">
-              <a:buNone/>
-            </a:pPr>
-            <a:r>
-              <a:rPr lang="en-US" sz="1500" dirty="0">
-                <a:solidFill>
-                  <a:srgbClr val="1A1A1A"/>
+            <a:off x="640080" y="2743200"/>
+            <a:ext cx="3566160" cy="228600"/>
+          </a:xfrm>
+          <a:prstGeom prst="rect">
+            <a:avLst/>
+          </a:prstGeom>
+          <a:noFill/>
+          <a:ln/>
+        </p:spPr>
+        <p:txBody>
+          <a:bodyPr wrap="square" lIns="0" tIns="0" rIns="0" bIns="0" rtlCol="0" anchor="ctr"/>
+          <a:lstStyle/>
+          <a:p>
+            <a:pPr indent="0" marL="0">
+              <a:buNone/>
+            </a:pPr>
+            <a:r>
+              <a:rPr lang="en-US" sz="1100" b="1" dirty="0">
+                <a:solidFill>
+                  <a:srgbClr val="C9A227"/>
+                </a:solidFill>
+                <a:latin typeface="Arial" pitchFamily="34" charset="0"/>
+                <a:ea typeface="Arial" pitchFamily="34" charset="-122"/>
+                <a:cs typeface="Arial" pitchFamily="34" charset="-120"/>
+              </a:rPr>
+              <a:t>BEFORE</a:t>
+            </a:r>
+            <a:endParaRPr lang="en-US" sz="1100" dirty="0"/>
+          </a:p>
+        </p:txBody>
+      </p:sp>
+      <p:sp>
+        <p:nvSpPr>
+          <p:cNvPr id="12" name="Text 10"/>
+          <p:cNvSpPr/>
+          <p:nvPr/>
+        </p:nvSpPr>
+        <p:spPr>
+          <a:xfrm>
+            <a:off x="640080" y="3063240"/>
+            <a:ext cx="3566160" cy="1051560"/>
+          </a:xfrm>
+          <a:prstGeom prst="rect">
+            <a:avLst/>
+          </a:prstGeom>
+          <a:noFill/>
+          <a:ln/>
+        </p:spPr>
+        <p:txBody>
+          <a:bodyPr wrap="square" lIns="0" tIns="0" rIns="0" bIns="0" rtlCol="0" anchor="ctr"/>
+          <a:lstStyle/>
+          <a:p>
+            <a:pPr indent="0" marL="0">
+              <a:buNone/>
+            </a:pPr>
+            <a:r>
+              <a:rPr lang="en-US" sz="1300" dirty="0">
+                <a:solidFill>
+                  <a:srgbClr val="FFFFFF"/>
                 </a:solidFill>
                 <a:latin typeface="Arial" pitchFamily="34" charset="0"/>
                 <a:ea typeface="Arial" pitchFamily="34" charset="-122"/>
@@ -5997,58 +6592,65 @@
               </a:rPr>
               <a:t>Fill 100% of open technical roles within 45 days</a:t>
             </a:r>
-            <a:endParaRPr lang="en-US" sz="1500" dirty="0"/>
-          </a:p>
-        </p:txBody>
-      </p:sp>
-      <p:sp>
-        <p:nvSpPr>
-          <p:cNvPr id="12" name="Shape 10"/>
-          <p:cNvSpPr/>
-          <p:nvPr/>
-        </p:nvSpPr>
-        <p:spPr>
-          <a:xfrm>
-            <a:off x="4754880" y="2743200"/>
-            <a:ext cx="4023360" cy="1554480"/>
-          </a:xfrm>
-          <a:prstGeom prst="rect">
-            <a:avLst/>
+            <a:endParaRPr lang="en-US" sz="1300" dirty="0"/>
+          </a:p>
+        </p:txBody>
+      </p:sp>
+      <p:sp>
+        <p:nvSpPr>
+          <p:cNvPr id="13" name="Shape 11"/>
+          <p:cNvSpPr/>
+          <p:nvPr/>
+        </p:nvSpPr>
+        <p:spPr>
+          <a:xfrm>
+            <a:off x="4754880" y="2606040"/>
+            <a:ext cx="3931920" cy="1691640"/>
+          </a:xfrm>
+          <a:prstGeom prst="roundRect">
+            <a:avLst>
+              <a:gd name="adj" fmla="val 3243"/>
+            </a:avLst>
           </a:prstGeom>
           <a:solidFill>
-            <a:srgbClr val="111111"/>
+            <a:srgbClr val="1B2A4A"/>
           </a:solidFill>
-          <a:ln/>
-        </p:spPr>
-      </p:sp>
-      <p:sp>
-        <p:nvSpPr>
-          <p:cNvPr id="13" name="Text 11"/>
-          <p:cNvSpPr/>
-          <p:nvPr/>
-        </p:nvSpPr>
-        <p:spPr>
-          <a:xfrm>
-            <a:off x="4937760" y="2834640"/>
-            <a:ext cx="3657600" cy="228600"/>
-          </a:xfrm>
-          <a:prstGeom prst="rect">
-            <a:avLst/>
-          </a:prstGeom>
-          <a:noFill/>
-          <a:ln/>
-        </p:spPr>
-        <p:txBody>
-          <a:bodyPr wrap="square" lIns="0" tIns="0" rIns="0" bIns="0" rtlCol="0" anchor="ctr"/>
-          <a:lstStyle/>
-          <a:p>
-            <a:pPr indent="0" marL="0">
-              <a:buNone/>
-            </a:pPr>
-            <a:r>
-              <a:rPr lang="en-US" sz="1200" b="1" dirty="0">
-                <a:solidFill>
-                  <a:srgbClr val="AAAAAA"/>
+          <a:ln w="12700">
+            <a:solidFill>
+              <a:srgbClr val="1B2A4A"/>
+            </a:solidFill>
+            <a:prstDash val="solid"/>
+          </a:ln>
+        </p:spPr>
+      </p:sp>
+      <p:sp>
+        <p:nvSpPr>
+          <p:cNvPr id="14" name="Text 12"/>
+          <p:cNvSpPr/>
+          <p:nvPr/>
+        </p:nvSpPr>
+        <p:spPr>
+          <a:xfrm>
+            <a:off x="4937760" y="2743200"/>
+            <a:ext cx="3566160" cy="228600"/>
+          </a:xfrm>
+          <a:prstGeom prst="rect">
+            <a:avLst/>
+          </a:prstGeom>
+          <a:noFill/>
+          <a:ln/>
+        </p:spPr>
+        <p:txBody>
+          <a:bodyPr wrap="square" lIns="0" tIns="0" rIns="0" bIns="0" rtlCol="0" anchor="ctr"/>
+          <a:lstStyle/>
+          <a:p>
+            <a:pPr indent="0" marL="0">
+              <a:buNone/>
+            </a:pPr>
+            <a:r>
+              <a:rPr lang="en-US" sz="1100" b="1" dirty="0">
+                <a:solidFill>
+                  <a:srgbClr val="C9A227"/>
                 </a:solidFill>
                 <a:latin typeface="Arial" pitchFamily="34" charset="0"/>
                 <a:ea typeface="Arial" pitchFamily="34" charset="-122"/>
@@ -6056,38 +6658,38 @@
               </a:rPr>
               <a:t>AFTER</a:t>
             </a:r>
-            <a:endParaRPr lang="en-US" sz="1200" dirty="0"/>
-          </a:p>
-        </p:txBody>
-      </p:sp>
-      <p:sp>
-        <p:nvSpPr>
-          <p:cNvPr id="14" name="Text 12"/>
-          <p:cNvSpPr/>
-          <p:nvPr/>
-        </p:nvSpPr>
-        <p:spPr>
-          <a:xfrm>
-            <a:off x="4937760" y="3154680"/>
-            <a:ext cx="3657600" cy="1005840"/>
-          </a:xfrm>
-          <a:prstGeom prst="rect">
-            <a:avLst/>
-          </a:prstGeom>
-          <a:noFill/>
-          <a:ln/>
-        </p:spPr>
-        <p:txBody>
-          <a:bodyPr wrap="square" lIns="0" tIns="0" rIns="0" bIns="0" rtlCol="0" anchor="ctr"/>
-          <a:lstStyle/>
-          <a:p>
-            <a:pPr indent="0" marL="0">
-              <a:buNone/>
-            </a:pPr>
-            <a:r>
-              <a:rPr lang="en-US" sz="1400" dirty="0">
-                <a:solidFill>
-                  <a:srgbClr val="F5F5F5"/>
+            <a:endParaRPr lang="en-US" sz="1100" dirty="0"/>
+          </a:p>
+        </p:txBody>
+      </p:sp>
+      <p:sp>
+        <p:nvSpPr>
+          <p:cNvPr id="15" name="Text 13"/>
+          <p:cNvSpPr/>
+          <p:nvPr/>
+        </p:nvSpPr>
+        <p:spPr>
+          <a:xfrm>
+            <a:off x="4937760" y="3063240"/>
+            <a:ext cx="3566160" cy="1051560"/>
+          </a:xfrm>
+          <a:prstGeom prst="rect">
+            <a:avLst/>
+          </a:prstGeom>
+          <a:noFill/>
+          <a:ln/>
+        </p:spPr>
+        <p:txBody>
+          <a:bodyPr wrap="square" lIns="0" tIns="0" rIns="0" bIns="0" rtlCol="0" anchor="ctr"/>
+          <a:lstStyle/>
+          <a:p>
+            <a:pPr indent="0" marL="0">
+              <a:buNone/>
+            </a:pPr>
+            <a:r>
+              <a:rPr lang="en-US" sz="1300" dirty="0">
+                <a:solidFill>
+                  <a:srgbClr val="FFFFFF"/>
                 </a:solidFill>
                 <a:latin typeface="Arial" pitchFamily="34" charset="0"/>
                 <a:ea typeface="Arial" pitchFamily="34" charset="-122"/>
@@ -6095,38 +6697,38 @@
               </a:rPr>
               <a:t>Build and graduate internal or partnership pipelines that supply critical technical roles with American workers within 12 months</a:t>
             </a:r>
-            <a:endParaRPr lang="en-US" sz="1400" dirty="0"/>
-          </a:p>
-        </p:txBody>
-      </p:sp>
-      <p:sp>
-        <p:nvSpPr>
-          <p:cNvPr id="15" name="Text 13"/>
+            <a:endParaRPr lang="en-US" sz="1300" dirty="0"/>
+          </a:p>
+        </p:txBody>
+      </p:sp>
+      <p:sp>
+        <p:nvSpPr>
+          <p:cNvPr id="16" name="Text 14"/>
           <p:cNvSpPr/>
           <p:nvPr/>
         </p:nvSpPr>
         <p:spPr>
           <a:xfrm>
             <a:off x="457200" y="4800600"/>
-            <a:ext cx="5943600" cy="228600"/>
-          </a:xfrm>
-          <a:prstGeom prst="rect">
-            <a:avLst/>
-          </a:prstGeom>
-          <a:noFill/>
-          <a:ln/>
-        </p:spPr>
-        <p:txBody>
-          <a:bodyPr wrap="square" lIns="0" tIns="0" rIns="0" bIns="0" rtlCol="0" anchor="ctr"/>
-          <a:lstStyle/>
-          <a:p>
-            <a:pPr indent="0" marL="0">
-              <a:buNone/>
-            </a:pPr>
-            <a:r>
-              <a:rPr lang="en-US" sz="1000" dirty="0">
-                <a:solidFill>
-                  <a:srgbClr val="555555"/>
+            <a:ext cx="5943600" cy="256032"/>
+          </a:xfrm>
+          <a:prstGeom prst="rect">
+            <a:avLst/>
+          </a:prstGeom>
+          <a:noFill/>
+          <a:ln/>
+        </p:spPr>
+        <p:txBody>
+          <a:bodyPr wrap="square" lIns="0" tIns="0" rIns="0" bIns="0" rtlCol="0" anchor="ctr"/>
+          <a:lstStyle/>
+          <a:p>
+            <a:pPr indent="0" marL="0">
+              <a:buNone/>
+            </a:pPr>
+            <a:r>
+              <a:rPr lang="en-US" sz="1100" dirty="0">
+                <a:solidFill>
+                  <a:srgbClr val="6A6A6A"/>
                 </a:solidFill>
                 <a:latin typeface="Arial" pitchFamily="34" charset="0"/>
                 <a:ea typeface="Arial" pitchFamily="34" charset="-122"/>
@@ -6134,20 +6736,20 @@
               </a:rPr>
               <a:t>Joshua Konkle  |  Chief of Staff Strategist</a:t>
             </a:r>
-            <a:endParaRPr lang="en-US" sz="1000" dirty="0"/>
-          </a:p>
-        </p:txBody>
-      </p:sp>
-      <p:sp>
-        <p:nvSpPr>
-          <p:cNvPr id="16" name="Text 14"/>
-          <p:cNvSpPr/>
-          <p:nvPr/>
-        </p:nvSpPr>
-        <p:spPr>
-          <a:xfrm>
-            <a:off x="7772400" y="4800600"/>
-            <a:ext cx="914400" cy="228600"/>
+            <a:endParaRPr lang="en-US" sz="1100" dirty="0"/>
+          </a:p>
+        </p:txBody>
+      </p:sp>
+      <p:sp>
+        <p:nvSpPr>
+          <p:cNvPr id="17" name="Text 15"/>
+          <p:cNvSpPr/>
+          <p:nvPr/>
+        </p:nvSpPr>
+        <p:spPr>
+          <a:xfrm>
+            <a:off x="7498080" y="4800600"/>
+            <a:ext cx="1188720" cy="256032"/>
           </a:xfrm>
           <a:prstGeom prst="rect">
             <a:avLst/>
@@ -6163,9 +6765,9 @@
               <a:buNone/>
             </a:pPr>
             <a:r>
-              <a:rPr lang="en-US" sz="1000" dirty="0">
-                <a:solidFill>
-                  <a:srgbClr val="555555"/>
+              <a:rPr lang="en-US" sz="1100" dirty="0">
+                <a:solidFill>
+                  <a:srgbClr val="6A6A6A"/>
                 </a:solidFill>
                 <a:latin typeface="Arial" pitchFamily="34" charset="0"/>
                 <a:ea typeface="Arial" pitchFamily="34" charset="-122"/>
@@ -6173,7 +6775,7 @@
               </a:rPr>
               <a:t>8 / 12</a:t>
             </a:r>
-            <a:endParaRPr lang="en-US" sz="1000" dirty="0"/>
+            <a:endParaRPr lang="en-US" sz="1100" dirty="0"/>
           </a:p>
         </p:txBody>
       </p:sp>
@@ -6188,13 +6790,6 @@
 <file path=ppt/slides/slide9.xml><?xml version="1.0" encoding="utf-8"?>
 <p:sld xmlns:a="http://schemas.openxmlformats.org/drawingml/2006/main" xmlns:r="http://schemas.openxmlformats.org/officeDocument/2006/relationships" xmlns:p="http://schemas.openxmlformats.org/presentationml/2006/main">
   <p:cSld name="Slide 9">
-    <p:bg>
-      <p:bgPr>
-        <a:solidFill>
-          <a:srgbClr val="FFFFFF"/>
-        </a:solidFill>
-      </p:bgPr>
-    </p:bg>
     <p:spTree>
       <p:nvGrpSpPr>
         <p:cNvPr id="1" name=""/>
@@ -6211,32 +6806,57 @@
       </p:grpSpPr>
       <p:sp>
         <p:nvSpPr>
-          <p:cNvPr id="2" name="Text 0"/>
-          <p:cNvSpPr/>
-          <p:nvPr/>
-        </p:nvSpPr>
-        <p:spPr>
-          <a:xfrm>
-            <a:off x="457200" y="274320"/>
-            <a:ext cx="8229600" cy="457200"/>
-          </a:xfrm>
-          <a:prstGeom prst="rect">
-            <a:avLst/>
-          </a:prstGeom>
-          <a:noFill/>
-          <a:ln/>
-        </p:spPr>
-        <p:txBody>
-          <a:bodyPr wrap="square" lIns="0" tIns="0" rIns="0" bIns="0" rtlCol="0" anchor="ctr"/>
-          <a:lstStyle/>
-          <a:p>
-            <a:pPr indent="0" marL="0">
-              <a:buNone/>
-            </a:pPr>
-            <a:r>
-              <a:rPr lang="en-US" sz="2200" b="1" dirty="0">
-                <a:solidFill>
-                  <a:srgbClr val="1A1A1A"/>
+          <p:cNvPr id="2" name="Shape 0"/>
+          <p:cNvSpPr/>
+          <p:nvPr/>
+        </p:nvSpPr>
+        <p:spPr>
+          <a:xfrm>
+            <a:off x="0" y="0"/>
+            <a:ext cx="9144000" cy="5143500"/>
+          </a:xfrm>
+          <a:prstGeom prst="rect">
+            <a:avLst/>
+          </a:prstGeom>
+          <a:solidFill>
+            <a:srgbClr val="FFFFFF"/>
+          </a:solidFill>
+          <a:ln w="12700">
+            <a:solidFill>
+              <a:srgbClr val="FFFFFF"/>
+            </a:solidFill>
+            <a:prstDash val="solid"/>
+          </a:ln>
+        </p:spPr>
+      </p:sp>
+      <p:sp>
+        <p:nvSpPr>
+          <p:cNvPr id="3" name="Text 1"/>
+          <p:cNvSpPr/>
+          <p:nvPr/>
+        </p:nvSpPr>
+        <p:spPr>
+          <a:xfrm>
+            <a:off x="457200" y="228600"/>
+            <a:ext cx="8229600" cy="365760"/>
+          </a:xfrm>
+          <a:prstGeom prst="rect">
+            <a:avLst/>
+          </a:prstGeom>
+          <a:noFill/>
+          <a:ln/>
+        </p:spPr>
+        <p:txBody>
+          <a:bodyPr wrap="square" lIns="0" tIns="0" rIns="0" bIns="0" rtlCol="0" anchor="ctr"/>
+          <a:lstStyle/>
+          <a:p>
+            <a:pPr indent="0" marL="0">
+              <a:buNone/>
+            </a:pPr>
+            <a:r>
+              <a:rPr lang="en-US" sz="2000" b="1" dirty="0">
+                <a:solidFill>
+                  <a:srgbClr val="1B2A4A"/>
                 </a:solidFill>
                 <a:latin typeface="Arial" pitchFamily="34" charset="0"/>
                 <a:ea typeface="Arial" pitchFamily="34" charset="-122"/>
@@ -6244,196 +6864,228 @@
               </a:rPr>
               <a:t>Innovation Example – Robotics &amp; Higher-Skill Work</a:t>
             </a:r>
-            <a:endParaRPr lang="en-US" sz="2200" dirty="0"/>
-          </a:p>
-        </p:txBody>
-      </p:sp>
-      <p:sp>
-        <p:nvSpPr>
-          <p:cNvPr id="3" name="Shape 1"/>
-          <p:cNvSpPr/>
-          <p:nvPr/>
-        </p:nvSpPr>
-        <p:spPr>
-          <a:xfrm>
-            <a:off x="457200" y="1005840"/>
-            <a:ext cx="8229600" cy="3200400"/>
-          </a:xfrm>
-          <a:prstGeom prst="rect">
-            <a:avLst/>
+            <a:endParaRPr lang="en-US" sz="2000" dirty="0"/>
+          </a:p>
+        </p:txBody>
+      </p:sp>
+      <p:sp>
+        <p:nvSpPr>
+          <p:cNvPr id="4" name="Text 2"/>
+          <p:cNvSpPr/>
+          <p:nvPr/>
+        </p:nvSpPr>
+        <p:spPr>
+          <a:xfrm>
+            <a:off x="457200" y="777240"/>
+            <a:ext cx="8229600" cy="640080"/>
+          </a:xfrm>
+          <a:prstGeom prst="rect">
+            <a:avLst/>
+          </a:prstGeom>
+          <a:noFill/>
+          <a:ln/>
+        </p:spPr>
+        <p:txBody>
+          <a:bodyPr wrap="square" lIns="0" tIns="0" rIns="0" bIns="0" rtlCol="0" anchor="ctr"/>
+          <a:lstStyle/>
+          <a:p>
+            <a:pPr indent="0" marL="0">
+              <a:buNone/>
+            </a:pPr>
+            <a:r>
+              <a:rPr lang="en-US" sz="1400" dirty="0">
+                <a:solidFill>
+                  <a:srgbClr val="2A2A2A"/>
+                </a:solidFill>
+                <a:latin typeface="Arial" pitchFamily="34" charset="0"/>
+                <a:ea typeface="Arial" pitchFamily="34" charset="-122"/>
+                <a:cs typeface="Arial" pitchFamily="34" charset="-120"/>
+              </a:rPr>
+              <a:t>Agricultural or industrial robotics that handle repetitive physical tasks can reduce dependence on low-skill temporary labor while creating higher-skill American roles in:</a:t>
+            </a:r>
+            <a:endParaRPr lang="en-US" sz="1400" dirty="0"/>
+          </a:p>
+        </p:txBody>
+      </p:sp>
+      <p:sp>
+        <p:nvSpPr>
+          <p:cNvPr id="5" name="Text 3"/>
+          <p:cNvSpPr/>
+          <p:nvPr/>
+        </p:nvSpPr>
+        <p:spPr>
+          <a:xfrm>
+            <a:off x="640080" y="1554480"/>
+            <a:ext cx="7772400" cy="411480"/>
+          </a:xfrm>
+          <a:prstGeom prst="rect">
+            <a:avLst/>
+          </a:prstGeom>
+          <a:noFill/>
+          <a:ln/>
+        </p:spPr>
+        <p:txBody>
+          <a:bodyPr wrap="square" lIns="0" tIns="0" rIns="0" bIns="0" rtlCol="0" anchor="ctr"/>
+          <a:lstStyle/>
+          <a:p>
+            <a:pPr indent="0" marL="0">
+              <a:buNone/>
+            </a:pPr>
+            <a:r>
+              <a:rPr lang="en-US" sz="1500" b="1" dirty="0">
+                <a:solidFill>
+                  <a:srgbClr val="1B2A4A"/>
+                </a:solidFill>
+                <a:latin typeface="Arial" pitchFamily="34" charset="0"/>
+                <a:ea typeface="Arial" pitchFamily="34" charset="-122"/>
+                <a:cs typeface="Arial" pitchFamily="34" charset="-120"/>
+              </a:rPr>
+              <a:t>→  Robotics engineering &amp; systems integration</a:t>
+            </a:r>
+            <a:endParaRPr lang="en-US" sz="1500" dirty="0"/>
+          </a:p>
+        </p:txBody>
+      </p:sp>
+      <p:sp>
+        <p:nvSpPr>
+          <p:cNvPr id="6" name="Text 4"/>
+          <p:cNvSpPr/>
+          <p:nvPr/>
+        </p:nvSpPr>
+        <p:spPr>
+          <a:xfrm>
+            <a:off x="640080" y="2057400"/>
+            <a:ext cx="7772400" cy="411480"/>
+          </a:xfrm>
+          <a:prstGeom prst="rect">
+            <a:avLst/>
+          </a:prstGeom>
+          <a:noFill/>
+          <a:ln/>
+        </p:spPr>
+        <p:txBody>
+          <a:bodyPr wrap="square" lIns="0" tIns="0" rIns="0" bIns="0" rtlCol="0" anchor="ctr"/>
+          <a:lstStyle/>
+          <a:p>
+            <a:pPr indent="0" marL="0">
+              <a:buNone/>
+            </a:pPr>
+            <a:r>
+              <a:rPr lang="en-US" sz="1500" b="1" dirty="0">
+                <a:solidFill>
+                  <a:srgbClr val="1B2A4A"/>
+                </a:solidFill>
+                <a:latin typeface="Arial" pitchFamily="34" charset="0"/>
+                <a:ea typeface="Arial" pitchFamily="34" charset="-122"/>
+                <a:cs typeface="Arial" pitchFamily="34" charset="-120"/>
+              </a:rPr>
+              <a:t>→  Maintenance and continuous improvement</a:t>
+            </a:r>
+            <a:endParaRPr lang="en-US" sz="1500" dirty="0"/>
+          </a:p>
+        </p:txBody>
+      </p:sp>
+      <p:sp>
+        <p:nvSpPr>
+          <p:cNvPr id="7" name="Text 5"/>
+          <p:cNvSpPr/>
+          <p:nvPr/>
+        </p:nvSpPr>
+        <p:spPr>
+          <a:xfrm>
+            <a:off x="640080" y="2560320"/>
+            <a:ext cx="7772400" cy="411480"/>
+          </a:xfrm>
+          <a:prstGeom prst="rect">
+            <a:avLst/>
+          </a:prstGeom>
+          <a:noFill/>
+          <a:ln/>
+        </p:spPr>
+        <p:txBody>
+          <a:bodyPr wrap="square" lIns="0" tIns="0" rIns="0" bIns="0" rtlCol="0" anchor="ctr"/>
+          <a:lstStyle/>
+          <a:p>
+            <a:pPr indent="0" marL="0">
+              <a:buNone/>
+            </a:pPr>
+            <a:r>
+              <a:rPr lang="en-US" sz="1500" b="1" dirty="0">
+                <a:solidFill>
+                  <a:srgbClr val="1B2A4A"/>
+                </a:solidFill>
+                <a:latin typeface="Arial" pitchFamily="34" charset="0"/>
+                <a:ea typeface="Arial" pitchFamily="34" charset="-122"/>
+                <a:cs typeface="Arial" pitchFamily="34" charset="-120"/>
+              </a:rPr>
+              <a:t>→  Process control and optimization</a:t>
+            </a:r>
+            <a:endParaRPr lang="en-US" sz="1500" dirty="0"/>
+          </a:p>
+        </p:txBody>
+      </p:sp>
+      <p:sp>
+        <p:nvSpPr>
+          <p:cNvPr id="8" name="Shape 6"/>
+          <p:cNvSpPr/>
+          <p:nvPr/>
+        </p:nvSpPr>
+        <p:spPr>
+          <a:xfrm>
+            <a:off x="457200" y="3200400"/>
+            <a:ext cx="8229600" cy="1097280"/>
+          </a:xfrm>
+          <a:prstGeom prst="roundRect">
+            <a:avLst>
+              <a:gd name="adj" fmla="val 5000"/>
+            </a:avLst>
           </a:prstGeom>
           <a:solidFill>
-            <a:srgbClr val="F7F7F7"/>
+            <a:srgbClr val="F7F5F0"/>
           </a:solidFill>
-          <a:ln/>
-        </p:spPr>
-      </p:sp>
-      <p:sp>
-        <p:nvSpPr>
-          <p:cNvPr id="4" name="Text 2"/>
-          <p:cNvSpPr/>
-          <p:nvPr/>
-        </p:nvSpPr>
-        <p:spPr>
-          <a:xfrm>
-            <a:off x="731520" y="1234440"/>
-            <a:ext cx="7680960" cy="731520"/>
-          </a:xfrm>
-          <a:prstGeom prst="rect">
-            <a:avLst/>
-          </a:prstGeom>
-          <a:noFill/>
-          <a:ln/>
-        </p:spPr>
-        <p:txBody>
-          <a:bodyPr wrap="square" lIns="0" tIns="0" rIns="0" bIns="0" rtlCol="0" anchor="ctr"/>
-          <a:lstStyle/>
-          <a:p>
-            <a:pPr indent="0" marL="0">
-              <a:buNone/>
-            </a:pPr>
-            <a:r>
-              <a:rPr lang="en-US" sz="1500" dirty="0">
-                <a:solidFill>
-                  <a:srgbClr val="1A1A1A"/>
-                </a:solidFill>
-                <a:latin typeface="Arial" pitchFamily="34" charset="0"/>
-                <a:ea typeface="Arial" pitchFamily="34" charset="-122"/>
-                <a:cs typeface="Arial" pitchFamily="34" charset="-120"/>
-              </a:rPr>
-              <a:t>Agricultural or industrial robotics that handle repetitive physical tasks can reduce dependence on low-skill temporary labor while creating higher-skill American roles in:</a:t>
-            </a:r>
-            <a:endParaRPr lang="en-US" sz="1500" dirty="0"/>
-          </a:p>
-        </p:txBody>
-      </p:sp>
-      <p:sp>
-        <p:nvSpPr>
-          <p:cNvPr id="5" name="Text 3"/>
-          <p:cNvSpPr/>
-          <p:nvPr/>
-        </p:nvSpPr>
-        <p:spPr>
-          <a:xfrm>
-            <a:off x="731520" y="2103120"/>
-            <a:ext cx="7680960" cy="365760"/>
-          </a:xfrm>
-          <a:prstGeom prst="rect">
-            <a:avLst/>
-          </a:prstGeom>
-          <a:noFill/>
-          <a:ln/>
-        </p:spPr>
-        <p:txBody>
-          <a:bodyPr wrap="square" lIns="0" tIns="0" rIns="0" bIns="0" rtlCol="0" anchor="ctr"/>
-          <a:lstStyle/>
-          <a:p>
-            <a:pPr indent="0" marL="0">
-              <a:buNone/>
-            </a:pPr>
-            <a:r>
-              <a:rPr lang="en-US" sz="1500" dirty="0">
-                <a:solidFill>
-                  <a:srgbClr val="1A1A1A"/>
-                </a:solidFill>
-                <a:latin typeface="Arial" pitchFamily="34" charset="0"/>
-                <a:ea typeface="Arial" pitchFamily="34" charset="-122"/>
-                <a:cs typeface="Arial" pitchFamily="34" charset="-120"/>
-              </a:rPr>
-              <a:t>→  Robotics engineering &amp; systems integration</a:t>
-            </a:r>
-            <a:endParaRPr lang="en-US" sz="1500" dirty="0"/>
-          </a:p>
-        </p:txBody>
-      </p:sp>
-      <p:sp>
-        <p:nvSpPr>
-          <p:cNvPr id="6" name="Text 4"/>
-          <p:cNvSpPr/>
-          <p:nvPr/>
-        </p:nvSpPr>
-        <p:spPr>
-          <a:xfrm>
-            <a:off x="731520" y="2514600"/>
-            <a:ext cx="7680960" cy="365760"/>
-          </a:xfrm>
-          <a:prstGeom prst="rect">
-            <a:avLst/>
-          </a:prstGeom>
-          <a:noFill/>
-          <a:ln/>
-        </p:spPr>
-        <p:txBody>
-          <a:bodyPr wrap="square" lIns="0" tIns="0" rIns="0" bIns="0" rtlCol="0" anchor="ctr"/>
-          <a:lstStyle/>
-          <a:p>
-            <a:pPr indent="0" marL="0">
-              <a:buNone/>
-            </a:pPr>
-            <a:r>
-              <a:rPr lang="en-US" sz="1500" dirty="0">
-                <a:solidFill>
-                  <a:srgbClr val="1A1A1A"/>
-                </a:solidFill>
-                <a:latin typeface="Arial" pitchFamily="34" charset="0"/>
-                <a:ea typeface="Arial" pitchFamily="34" charset="-122"/>
-                <a:cs typeface="Arial" pitchFamily="34" charset="-120"/>
-              </a:rPr>
-              <a:t>→  Maintenance and continuous improvement</a:t>
-            </a:r>
-            <a:endParaRPr lang="en-US" sz="1500" dirty="0"/>
-          </a:p>
-        </p:txBody>
-      </p:sp>
-      <p:sp>
-        <p:nvSpPr>
-          <p:cNvPr id="7" name="Text 5"/>
-          <p:cNvSpPr/>
-          <p:nvPr/>
-        </p:nvSpPr>
-        <p:spPr>
-          <a:xfrm>
-            <a:off x="731520" y="2926080"/>
-            <a:ext cx="7680960" cy="365760"/>
-          </a:xfrm>
-          <a:prstGeom prst="rect">
-            <a:avLst/>
-          </a:prstGeom>
-          <a:noFill/>
-          <a:ln/>
-        </p:spPr>
-        <p:txBody>
-          <a:bodyPr wrap="square" lIns="0" tIns="0" rIns="0" bIns="0" rtlCol="0" anchor="ctr"/>
-          <a:lstStyle/>
-          <a:p>
-            <a:pPr indent="0" marL="0">
-              <a:buNone/>
-            </a:pPr>
-            <a:r>
-              <a:rPr lang="en-US" sz="1500" dirty="0">
-                <a:solidFill>
-                  <a:srgbClr val="1A1A1A"/>
-                </a:solidFill>
-                <a:latin typeface="Arial" pitchFamily="34" charset="0"/>
-                <a:ea typeface="Arial" pitchFamily="34" charset="-122"/>
-                <a:cs typeface="Arial" pitchFamily="34" charset="-120"/>
-              </a:rPr>
-              <a:t>→  Process control and optimization</a:t>
-            </a:r>
-            <a:endParaRPr lang="en-US" sz="1500" dirty="0"/>
-          </a:p>
-        </p:txBody>
-      </p:sp>
-      <p:sp>
-        <p:nvSpPr>
-          <p:cNvPr id="8" name="Text 6"/>
-          <p:cNvSpPr/>
-          <p:nvPr/>
-        </p:nvSpPr>
-        <p:spPr>
-          <a:xfrm>
-            <a:off x="731520" y="3474720"/>
-            <a:ext cx="7680960" cy="502920"/>
+          <a:ln w="12700">
+            <a:solidFill>
+              <a:srgbClr val="F7F5F0"/>
+            </a:solidFill>
+            <a:prstDash val="solid"/>
+          </a:ln>
+        </p:spPr>
+      </p:sp>
+      <p:sp>
+        <p:nvSpPr>
+          <p:cNvPr id="9" name="Shape 7"/>
+          <p:cNvSpPr/>
+          <p:nvPr/>
+        </p:nvSpPr>
+        <p:spPr>
+          <a:xfrm>
+            <a:off x="457200" y="3200400"/>
+            <a:ext cx="91440" cy="1097280"/>
+          </a:xfrm>
+          <a:prstGeom prst="rect">
+            <a:avLst/>
+          </a:prstGeom>
+          <a:solidFill>
+            <a:srgbClr val="C9A227"/>
+          </a:solidFill>
+          <a:ln w="12700">
+            <a:solidFill>
+              <a:srgbClr val="C9A227"/>
+            </a:solidFill>
+            <a:prstDash val="solid"/>
+          </a:ln>
+        </p:spPr>
+      </p:sp>
+      <p:sp>
+        <p:nvSpPr>
+          <p:cNvPr id="10" name="Text 8"/>
+          <p:cNvSpPr/>
+          <p:nvPr/>
+        </p:nvSpPr>
+        <p:spPr>
+          <a:xfrm>
+            <a:off x="777240" y="3383280"/>
+            <a:ext cx="7680960" cy="777240"/>
           </a:xfrm>
           <a:prstGeom prst="rect">
             <a:avLst/>
@@ -6451,7 +7103,7 @@
             <a:r>
               <a:rPr lang="en-US" sz="1400" dirty="0">
                 <a:solidFill>
-                  <a:srgbClr val="555555"/>
+                  <a:srgbClr val="2A2A2A"/>
                 </a:solidFill>
                 <a:latin typeface="Arial" pitchFamily="34" charset="0"/>
                 <a:ea typeface="Arial" pitchFamily="34" charset="-122"/>
@@ -6465,32 +7117,32 @@
       </p:sp>
       <p:sp>
         <p:nvSpPr>
-          <p:cNvPr id="9" name="Text 7"/>
+          <p:cNvPr id="11" name="Text 9"/>
           <p:cNvSpPr/>
           <p:nvPr/>
         </p:nvSpPr>
         <p:spPr>
           <a:xfrm>
             <a:off x="457200" y="4800600"/>
-            <a:ext cx="5943600" cy="228600"/>
-          </a:xfrm>
-          <a:prstGeom prst="rect">
-            <a:avLst/>
-          </a:prstGeom>
-          <a:noFill/>
-          <a:ln/>
-        </p:spPr>
-        <p:txBody>
-          <a:bodyPr wrap="square" lIns="0" tIns="0" rIns="0" bIns="0" rtlCol="0" anchor="ctr"/>
-          <a:lstStyle/>
-          <a:p>
-            <a:pPr indent="0" marL="0">
-              <a:buNone/>
-            </a:pPr>
-            <a:r>
-              <a:rPr lang="en-US" sz="1000" dirty="0">
-                <a:solidFill>
-                  <a:srgbClr val="555555"/>
+            <a:ext cx="5943600" cy="256032"/>
+          </a:xfrm>
+          <a:prstGeom prst="rect">
+            <a:avLst/>
+          </a:prstGeom>
+          <a:noFill/>
+          <a:ln/>
+        </p:spPr>
+        <p:txBody>
+          <a:bodyPr wrap="square" lIns="0" tIns="0" rIns="0" bIns="0" rtlCol="0" anchor="ctr"/>
+          <a:lstStyle/>
+          <a:p>
+            <a:pPr indent="0" marL="0">
+              <a:buNone/>
+            </a:pPr>
+            <a:r>
+              <a:rPr lang="en-US" sz="1100" dirty="0">
+                <a:solidFill>
+                  <a:srgbClr val="6A6A6A"/>
                 </a:solidFill>
                 <a:latin typeface="Arial" pitchFamily="34" charset="0"/>
                 <a:ea typeface="Arial" pitchFamily="34" charset="-122"/>
@@ -6498,20 +7150,20 @@
               </a:rPr>
               <a:t>Joshua Konkle  |  Chief of Staff Strategist</a:t>
             </a:r>
-            <a:endParaRPr lang="en-US" sz="1000" dirty="0"/>
-          </a:p>
-        </p:txBody>
-      </p:sp>
-      <p:sp>
-        <p:nvSpPr>
-          <p:cNvPr id="10" name="Text 8"/>
-          <p:cNvSpPr/>
-          <p:nvPr/>
-        </p:nvSpPr>
-        <p:spPr>
-          <a:xfrm>
-            <a:off x="7772400" y="4800600"/>
-            <a:ext cx="914400" cy="228600"/>
+            <a:endParaRPr lang="en-US" sz="1100" dirty="0"/>
+          </a:p>
+        </p:txBody>
+      </p:sp>
+      <p:sp>
+        <p:nvSpPr>
+          <p:cNvPr id="12" name="Text 10"/>
+          <p:cNvSpPr/>
+          <p:nvPr/>
+        </p:nvSpPr>
+        <p:spPr>
+          <a:xfrm>
+            <a:off x="7498080" y="4800600"/>
+            <a:ext cx="1188720" cy="256032"/>
           </a:xfrm>
           <a:prstGeom prst="rect">
             <a:avLst/>
@@ -6527,9 +7179,9 @@
               <a:buNone/>
             </a:pPr>
             <a:r>
-              <a:rPr lang="en-US" sz="1000" dirty="0">
-                <a:solidFill>
-                  <a:srgbClr val="555555"/>
+              <a:rPr lang="en-US" sz="1100" dirty="0">
+                <a:solidFill>
+                  <a:srgbClr val="6A6A6A"/>
                 </a:solidFill>
                 <a:latin typeface="Arial" pitchFamily="34" charset="0"/>
                 <a:ea typeface="Arial" pitchFamily="34" charset="-122"/>
@@ -6537,7 +7189,7 @@
               </a:rPr>
               <a:t>9 / 12</a:t>
             </a:r>
-            <a:endParaRPr lang="en-US" sz="1000" dirty="0"/>
+            <a:endParaRPr lang="en-US" sz="1100" dirty="0"/>
           </a:p>
         </p:txBody>
       </p:sp>
